--- a/decks/Day 2/Day2-Section4-MCP-Servers-CSharp.pptx
+++ b/decks/Day 2/Day2-Section4-MCP-Servers-CSharp.pptx
@@ -17,10 +17,7 @@
     <p:sldId id="265" r:id="rId11"/>
     <p:sldId id="266" r:id="rId12"/>
   </p:sldIdLst>
-  <p:notesMasterIdLst>
-    <p:notesMasterId r:id="rId13"/>
-  </p:notesMasterIdLst>
-  <p:sldSz cx="9144000" cy="5143500"/>
+  <p:sldSz cx="9144000" cy="5143500" type="screen16x9"/>
   <p:notesSz cx="5143500" cy="9144000"/>
   <p:defaultTextStyle>
     <a:lvl1pPr marL="0" algn="l" defTabSz="914400" rtl="0" eaLnBrk="1" latinLnBrk="0" hangingPunct="1">
@@ -114,356 +111,12 @@
       </a:defRPr>
     </a:lvl9pPr>
   </p:defaultTextStyle>
+  <p:extLst>
+    <p:ext uri="{EFAFB233-063F-42B5-8137-9DF3F51BA10A}">
+      <p15:sldGuideLst xmlns:p15="http://schemas.microsoft.com/office/powerpoint/2012/main"/>
+    </p:ext>
+  </p:extLst>
 </p:presentation>
-</file>
-
-<file path=ppt/notesMasters/notesMaster1.xml><?xml version="1.0" encoding="utf-8"?>
-<p:notesMaster xmlns:a="http://schemas.openxmlformats.org/drawingml/2006/main" xmlns:r="http://schemas.openxmlformats.org/officeDocument/2006/relationships" xmlns:p="http://schemas.openxmlformats.org/presentationml/2006/main">
-  <p:cSld>
-    <p:bg>
-      <p:bgRef idx="1001">
-        <a:schemeClr val="bg1"/>
-      </p:bgRef>
-    </p:bg>
-    <p:spTree>
-      <p:nvGrpSpPr>
-        <p:cNvPr id="1" name=""/>
-        <p:cNvGrpSpPr/>
-        <p:nvPr/>
-      </p:nvGrpSpPr>
-      <p:grpSpPr>
-        <a:xfrm>
-          <a:off x="0" y="0"/>
-          <a:ext cx="0" cy="0"/>
-          <a:chOff x="0" y="0"/>
-          <a:chExt cx="0" cy="0"/>
-        </a:xfrm>
-      </p:grpSpPr>
-      <p:sp>
-        <p:nvSpPr>
-          <p:cNvPr id="2" name="Header Placeholder 1"/>
-          <p:cNvSpPr>
-            <a:spLocks noGrp="1"/>
-          </p:cNvSpPr>
-          <p:nvPr>
-            <p:ph type="hdr" sz="quarter"/>
-          </p:nvPr>
-        </p:nvSpPr>
-        <p:spPr>
-          <a:xfrm>
-            <a:off x="0" y="0"/>
-            <a:ext cx="2971800" cy="458788"/>
-          </a:xfrm>
-          <a:prstGeom prst="rect">
-            <a:avLst/>
-          </a:prstGeom>
-        </p:spPr>
-        <p:txBody>
-          <a:bodyPr vert="horz" lIns="91440" tIns="45720" rIns="91440" bIns="45720" rtlCol="0"/>
-          <a:lstStyle>
-            <a:lvl1pPr algn="l">
-              <a:defRPr sz="1200"/>
-            </a:lvl1pPr>
-          </a:lstStyle>
-          <a:p>
-            <a:endParaRPr lang="en-US"/>
-          </a:p>
-        </p:txBody>
-      </p:sp>
-      <p:sp>
-        <p:nvSpPr>
-          <p:cNvPr id="3" name="Date Placeholder 2"/>
-          <p:cNvSpPr>
-            <a:spLocks noGrp="1"/>
-          </p:cNvSpPr>
-          <p:nvPr>
-            <p:ph type="dt" idx="1"/>
-          </p:nvPr>
-        </p:nvSpPr>
-        <p:spPr>
-          <a:xfrm>
-            <a:off x="3884613" y="0"/>
-            <a:ext cx="2971800" cy="458788"/>
-          </a:xfrm>
-          <a:prstGeom prst="rect">
-            <a:avLst/>
-          </a:prstGeom>
-        </p:spPr>
-        <p:txBody>
-          <a:bodyPr vert="horz" lIns="91440" tIns="45720" rIns="91440" bIns="45720" rtlCol="0"/>
-          <a:lstStyle>
-            <a:lvl1pPr algn="r">
-              <a:defRPr sz="1200"/>
-            </a:lvl1pPr>
-          </a:lstStyle>
-          <a:p>
-            <a:fld id="{5282F153-3F37-0F45-9E97-73ACFA13230C}" type="datetimeFigureOut">
-              <a:rPr lang="en-US"/>
-              <a:t>7/23/19</a:t>
-            </a:fld>
-            <a:endParaRPr lang="en-US"/>
-          </a:p>
-        </p:txBody>
-      </p:sp>
-      <p:sp>
-        <p:nvSpPr>
-          <p:cNvPr id="4" name="Slide Image Placeholder 3"/>
-          <p:cNvSpPr>
-            <a:spLocks noGrp="1" noRot="1" noChangeAspect="1"/>
-          </p:cNvSpPr>
-          <p:nvPr>
-            <p:ph type="sldImg" idx="2"/>
-          </p:nvPr>
-        </p:nvSpPr>
-        <p:spPr>
-          <a:xfrm>
-            <a:off x="685800" y="1143000"/>
-            <a:ext cx="5486400" cy="3086100"/>
-          </a:xfrm>
-          <a:prstGeom prst="rect">
-            <a:avLst/>
-          </a:prstGeom>
-          <a:noFill/>
-          <a:ln w="12700">
-            <a:solidFill>
-              <a:prstClr val="black"/>
-            </a:solidFill>
-          </a:ln>
-        </p:spPr>
-        <p:txBody>
-          <a:bodyPr vert="horz" lIns="91440" tIns="45720" rIns="91440" bIns="45720" rtlCol="0" anchor="ctr"/>
-          <a:lstStyle/>
-          <a:p>
-            <a:endParaRPr lang="en-US"/>
-          </a:p>
-        </p:txBody>
-      </p:sp>
-      <p:sp>
-        <p:nvSpPr>
-          <p:cNvPr id="5" name="Notes Placeholder 4"/>
-          <p:cNvSpPr>
-            <a:spLocks noGrp="1"/>
-          </p:cNvSpPr>
-          <p:nvPr>
-            <p:ph type="body" sz="quarter" idx="3"/>
-          </p:nvPr>
-        </p:nvSpPr>
-        <p:spPr>
-          <a:xfrm>
-            <a:off x="685800" y="4400550"/>
-            <a:ext cx="5486400" cy="3600450"/>
-          </a:xfrm>
-          <a:prstGeom prst="rect">
-            <a:avLst/>
-          </a:prstGeom>
-        </p:spPr>
-        <p:txBody>
-          <a:bodyPr vert="horz" lIns="91440" tIns="45720" rIns="91440" bIns="45720" rtlCol="0"/>
-          <a:lstStyle/>
-          <a:p>
-            <a:pPr lvl="0"/>
-            <a:r>
-              <a:rPr lang="en-US"/>
-              <a:t>Click to edit Master text styles</a:t>
-            </a:r>
-          </a:p>
-          <a:p>
-            <a:pPr lvl="1"/>
-            <a:r>
-              <a:rPr lang="en-US"/>
-              <a:t>Second level</a:t>
-            </a:r>
-          </a:p>
-          <a:p>
-            <a:pPr lvl="2"/>
-            <a:r>
-              <a:rPr lang="en-US"/>
-              <a:t>Third level</a:t>
-            </a:r>
-          </a:p>
-          <a:p>
-            <a:pPr lvl="3"/>
-            <a:r>
-              <a:rPr lang="en-US"/>
-              <a:t>Fourth level</a:t>
-            </a:r>
-          </a:p>
-          <a:p>
-            <a:pPr lvl="4"/>
-            <a:r>
-              <a:rPr lang="en-US"/>
-              <a:t>Fifth level</a:t>
-            </a:r>
-          </a:p>
-        </p:txBody>
-      </p:sp>
-      <p:sp>
-        <p:nvSpPr>
-          <p:cNvPr id="6" name="Footer Placeholder 5"/>
-          <p:cNvSpPr>
-            <a:spLocks noGrp="1"/>
-          </p:cNvSpPr>
-          <p:nvPr>
-            <p:ph type="ftr" sz="quarter" idx="4"/>
-          </p:nvPr>
-        </p:nvSpPr>
-        <p:spPr>
-          <a:xfrm>
-            <a:off x="0" y="8685213"/>
-            <a:ext cx="2971800" cy="458787"/>
-          </a:xfrm>
-          <a:prstGeom prst="rect">
-            <a:avLst/>
-          </a:prstGeom>
-        </p:spPr>
-        <p:txBody>
-          <a:bodyPr vert="horz" lIns="91440" tIns="45720" rIns="91440" bIns="45720" rtlCol="0" anchor="b"/>
-          <a:lstStyle>
-            <a:lvl1pPr algn="l">
-              <a:defRPr sz="1200"/>
-            </a:lvl1pPr>
-          </a:lstStyle>
-          <a:p>
-            <a:endParaRPr lang="en-US"/>
-          </a:p>
-        </p:txBody>
-      </p:sp>
-      <p:sp>
-        <p:nvSpPr>
-          <p:cNvPr id="7" name="Slide Number Placeholder 6"/>
-          <p:cNvSpPr>
-            <a:spLocks noGrp="1"/>
-          </p:cNvSpPr>
-          <p:nvPr>
-            <p:ph type="sldNum" sz="quarter" idx="5"/>
-          </p:nvPr>
-        </p:nvSpPr>
-        <p:spPr>
-          <a:xfrm>
-            <a:off x="3884613" y="8685213"/>
-            <a:ext cx="2971800" cy="458787"/>
-          </a:xfrm>
-          <a:prstGeom prst="rect">
-            <a:avLst/>
-          </a:prstGeom>
-        </p:spPr>
-        <p:txBody>
-          <a:bodyPr vert="horz" lIns="91440" tIns="45720" rIns="91440" bIns="45720" rtlCol="0" anchor="b"/>
-          <a:lstStyle>
-            <a:lvl1pPr algn="r">
-              <a:defRPr sz="1200"/>
-            </a:lvl1pPr>
-          </a:lstStyle>
-          <a:p>
-            <a:fld id="{CE5E9CC1-C706-0F49-92D6-E571CC5EEA8F}" type="slidenum">
-              <a:rPr lang="en-US"/>
-              <a:t>‹#›</a:t>
-            </a:fld>
-            <a:endParaRPr lang="en-US"/>
-          </a:p>
-        </p:txBody>
-      </p:sp>
-    </p:spTree>
-    <p:extLst>
-      <p:ext uri="{BB962C8B-B14F-4D97-AF65-F5344CB8AC3E}">
-        <p14:creationId xmlns:p14="http://schemas.microsoft.com/office/powerpoint/2010/main" val="1024086991"/>
-      </p:ext>
-    </p:extLst>
-  </p:cSld>
-  <p:clrMap bg1="lt1" tx1="dk1" bg2="lt2" tx2="dk2" accent1="accent1" accent2="accent2" accent3="accent3" accent4="accent4" accent5="accent5" accent6="accent6" hlink="hlink" folHlink="folHlink"/>
-  <p:notesStyle>
-    <a:lvl1pPr marL="0" algn="l" defTabSz="914400" rtl="0" eaLnBrk="1" latinLnBrk="0" hangingPunct="1">
-      <a:defRPr sz="1200" kern="1200">
-        <a:solidFill>
-          <a:schemeClr val="tx1"/>
-        </a:solidFill>
-        <a:latin typeface="+mn-lt"/>
-        <a:ea typeface="+mn-ea"/>
-        <a:cs typeface="+mn-cs"/>
-      </a:defRPr>
-    </a:lvl1pPr>
-    <a:lvl2pPr marL="457200" algn="l" defTabSz="914400" rtl="0" eaLnBrk="1" latinLnBrk="0" hangingPunct="1">
-      <a:defRPr sz="1200" kern="1200">
-        <a:solidFill>
-          <a:schemeClr val="tx1"/>
-        </a:solidFill>
-        <a:latin typeface="+mn-lt"/>
-        <a:ea typeface="+mn-ea"/>
-        <a:cs typeface="+mn-cs"/>
-      </a:defRPr>
-    </a:lvl2pPr>
-    <a:lvl3pPr marL="914400" algn="l" defTabSz="914400" rtl="0" eaLnBrk="1" latinLnBrk="0" hangingPunct="1">
-      <a:defRPr sz="1200" kern="1200">
-        <a:solidFill>
-          <a:schemeClr val="tx1"/>
-        </a:solidFill>
-        <a:latin typeface="+mn-lt"/>
-        <a:ea typeface="+mn-ea"/>
-        <a:cs typeface="+mn-cs"/>
-      </a:defRPr>
-    </a:lvl3pPr>
-    <a:lvl4pPr marL="1371600" algn="l" defTabSz="914400" rtl="0" eaLnBrk="1" latinLnBrk="0" hangingPunct="1">
-      <a:defRPr sz="1200" kern="1200">
-        <a:solidFill>
-          <a:schemeClr val="tx1"/>
-        </a:solidFill>
-        <a:latin typeface="+mn-lt"/>
-        <a:ea typeface="+mn-ea"/>
-        <a:cs typeface="+mn-cs"/>
-      </a:defRPr>
-    </a:lvl4pPr>
-    <a:lvl5pPr marL="1828800" algn="l" defTabSz="914400" rtl="0" eaLnBrk="1" latinLnBrk="0" hangingPunct="1">
-      <a:defRPr sz="1200" kern="1200">
-        <a:solidFill>
-          <a:schemeClr val="tx1"/>
-        </a:solidFill>
-        <a:latin typeface="+mn-lt"/>
-        <a:ea typeface="+mn-ea"/>
-        <a:cs typeface="+mn-cs"/>
-      </a:defRPr>
-    </a:lvl5pPr>
-    <a:lvl6pPr marL="2286000" algn="l" defTabSz="914400" rtl="0" eaLnBrk="1" latinLnBrk="0" hangingPunct="1">
-      <a:defRPr sz="1200" kern="1200">
-        <a:solidFill>
-          <a:schemeClr val="tx1"/>
-        </a:solidFill>
-        <a:latin typeface="+mn-lt"/>
-        <a:ea typeface="+mn-ea"/>
-        <a:cs typeface="+mn-cs"/>
-      </a:defRPr>
-    </a:lvl6pPr>
-    <a:lvl7pPr marL="2743200" algn="l" defTabSz="914400" rtl="0" eaLnBrk="1" latinLnBrk="0" hangingPunct="1">
-      <a:defRPr sz="1200" kern="1200">
-        <a:solidFill>
-          <a:schemeClr val="tx1"/>
-        </a:solidFill>
-        <a:latin typeface="+mn-lt"/>
-        <a:ea typeface="+mn-ea"/>
-        <a:cs typeface="+mn-cs"/>
-      </a:defRPr>
-    </a:lvl7pPr>
-    <a:lvl8pPr marL="3200400" algn="l" defTabSz="914400" rtl="0" eaLnBrk="1" latinLnBrk="0" hangingPunct="1">
-      <a:defRPr sz="1200" kern="1200">
-        <a:solidFill>
-          <a:schemeClr val="tx1"/>
-        </a:solidFill>
-        <a:latin typeface="+mn-lt"/>
-        <a:ea typeface="+mn-ea"/>
-        <a:cs typeface="+mn-cs"/>
-      </a:defRPr>
-    </a:lvl8pPr>
-    <a:lvl9pPr marL="3657600" algn="l" defTabSz="914400" rtl="0" eaLnBrk="1" latinLnBrk="0" hangingPunct="1">
-      <a:defRPr sz="1200" kern="1200">
-        <a:solidFill>
-          <a:schemeClr val="tx1"/>
-        </a:solidFill>
-        <a:latin typeface="+mn-lt"/>
-        <a:ea typeface="+mn-ea"/>
-        <a:cs typeface="+mn-cs"/>
-      </a:defRPr>
-    </a:lvl9pPr>
-  </p:notesStyle>
-</p:notesMaster>
 </file>
 
 <file path=ppt/slideLayouts/slideLayout1.xml><?xml version="1.0" encoding="utf-8"?>
@@ -499,6 +152,11 @@
 <file path=ppt/slideMasters/slideMaster1.xml><?xml version="1.0" encoding="utf-8"?>
 <p:sldMaster xmlns:a="http://schemas.openxmlformats.org/drawingml/2006/main" xmlns:r="http://schemas.openxmlformats.org/officeDocument/2006/relationships" xmlns:p="http://schemas.openxmlformats.org/presentationml/2006/main">
   <p:cSld>
+    <p:bg>
+      <p:bgRef idx="1001">
+        <a:schemeClr val="bg1"/>
+      </p:bgRef>
+    </p:bg>
     <p:spTree>
       <p:nvGrpSpPr>
         <p:cNvPr id="1" name=""/>
@@ -781,6 +439,7 @@
         <a:solidFill>
           <a:srgbClr val="F0EEE6"/>
         </a:solidFill>
+        <a:effectLst/>
       </p:bgPr>
     </p:bg>
     <p:spTree>
@@ -816,6 +475,13 @@
           </a:solidFill>
           <a:ln/>
         </p:spPr>
+        <p:txBody>
+          <a:bodyPr/>
+          <a:lstStyle/>
+          <a:p>
+            <a:endParaRPr lang="en-US"/>
+          </a:p>
+        </p:txBody>
       </p:sp>
       <p:sp>
         <p:nvSpPr>
@@ -836,17 +502,24 @@
           </a:solidFill>
           <a:ln/>
         </p:spPr>
+        <p:txBody>
+          <a:bodyPr/>
+          <a:lstStyle/>
+          <a:p>
+            <a:endParaRPr lang="en-US"/>
+          </a:p>
+        </p:txBody>
       </p:sp>
       <p:pic>
         <p:nvPicPr>
-          <p:cNvPr id="4" name="Image 0" descr="preencoded.png">    </p:cNvPr>
+          <p:cNvPr id="4" name="Image 0" descr="preencoded.png"/>
           <p:cNvPicPr>
             <a:picLocks noChangeAspect="1"/>
           </p:cNvPicPr>
           <p:nvPr/>
         </p:nvPicPr>
         <p:blipFill>
-          <a:blip r:embed="rId1"/>
+          <a:blip r:embed="rId2"/>
           <a:stretch>
             <a:fillRect/>
           </a:stretch>
@@ -882,11 +555,11 @@
           <a:bodyPr wrap="square" lIns="0" tIns="0" rIns="0" bIns="0" rtlCol="0" anchor="ctr"/>
           <a:lstStyle/>
           <a:p>
-            <a:pPr indent="0" marL="0">
-              <a:buNone/>
-            </a:pPr>
-            <a:r>
-              <a:rPr lang="en-US" sz="1400" b="1" spc="300" kern="0" dirty="0">
+            <a:pPr marL="0" indent="0">
+              <a:buNone/>
+            </a:pPr>
+            <a:r>
+              <a:rPr lang="en-US" sz="1400" b="1" kern="0" spc="300" dirty="0">
                 <a:solidFill>
                   <a:srgbClr val="C25E40"/>
                 </a:solidFill>
@@ -921,7 +594,7 @@
           <a:bodyPr wrap="square" lIns="0" tIns="0" rIns="0" bIns="0" rtlCol="0" anchor="ctr"/>
           <a:lstStyle/>
           <a:p>
-            <a:pPr indent="0" marL="0">
+            <a:pPr marL="0" indent="0">
               <a:lnSpc>
                 <a:spcPct val="100000"/>
               </a:lnSpc>
@@ -941,7 +614,7 @@
             <a:endParaRPr lang="en-US" sz="5000" dirty="0"/>
           </a:p>
           <a:p>
-            <a:pPr indent="0" marL="0">
+            <a:pPr marL="0" indent="0">
               <a:lnSpc>
                 <a:spcPct val="100000"/>
               </a:lnSpc>
@@ -984,6 +657,13 @@
             <a:prstDash val="solid"/>
           </a:ln>
         </p:spPr>
+        <p:txBody>
+          <a:bodyPr/>
+          <a:lstStyle/>
+          <a:p>
+            <a:endParaRPr lang="en-US"/>
+          </a:p>
+        </p:txBody>
       </p:sp>
       <p:sp>
         <p:nvSpPr>
@@ -1006,7 +686,7 @@
           <a:bodyPr wrap="square" lIns="0" tIns="0" rIns="0" bIns="0" rtlCol="0" anchor="ctr"/>
           <a:lstStyle/>
           <a:p>
-            <a:pPr indent="0" marL="0">
+            <a:pPr marL="0" indent="0">
               <a:buNone/>
             </a:pPr>
             <a:r>
@@ -1021,45 +701,6 @@
               <a:t>60 min  ·  30 lecture / demo  +  30 lab</a:t>
             </a:r>
             <a:endParaRPr lang="en-US" sz="1600" dirty="0"/>
-          </a:p>
-        </p:txBody>
-      </p:sp>
-      <p:sp>
-        <p:nvSpPr>
-          <p:cNvPr id="9" name="Text 6"/>
-          <p:cNvSpPr/>
-          <p:nvPr/>
-        </p:nvSpPr>
-        <p:spPr>
-          <a:xfrm>
-            <a:off x="640080" y="4462272"/>
-            <a:ext cx="8046720" cy="292608"/>
-          </a:xfrm>
-          <a:prstGeom prst="rect">
-            <a:avLst/>
-          </a:prstGeom>
-          <a:noFill/>
-          <a:ln/>
-        </p:spPr>
-        <p:txBody>
-          <a:bodyPr wrap="square" lIns="0" tIns="0" rIns="0" bIns="0" rtlCol="0" anchor="ctr"/>
-          <a:lstStyle/>
-          <a:p>
-            <a:pPr indent="0" marL="0">
-              <a:buNone/>
-            </a:pPr>
-            <a:r>
-              <a:rPr lang="en-US" sz="1000" i="1" dirty="0">
-                <a:solidFill>
-                  <a:srgbClr val="615C52"/>
-                </a:solidFill>
-                <a:latin typeface="Inter" pitchFamily="34" charset="0"/>
-                <a:ea typeface="Inter" pitchFamily="34" charset="-122"/>
-                <a:cs typeface="Inter" pitchFamily="34" charset="-120"/>
-              </a:rPr>
-              <a:t>dotnetclaude.com  ·  .NET AI with Claude Workshop</a:t>
-            </a:r>
-            <a:endParaRPr lang="en-US" sz="1000" dirty="0"/>
           </a:p>
         </p:txBody>
       </p:sp>
@@ -1079,6 +720,7 @@
         <a:solidFill>
           <a:srgbClr val="F0EEE6"/>
         </a:solidFill>
+        <a:effectLst/>
       </p:bgPr>
     </p:bg>
     <p:spTree>
@@ -1116,11 +758,11 @@
           <a:bodyPr wrap="square" lIns="0" tIns="0" rIns="0" bIns="0" rtlCol="0" anchor="ctr"/>
           <a:lstStyle/>
           <a:p>
-            <a:pPr indent="0" marL="0">
-              <a:buNone/>
-            </a:pPr>
-            <a:r>
-              <a:rPr lang="en-US" sz="1100" b="1" spc="200" kern="0" dirty="0">
+            <a:pPr marL="0" indent="0">
+              <a:buNone/>
+            </a:pPr>
+            <a:r>
+              <a:rPr lang="en-US" sz="1100" b="1" kern="0" spc="200" dirty="0">
                 <a:solidFill>
                   <a:srgbClr val="C25E40"/>
                 </a:solidFill>
@@ -1155,7 +797,7 @@
           <a:bodyPr wrap="square" lIns="0" tIns="0" rIns="0" bIns="0" rtlCol="0" anchor="ctr"/>
           <a:lstStyle/>
           <a:p>
-            <a:pPr indent="0" marL="0">
+            <a:pPr marL="0" indent="0">
               <a:buNone/>
             </a:pPr>
             <a:r>
@@ -1175,14 +817,14 @@
       </p:sp>
       <p:pic>
         <p:nvPicPr>
-          <p:cNvPr id="4" name="Image 0" descr="preencoded.png">    </p:cNvPr>
+          <p:cNvPr id="4" name="Image 0" descr="preencoded.png"/>
           <p:cNvPicPr>
             <a:picLocks noChangeAspect="1"/>
           </p:cNvPicPr>
           <p:nvPr/>
         </p:nvPicPr>
         <p:blipFill>
-          <a:blip r:embed="rId1"/>
+          <a:blip r:embed="rId2"/>
           <a:stretch>
             <a:fillRect/>
           </a:stretch>
@@ -1223,13 +865,20 @@
             <a:prstDash val="solid"/>
           </a:ln>
           <a:effectLst>
-            <a:outerShdw sx="100000" sy="100000" kx="0" ky="0" algn="bl" rotWithShape="0" blurRad="88900" dist="38100" dir="5400000">
+            <a:outerShdw blurRad="88900" dist="38100" dir="5400000" algn="bl" rotWithShape="0">
               <a:srgbClr val="000000">
                 <a:alpha val="10000"/>
               </a:srgbClr>
             </a:outerShdw>
           </a:effectLst>
         </p:spPr>
+        <p:txBody>
+          <a:bodyPr/>
+          <a:lstStyle/>
+          <a:p>
+            <a:endParaRPr lang="en-US"/>
+          </a:p>
+        </p:txBody>
       </p:sp>
       <p:sp>
         <p:nvSpPr>
@@ -1250,17 +899,24 @@
           </a:solidFill>
           <a:ln/>
         </p:spPr>
+        <p:txBody>
+          <a:bodyPr/>
+          <a:lstStyle/>
+          <a:p>
+            <a:endParaRPr lang="en-US"/>
+          </a:p>
+        </p:txBody>
       </p:sp>
       <p:pic>
         <p:nvPicPr>
-          <p:cNvPr id="7" name="Image 1" descr="preencoded.png">    </p:cNvPr>
+          <p:cNvPr id="7" name="Image 1" descr="preencoded.png"/>
           <p:cNvPicPr>
             <a:picLocks noChangeAspect="1"/>
           </p:cNvPicPr>
           <p:nvPr/>
         </p:nvPicPr>
         <p:blipFill>
-          <a:blip r:embed="rId2"/>
+          <a:blip r:embed="rId3"/>
           <a:stretch>
             <a:fillRect/>
           </a:stretch>
@@ -1296,7 +952,7 @@
           <a:bodyPr wrap="square" lIns="0" tIns="0" rIns="0" bIns="0" rtlCol="0" anchor="ctr"/>
           <a:lstStyle/>
           <a:p>
-            <a:pPr algn="ctr" indent="0" marL="0">
+            <a:pPr marL="0" indent="0" algn="ctr">
               <a:buNone/>
             </a:pPr>
             <a:r>
@@ -1335,7 +991,7 @@
           <a:bodyPr wrap="square" lIns="0" tIns="0" rIns="0" bIns="0" rtlCol="0" anchor="ctr"/>
           <a:lstStyle/>
           <a:p>
-            <a:pPr algn="ctr" indent="0" marL="0">
+            <a:pPr marL="0" indent="0" algn="ctr">
               <a:buNone/>
             </a:pPr>
             <a:r>
@@ -1379,13 +1035,20 @@
             <a:prstDash val="solid"/>
           </a:ln>
           <a:effectLst>
-            <a:outerShdw sx="100000" sy="100000" kx="0" ky="0" algn="bl" rotWithShape="0" blurRad="88900" dist="38100" dir="5400000">
+            <a:outerShdw blurRad="88900" dist="38100" dir="5400000" algn="bl" rotWithShape="0">
               <a:srgbClr val="000000">
                 <a:alpha val="10000"/>
               </a:srgbClr>
             </a:outerShdw>
           </a:effectLst>
         </p:spPr>
+        <p:txBody>
+          <a:bodyPr/>
+          <a:lstStyle/>
+          <a:p>
+            <a:endParaRPr lang="en-US"/>
+          </a:p>
+        </p:txBody>
       </p:sp>
       <p:sp>
         <p:nvSpPr>
@@ -1406,17 +1069,24 @@
           </a:solidFill>
           <a:ln/>
         </p:spPr>
+        <p:txBody>
+          <a:bodyPr/>
+          <a:lstStyle/>
+          <a:p>
+            <a:endParaRPr lang="en-US"/>
+          </a:p>
+        </p:txBody>
       </p:sp>
       <p:pic>
         <p:nvPicPr>
-          <p:cNvPr id="12" name="Image 2" descr="preencoded.png">    </p:cNvPr>
+          <p:cNvPr id="12" name="Image 2" descr="preencoded.png"/>
           <p:cNvPicPr>
             <a:picLocks noChangeAspect="1"/>
           </p:cNvPicPr>
           <p:nvPr/>
         </p:nvPicPr>
         <p:blipFill>
-          <a:blip r:embed="rId3"/>
+          <a:blip r:embed="rId4"/>
           <a:stretch>
             <a:fillRect/>
           </a:stretch>
@@ -1452,7 +1122,7 @@
           <a:bodyPr wrap="square" lIns="0" tIns="0" rIns="0" bIns="0" rtlCol="0" anchor="ctr"/>
           <a:lstStyle/>
           <a:p>
-            <a:pPr algn="ctr" indent="0" marL="0">
+            <a:pPr marL="0" indent="0" algn="ctr">
               <a:buNone/>
             </a:pPr>
             <a:r>
@@ -1491,7 +1161,7 @@
           <a:bodyPr wrap="square" lIns="0" tIns="0" rIns="0" bIns="0" rtlCol="0" anchor="ctr"/>
           <a:lstStyle/>
           <a:p>
-            <a:pPr algn="ctr" indent="0" marL="0">
+            <a:pPr marL="0" indent="0" algn="ctr">
               <a:buNone/>
             </a:pPr>
             <a:r>
@@ -1535,13 +1205,20 @@
             <a:prstDash val="solid"/>
           </a:ln>
           <a:effectLst>
-            <a:outerShdw sx="100000" sy="100000" kx="0" ky="0" algn="bl" rotWithShape="0" blurRad="88900" dist="38100" dir="5400000">
+            <a:outerShdw blurRad="88900" dist="38100" dir="5400000" algn="bl" rotWithShape="0">
               <a:srgbClr val="000000">
                 <a:alpha val="10000"/>
               </a:srgbClr>
             </a:outerShdw>
           </a:effectLst>
         </p:spPr>
+        <p:txBody>
+          <a:bodyPr/>
+          <a:lstStyle/>
+          <a:p>
+            <a:endParaRPr lang="en-US"/>
+          </a:p>
+        </p:txBody>
       </p:sp>
       <p:sp>
         <p:nvSpPr>
@@ -1562,17 +1239,24 @@
           </a:solidFill>
           <a:ln/>
         </p:spPr>
+        <p:txBody>
+          <a:bodyPr/>
+          <a:lstStyle/>
+          <a:p>
+            <a:endParaRPr lang="en-US"/>
+          </a:p>
+        </p:txBody>
       </p:sp>
       <p:pic>
         <p:nvPicPr>
-          <p:cNvPr id="17" name="Image 3" descr="preencoded.png">    </p:cNvPr>
+          <p:cNvPr id="17" name="Image 3" descr="preencoded.png"/>
           <p:cNvPicPr>
             <a:picLocks noChangeAspect="1"/>
           </p:cNvPicPr>
           <p:nvPr/>
         </p:nvPicPr>
         <p:blipFill>
-          <a:blip r:embed="rId4"/>
+          <a:blip r:embed="rId5"/>
           <a:stretch>
             <a:fillRect/>
           </a:stretch>
@@ -1608,7 +1292,7 @@
           <a:bodyPr wrap="square" lIns="0" tIns="0" rIns="0" bIns="0" rtlCol="0" anchor="ctr"/>
           <a:lstStyle/>
           <a:p>
-            <a:pPr algn="ctr" indent="0" marL="0">
+            <a:pPr marL="0" indent="0" algn="ctr">
               <a:buNone/>
             </a:pPr>
             <a:r>
@@ -1647,7 +1331,7 @@
           <a:bodyPr wrap="square" lIns="0" tIns="0" rIns="0" bIns="0" rtlCol="0" anchor="ctr"/>
           <a:lstStyle/>
           <a:p>
-            <a:pPr algn="ctr" indent="0" marL="0">
+            <a:pPr marL="0" indent="0" algn="ctr">
               <a:buNone/>
             </a:pPr>
             <a:r>
@@ -1686,7 +1370,7 @@
           <a:bodyPr wrap="square" rtlCol="0" anchor="ctr"/>
           <a:lstStyle/>
           <a:p>
-            <a:pPr indent="0" marL="0">
+            <a:pPr marL="0" indent="0">
               <a:buNone/>
             </a:pPr>
             <a:r>
@@ -1725,7 +1409,7 @@
           <a:bodyPr wrap="square" rtlCol="0" anchor="ctr"/>
           <a:lstStyle/>
           <a:p>
-            <a:pPr algn="r" indent="0" marL="0">
+            <a:pPr marL="0" indent="0" algn="r">
               <a:buNone/>
             </a:pPr>
             <a:r>
@@ -1740,45 +1424,6 @@
               <a:t>Day 2 · Section 4  ·  10/11</a:t>
             </a:r>
             <a:endParaRPr lang="en-US" sz="900" dirty="0"/>
-          </a:p>
-        </p:txBody>
-      </p:sp>
-      <p:sp>
-        <p:nvSpPr>
-          <p:cNvPr id="22" name="Text 16"/>
-          <p:cNvSpPr/>
-          <p:nvPr/>
-        </p:nvSpPr>
-        <p:spPr>
-          <a:xfrm>
-            <a:off x="548640" y="4462272"/>
-            <a:ext cx="8046720" cy="274320"/>
-          </a:xfrm>
-          <a:prstGeom prst="rect">
-            <a:avLst/>
-          </a:prstGeom>
-          <a:noFill/>
-          <a:ln/>
-        </p:spPr>
-        <p:txBody>
-          <a:bodyPr wrap="square" lIns="0" tIns="0" rIns="0" bIns="0" rtlCol="0" anchor="ctr"/>
-          <a:lstStyle/>
-          <a:p>
-            <a:pPr indent="0" marL="0">
-              <a:buNone/>
-            </a:pPr>
-            <a:r>
-              <a:rPr lang="en-US" sz="1000" i="1" dirty="0">
-                <a:solidFill>
-                  <a:srgbClr val="615C52"/>
-                </a:solidFill>
-                <a:latin typeface="Inter" pitchFamily="34" charset="0"/>
-                <a:ea typeface="Inter" pitchFamily="34" charset="-122"/>
-                <a:cs typeface="Inter" pitchFamily="34" charset="-120"/>
-              </a:rPr>
-              <a:t>▸ A tool is a new entry point — authenticate, validate, and log every call.</a:t>
-            </a:r>
-            <a:endParaRPr lang="en-US" sz="1000" dirty="0"/>
           </a:p>
         </p:txBody>
       </p:sp>
@@ -1798,6 +1443,7 @@
         <a:solidFill>
           <a:srgbClr val="F0EEE6"/>
         </a:solidFill>
+        <a:effectLst/>
       </p:bgPr>
     </p:bg>
     <p:spTree>
@@ -1816,60 +1462,7 @@
       </p:grpSpPr>
       <p:pic>
         <p:nvPicPr>
-          <p:cNvPr id="2" name="Image 0" descr="preencoded.png">    </p:cNvPr>
-          <p:cNvPicPr>
-            <a:picLocks noChangeAspect="1"/>
-          </p:cNvPicPr>
-          <p:nvPr/>
-        </p:nvPicPr>
-        <p:blipFill>
-          <a:blip r:embed="rId1"/>
-          <a:stretch>
-            <a:fillRect/>
-          </a:stretch>
-        </p:blipFill>
-        <p:spPr>
-          <a:xfrm>
-            <a:off x="8321040" y="402336"/>
-            <a:ext cx="329184" cy="329184"/>
-          </a:xfrm>
-          <a:prstGeom prst="rect">
-            <a:avLst/>
-          </a:prstGeom>
-        </p:spPr>
-      </p:pic>
-      <p:sp>
-        <p:nvSpPr>
-          <p:cNvPr id="3" name="Shape 0"/>
-          <p:cNvSpPr/>
-          <p:nvPr/>
-        </p:nvSpPr>
-        <p:spPr>
-          <a:xfrm>
-            <a:off x="548640" y="822960"/>
-            <a:ext cx="3154680" cy="3429000"/>
-          </a:xfrm>
-          <a:prstGeom prst="roundRect">
-            <a:avLst>
-              <a:gd name="adj" fmla="val 3478"/>
-            </a:avLst>
-          </a:prstGeom>
-          <a:solidFill>
-            <a:srgbClr val="D97757"/>
-          </a:solidFill>
-          <a:ln/>
-          <a:effectLst>
-            <a:outerShdw sx="100000" sy="100000" kx="0" ky="0" algn="bl" rotWithShape="0" blurRad="88900" dist="38100" dir="5400000">
-              <a:srgbClr val="000000">
-                <a:alpha val="10000"/>
-              </a:srgbClr>
-            </a:outerShdw>
-          </a:effectLst>
-        </p:spPr>
-      </p:sp>
-      <p:pic>
-        <p:nvPicPr>
-          <p:cNvPr id="4" name="Image 1" descr="preencoded.png">    </p:cNvPr>
+          <p:cNvPr id="2" name="Image 0" descr="preencoded.png"/>
           <p:cNvPicPr>
             <a:picLocks noChangeAspect="1"/>
           </p:cNvPicPr>
@@ -1883,6 +1476,66 @@
         </p:blipFill>
         <p:spPr>
           <a:xfrm>
+            <a:off x="8321040" y="402336"/>
+            <a:ext cx="329184" cy="329184"/>
+          </a:xfrm>
+          <a:prstGeom prst="rect">
+            <a:avLst/>
+          </a:prstGeom>
+        </p:spPr>
+      </p:pic>
+      <p:sp>
+        <p:nvSpPr>
+          <p:cNvPr id="3" name="Shape 0"/>
+          <p:cNvSpPr/>
+          <p:nvPr/>
+        </p:nvSpPr>
+        <p:spPr>
+          <a:xfrm>
+            <a:off x="548640" y="822960"/>
+            <a:ext cx="3154680" cy="3429000"/>
+          </a:xfrm>
+          <a:prstGeom prst="roundRect">
+            <a:avLst>
+              <a:gd name="adj" fmla="val 3478"/>
+            </a:avLst>
+          </a:prstGeom>
+          <a:solidFill>
+            <a:srgbClr val="D97757"/>
+          </a:solidFill>
+          <a:ln/>
+          <a:effectLst>
+            <a:outerShdw blurRad="88900" dist="38100" dir="5400000" algn="bl" rotWithShape="0">
+              <a:srgbClr val="000000">
+                <a:alpha val="10000"/>
+              </a:srgbClr>
+            </a:outerShdw>
+          </a:effectLst>
+        </p:spPr>
+        <p:txBody>
+          <a:bodyPr/>
+          <a:lstStyle/>
+          <a:p>
+            <a:endParaRPr lang="en-US"/>
+          </a:p>
+        </p:txBody>
+      </p:sp>
+      <p:pic>
+        <p:nvPicPr>
+          <p:cNvPr id="4" name="Image 1" descr="preencoded.png"/>
+          <p:cNvPicPr>
+            <a:picLocks noChangeAspect="1"/>
+          </p:cNvPicPr>
+          <p:nvPr/>
+        </p:nvPicPr>
+        <p:blipFill>
+          <a:blip r:embed="rId3"/>
+          <a:stretch>
+            <a:fillRect/>
+          </a:stretch>
+        </p:blipFill>
+        <p:spPr>
+          <a:xfrm>
             <a:off x="868680" y="1133856"/>
             <a:ext cx="548640" cy="548640"/>
           </a:xfrm>
@@ -1912,7 +1565,7 @@
           <a:bodyPr wrap="square" lIns="0" tIns="0" rIns="0" bIns="0" rtlCol="0" anchor="ctr"/>
           <a:lstStyle/>
           <a:p>
-            <a:pPr indent="0" marL="0">
+            <a:pPr marL="0" indent="0">
               <a:buNone/>
             </a:pPr>
             <a:r>
@@ -1951,7 +1604,7 @@
           <a:bodyPr wrap="square" lIns="0" tIns="0" rIns="0" bIns="0" rtlCol="0" anchor="ctr"/>
           <a:lstStyle/>
           <a:p>
-            <a:pPr indent="0" marL="0">
+            <a:pPr marL="0" indent="0">
               <a:buNone/>
             </a:pPr>
             <a:r>
@@ -1991,6 +1644,13 @@
             <a:prstDash val="solid"/>
           </a:ln>
         </p:spPr>
+        <p:txBody>
+          <a:bodyPr/>
+          <a:lstStyle/>
+          <a:p>
+            <a:endParaRPr lang="en-US"/>
+          </a:p>
+        </p:txBody>
       </p:sp>
       <p:sp>
         <p:nvSpPr>
@@ -2013,11 +1673,11 @@
           <a:bodyPr wrap="square" lIns="0" tIns="0" rIns="0" bIns="0" rtlCol="0" anchor="ctr"/>
           <a:lstStyle/>
           <a:p>
-            <a:pPr indent="0" marL="0">
-              <a:buNone/>
-            </a:pPr>
-            <a:r>
-              <a:rPr lang="en-US" sz="1100" b="1" spc="100" kern="0" dirty="0">
+            <a:pPr marL="0" indent="0">
+              <a:buNone/>
+            </a:pPr>
+            <a:r>
+              <a:rPr lang="en-US" sz="1100" b="1" kern="0" spc="100" dirty="0">
                 <a:solidFill>
                   <a:srgbClr val="FBE9E2"/>
                 </a:solidFill>
@@ -2052,7 +1712,7 @@
           <a:bodyPr wrap="square" lIns="0" tIns="0" rIns="0" bIns="0" rtlCol="0" anchor="ctr"/>
           <a:lstStyle/>
           <a:p>
-            <a:pPr indent="0" marL="0">
+            <a:pPr marL="0" indent="0">
               <a:buNone/>
             </a:pPr>
             <a:r>
@@ -2091,11 +1751,11 @@
           <a:bodyPr wrap="square" lIns="0" tIns="0" rIns="0" bIns="0" rtlCol="0" anchor="ctr"/>
           <a:lstStyle/>
           <a:p>
-            <a:pPr indent="0" marL="0">
-              <a:buNone/>
-            </a:pPr>
-            <a:r>
-              <a:rPr lang="en-US" sz="1100" b="1" spc="200" kern="0" dirty="0">
+            <a:pPr marL="0" indent="0">
+              <a:buNone/>
+            </a:pPr>
+            <a:r>
+              <a:rPr lang="en-US" sz="1100" b="1" kern="0" spc="200" dirty="0">
                 <a:solidFill>
                   <a:srgbClr val="C25E40"/>
                 </a:solidFill>
@@ -2128,6 +1788,13 @@
           </a:solidFill>
           <a:ln/>
         </p:spPr>
+        <p:txBody>
+          <a:bodyPr/>
+          <a:lstStyle/>
+          <a:p>
+            <a:endParaRPr lang="en-US"/>
+          </a:p>
+        </p:txBody>
       </p:sp>
       <p:sp>
         <p:nvSpPr>
@@ -2150,7 +1817,7 @@
           <a:bodyPr wrap="square" lIns="0" tIns="0" rIns="0" bIns="0" rtlCol="0" anchor="ctr"/>
           <a:lstStyle/>
           <a:p>
-            <a:pPr algn="ctr" indent="0" marL="0">
+            <a:pPr marL="0" indent="0" algn="ctr">
               <a:buNone/>
             </a:pPr>
             <a:r>
@@ -2189,7 +1856,7 @@
           <a:bodyPr wrap="square" lIns="0" tIns="0" rIns="0" bIns="0" rtlCol="0" anchor="ctr"/>
           <a:lstStyle/>
           <a:p>
-            <a:pPr indent="0" marL="0">
+            <a:pPr marL="0" indent="0">
               <a:buNone/>
             </a:pPr>
             <a:r>
@@ -2226,6 +1893,13 @@
           </a:solidFill>
           <a:ln/>
         </p:spPr>
+        <p:txBody>
+          <a:bodyPr/>
+          <a:lstStyle/>
+          <a:p>
+            <a:endParaRPr lang="en-US"/>
+          </a:p>
+        </p:txBody>
       </p:sp>
       <p:sp>
         <p:nvSpPr>
@@ -2248,7 +1922,7 @@
           <a:bodyPr wrap="square" lIns="0" tIns="0" rIns="0" bIns="0" rtlCol="0" anchor="ctr"/>
           <a:lstStyle/>
           <a:p>
-            <a:pPr algn="ctr" indent="0" marL="0">
+            <a:pPr marL="0" indent="0" algn="ctr">
               <a:buNone/>
             </a:pPr>
             <a:r>
@@ -2287,7 +1961,7 @@
           <a:bodyPr wrap="square" lIns="0" tIns="0" rIns="0" bIns="0" rtlCol="0" anchor="ctr"/>
           <a:lstStyle/>
           <a:p>
-            <a:pPr indent="0" marL="0">
+            <a:pPr marL="0" indent="0">
               <a:buNone/>
             </a:pPr>
             <a:r>
@@ -2324,6 +1998,13 @@
           </a:solidFill>
           <a:ln/>
         </p:spPr>
+        <p:txBody>
+          <a:bodyPr/>
+          <a:lstStyle/>
+          <a:p>
+            <a:endParaRPr lang="en-US"/>
+          </a:p>
+        </p:txBody>
       </p:sp>
       <p:sp>
         <p:nvSpPr>
@@ -2346,7 +2027,7 @@
           <a:bodyPr wrap="square" lIns="0" tIns="0" rIns="0" bIns="0" rtlCol="0" anchor="ctr"/>
           <a:lstStyle/>
           <a:p>
-            <a:pPr algn="ctr" indent="0" marL="0">
+            <a:pPr marL="0" indent="0" algn="ctr">
               <a:buNone/>
             </a:pPr>
             <a:r>
@@ -2385,7 +2066,7 @@
           <a:bodyPr wrap="square" lIns="0" tIns="0" rIns="0" bIns="0" rtlCol="0" anchor="ctr"/>
           <a:lstStyle/>
           <a:p>
-            <a:pPr indent="0" marL="0">
+            <a:pPr marL="0" indent="0">
               <a:buNone/>
             </a:pPr>
             <a:r>
@@ -2429,6 +2110,13 @@
             <a:prstDash val="solid"/>
           </a:ln>
         </p:spPr>
+        <p:txBody>
+          <a:bodyPr/>
+          <a:lstStyle/>
+          <a:p>
+            <a:endParaRPr lang="en-US"/>
+          </a:p>
+        </p:txBody>
       </p:sp>
       <p:sp>
         <p:nvSpPr>
@@ -2451,11 +2139,11 @@
           <a:bodyPr wrap="square" lIns="0" tIns="0" rIns="0" bIns="0" rtlCol="0" anchor="ctr"/>
           <a:lstStyle/>
           <a:p>
-            <a:pPr indent="0" marL="0">
-              <a:buNone/>
-            </a:pPr>
-            <a:r>
-              <a:rPr lang="en-US" sz="1050" b="1" spc="100" kern="0" dirty="0">
+            <a:pPr marL="0" indent="0">
+              <a:buNone/>
+            </a:pPr>
+            <a:r>
+              <a:rPr lang="en-US" sz="1050" b="1" kern="0" spc="100" dirty="0">
                 <a:solidFill>
                   <a:srgbClr val="615C52"/>
                 </a:solidFill>
@@ -2471,70 +2159,7 @@
       </p:sp>
       <p:pic>
         <p:nvPicPr>
-          <p:cNvPr id="22" name="Image 2" descr="preencoded.png">    </p:cNvPr>
-          <p:cNvPicPr>
-            <a:picLocks noChangeAspect="1"/>
-          </p:cNvPicPr>
-          <p:nvPr/>
-        </p:nvPicPr>
-        <p:blipFill>
-          <a:blip r:embed="rId3"/>
-          <a:stretch>
-            <a:fillRect/>
-          </a:stretch>
-        </p:blipFill>
-        <p:spPr>
-          <a:xfrm>
-            <a:off x="4297680" y="2898648"/>
-            <a:ext cx="182880" cy="182880"/>
-          </a:xfrm>
-          <a:prstGeom prst="rect">
-            <a:avLst/>
-          </a:prstGeom>
-        </p:spPr>
-      </p:pic>
-      <p:sp>
-        <p:nvSpPr>
-          <p:cNvPr id="23" name="Text 18"/>
-          <p:cNvSpPr/>
-          <p:nvPr/>
-        </p:nvSpPr>
-        <p:spPr>
-          <a:xfrm>
-            <a:off x="4572000" y="2852928"/>
-            <a:ext cx="3931920" cy="256032"/>
-          </a:xfrm>
-          <a:prstGeom prst="rect">
-            <a:avLst/>
-          </a:prstGeom>
-          <a:noFill/>
-          <a:ln/>
-        </p:spPr>
-        <p:txBody>
-          <a:bodyPr wrap="square" lIns="0" tIns="0" rIns="0" bIns="0" rtlCol="0" anchor="ctr"/>
-          <a:lstStyle/>
-          <a:p>
-            <a:pPr indent="0" marL="0">
-              <a:buNone/>
-            </a:pPr>
-            <a:r>
-              <a:rPr lang="en-US" sz="1250" dirty="0">
-                <a:solidFill>
-                  <a:srgbClr val="141413"/>
-                </a:solidFill>
-                <a:latin typeface="Inter" pitchFamily="34" charset="0"/>
-                <a:ea typeface="Inter" pitchFamily="34" charset="-122"/>
-                <a:cs typeface="Inter" pitchFamily="34" charset="-120"/>
-              </a:rPr>
-              <a:t>Server builds and runs</a:t>
-            </a:r>
-            <a:endParaRPr lang="en-US" sz="1250" dirty="0"/>
-          </a:p>
-        </p:txBody>
-      </p:sp>
-      <p:pic>
-        <p:nvPicPr>
-          <p:cNvPr id="24" name="Image 3" descr="preencoded.png">    </p:cNvPr>
+          <p:cNvPr id="22" name="Image 2" descr="preencoded.png"/>
           <p:cNvPicPr>
             <a:picLocks noChangeAspect="1"/>
           </p:cNvPicPr>
@@ -2548,7 +2173,7 @@
         </p:blipFill>
         <p:spPr>
           <a:xfrm>
-            <a:off x="4297680" y="3182112"/>
+            <a:off x="4297680" y="2898648"/>
             <a:ext cx="182880" cy="182880"/>
           </a:xfrm>
           <a:prstGeom prst="rect">
@@ -2558,13 +2183,13 @@
       </p:pic>
       <p:sp>
         <p:nvSpPr>
-          <p:cNvPr id="25" name="Text 19"/>
-          <p:cNvSpPr/>
-          <p:nvPr/>
-        </p:nvSpPr>
-        <p:spPr>
-          <a:xfrm>
-            <a:off x="4572000" y="3136392"/>
+          <p:cNvPr id="23" name="Text 18"/>
+          <p:cNvSpPr/>
+          <p:nvPr/>
+        </p:nvSpPr>
+        <p:spPr>
+          <a:xfrm>
+            <a:off x="4572000" y="2852928"/>
             <a:ext cx="3931920" cy="256032"/>
           </a:xfrm>
           <a:prstGeom prst="rect">
@@ -2577,7 +2202,7 @@
           <a:bodyPr wrap="square" lIns="0" tIns="0" rIns="0" bIns="0" rtlCol="0" anchor="ctr"/>
           <a:lstStyle/>
           <a:p>
-            <a:pPr indent="0" marL="0">
+            <a:pPr marL="0" indent="0">
               <a:buNone/>
             </a:pPr>
             <a:r>
@@ -2589,7 +2214,7 @@
                 <a:ea typeface="Inter" pitchFamily="34" charset="-122"/>
                 <a:cs typeface="Inter" pitchFamily="34" charset="-120"/>
               </a:rPr>
-              <a:t>3+ typed tools, clear descriptions</a:t>
+              <a:t>Server builds and runs</a:t>
             </a:r>
             <a:endParaRPr lang="en-US" sz="1250" dirty="0"/>
           </a:p>
@@ -2597,21 +2222,21 @@
       </p:sp>
       <p:pic>
         <p:nvPicPr>
-          <p:cNvPr id="26" name="Image 4" descr="preencoded.png">    </p:cNvPr>
+          <p:cNvPr id="24" name="Image 3" descr="preencoded.png"/>
           <p:cNvPicPr>
             <a:picLocks noChangeAspect="1"/>
           </p:cNvPicPr>
           <p:nvPr/>
         </p:nvPicPr>
         <p:blipFill>
-          <a:blip r:embed="rId5"/>
+          <a:blip r:embed="rId4"/>
           <a:stretch>
             <a:fillRect/>
           </a:stretch>
         </p:blipFill>
         <p:spPr>
           <a:xfrm>
-            <a:off x="4297680" y="3465576"/>
+            <a:off x="4297680" y="3182112"/>
             <a:ext cx="182880" cy="182880"/>
           </a:xfrm>
           <a:prstGeom prst="rect">
@@ -2621,13 +2246,13 @@
       </p:pic>
       <p:sp>
         <p:nvSpPr>
-          <p:cNvPr id="27" name="Text 20"/>
-          <p:cNvSpPr/>
-          <p:nvPr/>
-        </p:nvSpPr>
-        <p:spPr>
-          <a:xfrm>
-            <a:off x="4572000" y="3419856"/>
+          <p:cNvPr id="25" name="Text 19"/>
+          <p:cNvSpPr/>
+          <p:nvPr/>
+        </p:nvSpPr>
+        <p:spPr>
+          <a:xfrm>
+            <a:off x="4572000" y="3136392"/>
             <a:ext cx="3931920" cy="256032"/>
           </a:xfrm>
           <a:prstGeom prst="rect">
@@ -2640,7 +2265,7 @@
           <a:bodyPr wrap="square" lIns="0" tIns="0" rIns="0" bIns="0" rtlCol="0" anchor="ctr"/>
           <a:lstStyle/>
           <a:p>
-            <a:pPr indent="0" marL="0">
+            <a:pPr marL="0" indent="0">
               <a:buNone/>
             </a:pPr>
             <a:r>
@@ -2652,7 +2277,7 @@
                 <a:ea typeface="Inter" pitchFamily="34" charset="-122"/>
                 <a:cs typeface="Inter" pitchFamily="34" charset="-120"/>
               </a:rPr>
-              <a:t>Tools call real services</a:t>
+              <a:t>3+ typed tools, clear descriptions</a:t>
             </a:r>
             <a:endParaRPr lang="en-US" sz="1250" dirty="0"/>
           </a:p>
@@ -2660,20 +2285,83 @@
       </p:sp>
       <p:pic>
         <p:nvPicPr>
-          <p:cNvPr id="28" name="Image 5" descr="preencoded.png">    </p:cNvPr>
+          <p:cNvPr id="26" name="Image 4" descr="preencoded.png"/>
           <p:cNvPicPr>
             <a:picLocks noChangeAspect="1"/>
           </p:cNvPicPr>
           <p:nvPr/>
         </p:nvPicPr>
         <p:blipFill>
-          <a:blip r:embed="rId6"/>
+          <a:blip r:embed="rId4"/>
           <a:stretch>
             <a:fillRect/>
           </a:stretch>
         </p:blipFill>
         <p:spPr>
           <a:xfrm>
+            <a:off x="4297680" y="3465576"/>
+            <a:ext cx="182880" cy="182880"/>
+          </a:xfrm>
+          <a:prstGeom prst="rect">
+            <a:avLst/>
+          </a:prstGeom>
+        </p:spPr>
+      </p:pic>
+      <p:sp>
+        <p:nvSpPr>
+          <p:cNvPr id="27" name="Text 20"/>
+          <p:cNvSpPr/>
+          <p:nvPr/>
+        </p:nvSpPr>
+        <p:spPr>
+          <a:xfrm>
+            <a:off x="4572000" y="3419856"/>
+            <a:ext cx="3931920" cy="256032"/>
+          </a:xfrm>
+          <a:prstGeom prst="rect">
+            <a:avLst/>
+          </a:prstGeom>
+          <a:noFill/>
+          <a:ln/>
+        </p:spPr>
+        <p:txBody>
+          <a:bodyPr wrap="square" lIns="0" tIns="0" rIns="0" bIns="0" rtlCol="0" anchor="ctr"/>
+          <a:lstStyle/>
+          <a:p>
+            <a:pPr marL="0" indent="0">
+              <a:buNone/>
+            </a:pPr>
+            <a:r>
+              <a:rPr lang="en-US" sz="1250" dirty="0">
+                <a:solidFill>
+                  <a:srgbClr val="141413"/>
+                </a:solidFill>
+                <a:latin typeface="Inter" pitchFamily="34" charset="0"/>
+                <a:ea typeface="Inter" pitchFamily="34" charset="-122"/>
+                <a:cs typeface="Inter" pitchFamily="34" charset="-120"/>
+              </a:rPr>
+              <a:t>Tools call real services</a:t>
+            </a:r>
+            <a:endParaRPr lang="en-US" sz="1250" dirty="0"/>
+          </a:p>
+        </p:txBody>
+      </p:sp>
+      <p:pic>
+        <p:nvPicPr>
+          <p:cNvPr id="28" name="Image 5" descr="preencoded.png"/>
+          <p:cNvPicPr>
+            <a:picLocks noChangeAspect="1"/>
+          </p:cNvPicPr>
+          <p:nvPr/>
+        </p:nvPicPr>
+        <p:blipFill>
+          <a:blip r:embed="rId4"/>
+          <a:stretch>
+            <a:fillRect/>
+          </a:stretch>
+        </p:blipFill>
+        <p:spPr>
+          <a:xfrm>
             <a:off x="4297680" y="3749040"/>
             <a:ext cx="182880" cy="182880"/>
           </a:xfrm>
@@ -2703,7 +2391,7 @@
           <a:bodyPr wrap="square" lIns="0" tIns="0" rIns="0" bIns="0" rtlCol="0" anchor="ctr"/>
           <a:lstStyle/>
           <a:p>
-            <a:pPr indent="0" marL="0">
+            <a:pPr marL="0" indent="0">
               <a:buNone/>
             </a:pPr>
             <a:r>
@@ -2742,7 +2430,7 @@
           <a:bodyPr wrap="square" rtlCol="0" anchor="ctr"/>
           <a:lstStyle/>
           <a:p>
-            <a:pPr indent="0" marL="0">
+            <a:pPr marL="0" indent="0">
               <a:buNone/>
             </a:pPr>
             <a:r>
@@ -2781,7 +2469,7 @@
           <a:bodyPr wrap="square" rtlCol="0" anchor="ctr"/>
           <a:lstStyle/>
           <a:p>
-            <a:pPr algn="r" indent="0" marL="0">
+            <a:pPr marL="0" indent="0" algn="r">
               <a:buNone/>
             </a:pPr>
             <a:r>
@@ -2796,45 +2484,6 @@
               <a:t>Day 2 · Section 4  ·  11/11</a:t>
             </a:r>
             <a:endParaRPr lang="en-US" sz="900" dirty="0"/>
-          </a:p>
-        </p:txBody>
-      </p:sp>
-      <p:sp>
-        <p:nvSpPr>
-          <p:cNvPr id="32" name="Text 24"/>
-          <p:cNvSpPr/>
-          <p:nvPr/>
-        </p:nvSpPr>
-        <p:spPr>
-          <a:xfrm>
-            <a:off x="548640" y="4462272"/>
-            <a:ext cx="8046720" cy="274320"/>
-          </a:xfrm>
-          <a:prstGeom prst="rect">
-            <a:avLst/>
-          </a:prstGeom>
-          <a:noFill/>
-          <a:ln/>
-        </p:spPr>
-        <p:txBody>
-          <a:bodyPr wrap="square" lIns="0" tIns="0" rIns="0" bIns="0" rtlCol="0" anchor="ctr"/>
-          <a:lstStyle/>
-          <a:p>
-            <a:pPr indent="0" marL="0">
-              <a:buNone/>
-            </a:pPr>
-            <a:r>
-              <a:rPr lang="en-US" sz="1000" i="1" dirty="0">
-                <a:solidFill>
-                  <a:srgbClr val="615C52"/>
-                </a:solidFill>
-                <a:latin typeface="Inter" pitchFamily="34" charset="0"/>
-                <a:ea typeface="Inter" pitchFamily="34" charset="-122"/>
-                <a:cs typeface="Inter" pitchFamily="34" charset="-120"/>
-              </a:rPr>
-              <a:t>▸ Done = 3+ real tools your Claude Code can list and invoke against the DB.</a:t>
-            </a:r>
-            <a:endParaRPr lang="en-US" sz="1000" dirty="0"/>
           </a:p>
         </p:txBody>
       </p:sp>
@@ -2854,6 +2503,7 @@
         <a:solidFill>
           <a:srgbClr val="1F1E1D"/>
         </a:solidFill>
+        <a:effectLst/>
       </p:bgPr>
     </p:bg>
     <p:spTree>
@@ -2872,14 +2522,14 @@
       </p:grpSpPr>
       <p:pic>
         <p:nvPicPr>
-          <p:cNvPr id="2" name="Image 0" descr="preencoded.png">    </p:cNvPr>
+          <p:cNvPr id="2" name="Image 0" descr="preencoded.png"/>
           <p:cNvPicPr>
             <a:picLocks noChangeAspect="1"/>
           </p:cNvPicPr>
           <p:nvPr/>
         </p:nvPicPr>
         <p:blipFill>
-          <a:blip r:embed="rId1"/>
+          <a:blip r:embed="rId2"/>
           <a:stretch>
             <a:fillRect/>
           </a:stretch>
@@ -2915,11 +2565,11 @@
           <a:bodyPr wrap="square" lIns="0" tIns="0" rIns="0" bIns="0" rtlCol="0" anchor="ctr"/>
           <a:lstStyle/>
           <a:p>
-            <a:pPr indent="0" marL="0">
-              <a:buNone/>
-            </a:pPr>
-            <a:r>
-              <a:rPr lang="en-US" sz="1300" b="1" spc="300" kern="0" dirty="0">
+            <a:pPr marL="0" indent="0">
+              <a:buNone/>
+            </a:pPr>
+            <a:r>
+              <a:rPr lang="en-US" sz="1300" b="1" kern="0" spc="300" dirty="0">
                 <a:solidFill>
                   <a:srgbClr val="D97757"/>
                 </a:solidFill>
@@ -2954,7 +2604,7 @@
           <a:bodyPr wrap="square" lIns="0" tIns="0" rIns="0" bIns="0" rtlCol="0" anchor="ctr"/>
           <a:lstStyle/>
           <a:p>
-            <a:pPr indent="0" marL="0">
+            <a:pPr marL="0" indent="0">
               <a:lnSpc>
                 <a:spcPct val="100000"/>
               </a:lnSpc>
@@ -2971,12 +2621,6 @@
               </a:rPr>
               <a:t>Yesterday you </a:t>
             </a:r>
-            <a:pPr indent="0" marL="0">
-              <a:lnSpc>
-                <a:spcPct val="100000"/>
-              </a:lnSpc>
-              <a:buNone/>
-            </a:pPr>
             <a:r>
               <a:rPr lang="en-US" sz="3100" b="1" dirty="0">
                 <a:solidFill>
@@ -2988,12 +2632,6 @@
               </a:rPr>
               <a:t>used</a:t>
             </a:r>
-            <a:pPr indent="0" marL="0">
-              <a:lnSpc>
-                <a:spcPct val="100000"/>
-              </a:lnSpc>
-              <a:buNone/>
-            </a:pPr>
             <a:r>
               <a:rPr lang="en-US" sz="3100" b="1" dirty="0">
                 <a:solidFill>
@@ -3030,7 +2668,7 @@
           <a:bodyPr wrap="square" lIns="0" tIns="0" rIns="0" bIns="0" rtlCol="0" anchor="ctr"/>
           <a:lstStyle/>
           <a:p>
-            <a:pPr indent="0" marL="0">
+            <a:pPr marL="0" indent="0">
               <a:buNone/>
             </a:pPr>
             <a:r>
@@ -3044,9 +2682,6 @@
               </a:rPr>
               <a:t>Today you </a:t>
             </a:r>
-            <a:pPr indent="0" marL="0">
-              <a:buNone/>
-            </a:pPr>
             <a:r>
               <a:rPr lang="en-US" sz="3100" b="1" dirty="0">
                 <a:solidFill>
@@ -3058,9 +2693,6 @@
               </a:rPr>
               <a:t>build your own</a:t>
             </a:r>
-            <a:pPr indent="0" marL="0">
-              <a:buNone/>
-            </a:pPr>
             <a:r>
               <a:rPr lang="en-US" sz="3100" b="1" dirty="0">
                 <a:solidFill>
@@ -3097,7 +2729,7 @@
           <a:bodyPr wrap="square" lIns="0" tIns="0" rIns="0" bIns="0" rtlCol="0" anchor="ctr"/>
           <a:lstStyle/>
           <a:p>
-            <a:pPr indent="0" marL="0">
+            <a:pPr marL="0" indent="0">
               <a:buNone/>
             </a:pPr>
             <a:r>
@@ -3136,7 +2768,7 @@
           <a:bodyPr wrap="square" rtlCol="0" anchor="ctr"/>
           <a:lstStyle/>
           <a:p>
-            <a:pPr indent="0" marL="0">
+            <a:pPr marL="0" indent="0">
               <a:buNone/>
             </a:pPr>
             <a:r>
@@ -3175,7 +2807,7 @@
           <a:bodyPr wrap="square" rtlCol="0" anchor="ctr"/>
           <a:lstStyle/>
           <a:p>
-            <a:pPr algn="r" indent="0" marL="0">
+            <a:pPr marL="0" indent="0" algn="r">
               <a:buNone/>
             </a:pPr>
             <a:r>
@@ -3209,6 +2841,7 @@
         <a:solidFill>
           <a:srgbClr val="F0EEE6"/>
         </a:solidFill>
+        <a:effectLst/>
       </p:bgPr>
     </p:bg>
     <p:spTree>
@@ -3246,11 +2879,11 @@
           <a:bodyPr wrap="square" lIns="0" tIns="0" rIns="0" bIns="0" rtlCol="0" anchor="ctr"/>
           <a:lstStyle/>
           <a:p>
-            <a:pPr indent="0" marL="0">
-              <a:buNone/>
-            </a:pPr>
-            <a:r>
-              <a:rPr lang="en-US" sz="1100" b="1" spc="200" kern="0" dirty="0">
+            <a:pPr marL="0" indent="0">
+              <a:buNone/>
+            </a:pPr>
+            <a:r>
+              <a:rPr lang="en-US" sz="1100" b="1" kern="0" spc="200" dirty="0">
                 <a:solidFill>
                   <a:srgbClr val="C25E40"/>
                 </a:solidFill>
@@ -3285,7 +2918,7 @@
           <a:bodyPr wrap="square" lIns="0" tIns="0" rIns="0" bIns="0" rtlCol="0" anchor="ctr"/>
           <a:lstStyle/>
           <a:p>
-            <a:pPr indent="0" marL="0">
+            <a:pPr marL="0" indent="0">
               <a:buNone/>
             </a:pPr>
             <a:r>
@@ -3305,51 +2938,7 @@
       </p:sp>
       <p:pic>
         <p:nvPicPr>
-          <p:cNvPr id="4" name="Image 0" descr="preencoded.png">    </p:cNvPr>
-          <p:cNvPicPr>
-            <a:picLocks noChangeAspect="1"/>
-          </p:cNvPicPr>
-          <p:nvPr/>
-        </p:nvPicPr>
-        <p:blipFill>
-          <a:blip r:embed="rId1"/>
-          <a:stretch>
-            <a:fillRect/>
-          </a:stretch>
-        </p:blipFill>
-        <p:spPr>
-          <a:xfrm>
-            <a:off x="8321040" y="402336"/>
-            <a:ext cx="329184" cy="329184"/>
-          </a:xfrm>
-          <a:prstGeom prst="rect">
-            <a:avLst/>
-          </a:prstGeom>
-        </p:spPr>
-      </p:pic>
-      <p:sp>
-        <p:nvSpPr>
-          <p:cNvPr id="5" name="Shape 2"/>
-          <p:cNvSpPr/>
-          <p:nvPr/>
-        </p:nvSpPr>
-        <p:spPr>
-          <a:xfrm>
-            <a:off x="566928" y="1444752"/>
-            <a:ext cx="329184" cy="329184"/>
-          </a:xfrm>
-          <a:prstGeom prst="ellipse">
-            <a:avLst/>
-          </a:prstGeom>
-          <a:solidFill>
-            <a:srgbClr val="D97757"/>
-          </a:solidFill>
-          <a:ln/>
-        </p:spPr>
-      </p:sp>
-      <p:pic>
-        <p:nvPicPr>
-          <p:cNvPr id="6" name="Image 1" descr="preencoded.png">    </p:cNvPr>
+          <p:cNvPr id="4" name="Image 0" descr="preencoded.png"/>
           <p:cNvPicPr>
             <a:picLocks noChangeAspect="1"/>
           </p:cNvPicPr>
@@ -3363,8 +2952,8 @@
         </p:blipFill>
         <p:spPr>
           <a:xfrm>
-            <a:off x="652516" y="1530340"/>
-            <a:ext cx="158008" cy="158008"/>
+            <a:off x="8321040" y="402336"/>
+            <a:ext cx="329184" cy="329184"/>
           </a:xfrm>
           <a:prstGeom prst="rect">
             <a:avLst/>
@@ -3373,52 +2962,13 @@
       </p:pic>
       <p:sp>
         <p:nvSpPr>
-          <p:cNvPr id="7" name="Text 3"/>
-          <p:cNvSpPr/>
-          <p:nvPr/>
-        </p:nvSpPr>
-        <p:spPr>
-          <a:xfrm>
-            <a:off x="1051560" y="1417320"/>
-            <a:ext cx="7406640" cy="457200"/>
-          </a:xfrm>
-          <a:prstGeom prst="rect">
-            <a:avLst/>
-          </a:prstGeom>
-          <a:noFill/>
-          <a:ln/>
-        </p:spPr>
-        <p:txBody>
-          <a:bodyPr wrap="square" lIns="0" tIns="0" rIns="0" bIns="0" rtlCol="0" anchor="ctr"/>
-          <a:lstStyle/>
-          <a:p>
-            <a:pPr indent="0" marL="0">
-              <a:buNone/>
-            </a:pPr>
-            <a:r>
-              <a:rPr lang="en-US" sz="1600" dirty="0">
-                <a:solidFill>
-                  <a:srgbClr val="141413"/>
-                </a:solidFill>
-                <a:latin typeface="Inter" pitchFamily="34" charset="0"/>
-                <a:ea typeface="Inter" pitchFamily="34" charset="-122"/>
-                <a:cs typeface="Inter" pitchFamily="34" charset="-120"/>
-              </a:rPr>
-              <a:t>Connect Day 1's host / client / server model to C#</a:t>
-            </a:r>
-            <a:endParaRPr lang="en-US" sz="1600" dirty="0"/>
-          </a:p>
-        </p:txBody>
-      </p:sp>
-      <p:sp>
-        <p:nvSpPr>
-          <p:cNvPr id="8" name="Shape 4"/>
-          <p:cNvSpPr/>
-          <p:nvPr/>
-        </p:nvSpPr>
-        <p:spPr>
-          <a:xfrm>
-            <a:off x="566928" y="1901952"/>
+          <p:cNvPr id="5" name="Shape 2"/>
+          <p:cNvSpPr/>
+          <p:nvPr/>
+        </p:nvSpPr>
+        <p:spPr>
+          <a:xfrm>
+            <a:off x="566928" y="1444752"/>
             <a:ext cx="329184" cy="329184"/>
           </a:xfrm>
           <a:prstGeom prst="ellipse">
@@ -3429,10 +2979,17 @@
           </a:solidFill>
           <a:ln/>
         </p:spPr>
+        <p:txBody>
+          <a:bodyPr/>
+          <a:lstStyle/>
+          <a:p>
+            <a:endParaRPr lang="en-US"/>
+          </a:p>
+        </p:txBody>
       </p:sp>
       <p:pic>
         <p:nvPicPr>
-          <p:cNvPr id="9" name="Image 2" descr="preencoded.png">    </p:cNvPr>
+          <p:cNvPr id="6" name="Image 1" descr="preencoded.png"/>
           <p:cNvPicPr>
             <a:picLocks noChangeAspect="1"/>
           </p:cNvPicPr>
@@ -3446,7 +3003,7 @@
         </p:blipFill>
         <p:spPr>
           <a:xfrm>
-            <a:off x="652516" y="1987540"/>
+            <a:off x="652516" y="1530340"/>
             <a:ext cx="158008" cy="158008"/>
           </a:xfrm>
           <a:prstGeom prst="rect">
@@ -3456,13 +3013,13 @@
       </p:pic>
       <p:sp>
         <p:nvSpPr>
-          <p:cNvPr id="10" name="Text 5"/>
-          <p:cNvSpPr/>
-          <p:nvPr/>
-        </p:nvSpPr>
-        <p:spPr>
-          <a:xfrm>
-            <a:off x="1051560" y="1874520"/>
+          <p:cNvPr id="7" name="Text 3"/>
+          <p:cNvSpPr/>
+          <p:nvPr/>
+        </p:nvSpPr>
+        <p:spPr>
+          <a:xfrm>
+            <a:off x="1051560" y="1417320"/>
             <a:ext cx="7406640" cy="457200"/>
           </a:xfrm>
           <a:prstGeom prst="rect">
@@ -3475,7 +3032,7 @@
           <a:bodyPr wrap="square" lIns="0" tIns="0" rIns="0" bIns="0" rtlCol="0" anchor="ctr"/>
           <a:lstStyle/>
           <a:p>
-            <a:pPr indent="0" marL="0">
+            <a:pPr marL="0" indent="0">
               <a:buNone/>
             </a:pPr>
             <a:r>
@@ -3487,7 +3044,7 @@
                 <a:ea typeface="Inter" pitchFamily="34" charset="-122"/>
                 <a:cs typeface="Inter" pitchFamily="34" charset="-120"/>
               </a:rPr>
-              <a:t>Install ModelContextProtocol + ModelContextProtocol.AspNetCore (v1.x GA)</a:t>
+              <a:t>Connect Day 1's host / client / server model to C#</a:t>
             </a:r>
             <a:endParaRPr lang="en-US" sz="1600" dirty="0"/>
           </a:p>
@@ -3495,13 +3052,13 @@
       </p:sp>
       <p:sp>
         <p:nvSpPr>
-          <p:cNvPr id="11" name="Shape 6"/>
-          <p:cNvSpPr/>
-          <p:nvPr/>
-        </p:nvSpPr>
-        <p:spPr>
-          <a:xfrm>
-            <a:off x="566928" y="2359152"/>
+          <p:cNvPr id="8" name="Shape 4"/>
+          <p:cNvSpPr/>
+          <p:nvPr/>
+        </p:nvSpPr>
+        <p:spPr>
+          <a:xfrm>
+            <a:off x="566928" y="1901952"/>
             <a:ext cx="329184" cy="329184"/>
           </a:xfrm>
           <a:prstGeom prst="ellipse">
@@ -3512,24 +3069,31 @@
           </a:solidFill>
           <a:ln/>
         </p:spPr>
+        <p:txBody>
+          <a:bodyPr/>
+          <a:lstStyle/>
+          <a:p>
+            <a:endParaRPr lang="en-US"/>
+          </a:p>
+        </p:txBody>
       </p:sp>
       <p:pic>
         <p:nvPicPr>
-          <p:cNvPr id="12" name="Image 3" descr="preencoded.png">    </p:cNvPr>
+          <p:cNvPr id="9" name="Image 2" descr="preencoded.png"/>
           <p:cNvPicPr>
             <a:picLocks noChangeAspect="1"/>
           </p:cNvPicPr>
           <p:nvPr/>
         </p:nvPicPr>
         <p:blipFill>
-          <a:blip r:embed="rId4"/>
+          <a:blip r:embed="rId3"/>
           <a:stretch>
             <a:fillRect/>
           </a:stretch>
         </p:blipFill>
         <p:spPr>
           <a:xfrm>
-            <a:off x="652516" y="2444740"/>
+            <a:off x="652516" y="1987540"/>
             <a:ext cx="158008" cy="158008"/>
           </a:xfrm>
           <a:prstGeom prst="rect">
@@ -3539,13 +3103,13 @@
       </p:pic>
       <p:sp>
         <p:nvSpPr>
-          <p:cNvPr id="13" name="Text 7"/>
-          <p:cNvSpPr/>
-          <p:nvPr/>
-        </p:nvSpPr>
-        <p:spPr>
-          <a:xfrm>
-            <a:off x="1051560" y="2331720"/>
+          <p:cNvPr id="10" name="Text 5"/>
+          <p:cNvSpPr/>
+          <p:nvPr/>
+        </p:nvSpPr>
+        <p:spPr>
+          <a:xfrm>
+            <a:off x="1051560" y="1874520"/>
             <a:ext cx="7406640" cy="457200"/>
           </a:xfrm>
           <a:prstGeom prst="rect">
@@ -3558,7 +3122,7 @@
           <a:bodyPr wrap="square" lIns="0" tIns="0" rIns="0" bIns="0" rtlCol="0" anchor="ctr"/>
           <a:lstStyle/>
           <a:p>
-            <a:pPr indent="0" marL="0">
+            <a:pPr marL="0" indent="0">
               <a:buNone/>
             </a:pPr>
             <a:r>
@@ -3570,7 +3134,7 @@
                 <a:ea typeface="Inter" pitchFamily="34" charset="-122"/>
                 <a:cs typeface="Inter" pitchFamily="34" charset="-120"/>
               </a:rPr>
-              <a:t>Define typed MCP tools</a:t>
+              <a:t>Install ModelContextProtocol + ModelContextProtocol.AspNetCore (v1.x GA)</a:t>
             </a:r>
             <a:endParaRPr lang="en-US" sz="1600" dirty="0"/>
           </a:p>
@@ -3578,13 +3142,13 @@
       </p:sp>
       <p:sp>
         <p:nvSpPr>
-          <p:cNvPr id="14" name="Shape 8"/>
-          <p:cNvSpPr/>
-          <p:nvPr/>
-        </p:nvSpPr>
-        <p:spPr>
-          <a:xfrm>
-            <a:off x="566928" y="2816352"/>
+          <p:cNvPr id="11" name="Shape 6"/>
+          <p:cNvSpPr/>
+          <p:nvPr/>
+        </p:nvSpPr>
+        <p:spPr>
+          <a:xfrm>
+            <a:off x="566928" y="2359152"/>
             <a:ext cx="329184" cy="329184"/>
           </a:xfrm>
           <a:prstGeom prst="ellipse">
@@ -3595,24 +3159,31 @@
           </a:solidFill>
           <a:ln/>
         </p:spPr>
+        <p:txBody>
+          <a:bodyPr/>
+          <a:lstStyle/>
+          <a:p>
+            <a:endParaRPr lang="en-US"/>
+          </a:p>
+        </p:txBody>
       </p:sp>
       <p:pic>
         <p:nvPicPr>
-          <p:cNvPr id="15" name="Image 4" descr="preencoded.png">    </p:cNvPr>
+          <p:cNvPr id="12" name="Image 3" descr="preencoded.png"/>
           <p:cNvPicPr>
             <a:picLocks noChangeAspect="1"/>
           </p:cNvPicPr>
           <p:nvPr/>
         </p:nvPicPr>
         <p:blipFill>
-          <a:blip r:embed="rId5"/>
+          <a:blip r:embed="rId3"/>
           <a:stretch>
             <a:fillRect/>
           </a:stretch>
         </p:blipFill>
         <p:spPr>
           <a:xfrm>
-            <a:off x="652516" y="2901940"/>
+            <a:off x="652516" y="2444740"/>
             <a:ext cx="158008" cy="158008"/>
           </a:xfrm>
           <a:prstGeom prst="rect">
@@ -3622,13 +3193,13 @@
       </p:pic>
       <p:sp>
         <p:nvSpPr>
-          <p:cNvPr id="16" name="Text 9"/>
-          <p:cNvSpPr/>
-          <p:nvPr/>
-        </p:nvSpPr>
-        <p:spPr>
-          <a:xfrm>
-            <a:off x="1051560" y="2788920"/>
+          <p:cNvPr id="13" name="Text 7"/>
+          <p:cNvSpPr/>
+          <p:nvPr/>
+        </p:nvSpPr>
+        <p:spPr>
+          <a:xfrm>
+            <a:off x="1051560" y="2331720"/>
             <a:ext cx="7406640" cy="457200"/>
           </a:xfrm>
           <a:prstGeom prst="rect">
@@ -3641,7 +3212,7 @@
           <a:bodyPr wrap="square" lIns="0" tIns="0" rIns="0" bIns="0" rtlCol="0" anchor="ctr"/>
           <a:lstStyle/>
           <a:p>
-            <a:pPr indent="0" marL="0">
+            <a:pPr marL="0" indent="0">
               <a:buNone/>
             </a:pPr>
             <a:r>
@@ -3653,7 +3224,7 @@
                 <a:ea typeface="Inter" pitchFamily="34" charset="-122"/>
                 <a:cs typeface="Inter" pitchFamily="34" charset="-120"/>
               </a:rPr>
-              <a:t>Wire tools through DI to EF Core &amp; services</a:t>
+              <a:t>Define typed MCP tools</a:t>
             </a:r>
             <a:endParaRPr lang="en-US" sz="1600" dirty="0"/>
           </a:p>
@@ -3661,13 +3232,13 @@
       </p:sp>
       <p:sp>
         <p:nvSpPr>
-          <p:cNvPr id="17" name="Shape 10"/>
-          <p:cNvSpPr/>
-          <p:nvPr/>
-        </p:nvSpPr>
-        <p:spPr>
-          <a:xfrm>
-            <a:off x="566928" y="3273552"/>
+          <p:cNvPr id="14" name="Shape 8"/>
+          <p:cNvSpPr/>
+          <p:nvPr/>
+        </p:nvSpPr>
+        <p:spPr>
+          <a:xfrm>
+            <a:off x="566928" y="2816352"/>
             <a:ext cx="329184" cy="329184"/>
           </a:xfrm>
           <a:prstGeom prst="ellipse">
@@ -3678,24 +3249,31 @@
           </a:solidFill>
           <a:ln/>
         </p:spPr>
+        <p:txBody>
+          <a:bodyPr/>
+          <a:lstStyle/>
+          <a:p>
+            <a:endParaRPr lang="en-US"/>
+          </a:p>
+        </p:txBody>
       </p:sp>
       <p:pic>
         <p:nvPicPr>
-          <p:cNvPr id="18" name="Image 5" descr="preencoded.png">    </p:cNvPr>
+          <p:cNvPr id="15" name="Image 4" descr="preencoded.png"/>
           <p:cNvPicPr>
             <a:picLocks noChangeAspect="1"/>
           </p:cNvPicPr>
           <p:nvPr/>
         </p:nvPicPr>
         <p:blipFill>
-          <a:blip r:embed="rId6"/>
+          <a:blip r:embed="rId3"/>
           <a:stretch>
             <a:fillRect/>
           </a:stretch>
         </p:blipFill>
         <p:spPr>
           <a:xfrm>
-            <a:off x="652516" y="3359140"/>
+            <a:off x="652516" y="2901940"/>
             <a:ext cx="158008" cy="158008"/>
           </a:xfrm>
           <a:prstGeom prst="rect">
@@ -3705,13 +3283,13 @@
       </p:pic>
       <p:sp>
         <p:nvSpPr>
-          <p:cNvPr id="19" name="Text 11"/>
-          <p:cNvSpPr/>
-          <p:nvPr/>
-        </p:nvSpPr>
-        <p:spPr>
-          <a:xfrm>
-            <a:off x="1051560" y="3246120"/>
+          <p:cNvPr id="16" name="Text 9"/>
+          <p:cNvSpPr/>
+          <p:nvPr/>
+        </p:nvSpPr>
+        <p:spPr>
+          <a:xfrm>
+            <a:off x="1051560" y="2788920"/>
             <a:ext cx="7406640" cy="457200"/>
           </a:xfrm>
           <a:prstGeom prst="rect">
@@ -3724,7 +3302,7 @@
           <a:bodyPr wrap="square" lIns="0" tIns="0" rIns="0" bIns="0" rtlCol="0" anchor="ctr"/>
           <a:lstStyle/>
           <a:p>
-            <a:pPr indent="0" marL="0">
+            <a:pPr marL="0" indent="0">
               <a:buNone/>
             </a:pPr>
             <a:r>
@@ -3736,7 +3314,7 @@
                 <a:ea typeface="Inter" pitchFamily="34" charset="-122"/>
                 <a:cs typeface="Inter" pitchFamily="34" charset="-120"/>
               </a:rPr>
-              <a:t>Connect your server to Claude Code</a:t>
+              <a:t>Wire tools through DI to EF Core &amp; services</a:t>
             </a:r>
             <a:endParaRPr lang="en-US" sz="1600" dirty="0"/>
           </a:p>
@@ -3744,13 +3322,13 @@
       </p:sp>
       <p:sp>
         <p:nvSpPr>
-          <p:cNvPr id="20" name="Shape 12"/>
-          <p:cNvSpPr/>
-          <p:nvPr/>
-        </p:nvSpPr>
-        <p:spPr>
-          <a:xfrm>
-            <a:off x="566928" y="3730752"/>
+          <p:cNvPr id="17" name="Shape 10"/>
+          <p:cNvSpPr/>
+          <p:nvPr/>
+        </p:nvSpPr>
+        <p:spPr>
+          <a:xfrm>
+            <a:off x="566928" y="3273552"/>
             <a:ext cx="329184" cy="329184"/>
           </a:xfrm>
           <a:prstGeom prst="ellipse">
@@ -3761,23 +3339,120 @@
           </a:solidFill>
           <a:ln/>
         </p:spPr>
+        <p:txBody>
+          <a:bodyPr/>
+          <a:lstStyle/>
+          <a:p>
+            <a:endParaRPr lang="en-US"/>
+          </a:p>
+        </p:txBody>
       </p:sp>
       <p:pic>
         <p:nvPicPr>
-          <p:cNvPr id="21" name="Image 6" descr="preencoded.png">    </p:cNvPr>
+          <p:cNvPr id="18" name="Image 5" descr="preencoded.png"/>
           <p:cNvPicPr>
             <a:picLocks noChangeAspect="1"/>
           </p:cNvPicPr>
           <p:nvPr/>
         </p:nvPicPr>
         <p:blipFill>
-          <a:blip r:embed="rId7"/>
+          <a:blip r:embed="rId3"/>
           <a:stretch>
             <a:fillRect/>
           </a:stretch>
         </p:blipFill>
         <p:spPr>
           <a:xfrm>
+            <a:off x="652516" y="3359140"/>
+            <a:ext cx="158008" cy="158008"/>
+          </a:xfrm>
+          <a:prstGeom prst="rect">
+            <a:avLst/>
+          </a:prstGeom>
+        </p:spPr>
+      </p:pic>
+      <p:sp>
+        <p:nvSpPr>
+          <p:cNvPr id="19" name="Text 11"/>
+          <p:cNvSpPr/>
+          <p:nvPr/>
+        </p:nvSpPr>
+        <p:spPr>
+          <a:xfrm>
+            <a:off x="1051560" y="3246120"/>
+            <a:ext cx="7406640" cy="457200"/>
+          </a:xfrm>
+          <a:prstGeom prst="rect">
+            <a:avLst/>
+          </a:prstGeom>
+          <a:noFill/>
+          <a:ln/>
+        </p:spPr>
+        <p:txBody>
+          <a:bodyPr wrap="square" lIns="0" tIns="0" rIns="0" bIns="0" rtlCol="0" anchor="ctr"/>
+          <a:lstStyle/>
+          <a:p>
+            <a:pPr marL="0" indent="0">
+              <a:buNone/>
+            </a:pPr>
+            <a:r>
+              <a:rPr lang="en-US" sz="1600" dirty="0">
+                <a:solidFill>
+                  <a:srgbClr val="141413"/>
+                </a:solidFill>
+                <a:latin typeface="Inter" pitchFamily="34" charset="0"/>
+                <a:ea typeface="Inter" pitchFamily="34" charset="-122"/>
+                <a:cs typeface="Inter" pitchFamily="34" charset="-120"/>
+              </a:rPr>
+              <a:t>Connect your server to Claude Code</a:t>
+            </a:r>
+            <a:endParaRPr lang="en-US" sz="1600" dirty="0"/>
+          </a:p>
+        </p:txBody>
+      </p:sp>
+      <p:sp>
+        <p:nvSpPr>
+          <p:cNvPr id="20" name="Shape 12"/>
+          <p:cNvSpPr/>
+          <p:nvPr/>
+        </p:nvSpPr>
+        <p:spPr>
+          <a:xfrm>
+            <a:off x="566928" y="3730752"/>
+            <a:ext cx="329184" cy="329184"/>
+          </a:xfrm>
+          <a:prstGeom prst="ellipse">
+            <a:avLst/>
+          </a:prstGeom>
+          <a:solidFill>
+            <a:srgbClr val="D97757"/>
+          </a:solidFill>
+          <a:ln/>
+        </p:spPr>
+        <p:txBody>
+          <a:bodyPr/>
+          <a:lstStyle/>
+          <a:p>
+            <a:endParaRPr lang="en-US"/>
+          </a:p>
+        </p:txBody>
+      </p:sp>
+      <p:pic>
+        <p:nvPicPr>
+          <p:cNvPr id="21" name="Image 6" descr="preencoded.png"/>
+          <p:cNvPicPr>
+            <a:picLocks noChangeAspect="1"/>
+          </p:cNvPicPr>
+          <p:nvPr/>
+        </p:nvPicPr>
+        <p:blipFill>
+          <a:blip r:embed="rId3"/>
+          <a:stretch>
+            <a:fillRect/>
+          </a:stretch>
+        </p:blipFill>
+        <p:spPr>
+          <a:xfrm>
             <a:off x="652516" y="3816340"/>
             <a:ext cx="158008" cy="158008"/>
           </a:xfrm>
@@ -3807,7 +3482,7 @@
           <a:bodyPr wrap="square" lIns="0" tIns="0" rIns="0" bIns="0" rtlCol="0" anchor="ctr"/>
           <a:lstStyle/>
           <a:p>
-            <a:pPr indent="0" marL="0">
+            <a:pPr marL="0" indent="0">
               <a:buNone/>
             </a:pPr>
             <a:r>
@@ -3846,7 +3521,7 @@
           <a:bodyPr wrap="square" rtlCol="0" anchor="ctr"/>
           <a:lstStyle/>
           <a:p>
-            <a:pPr indent="0" marL="0">
+            <a:pPr marL="0" indent="0">
               <a:buNone/>
             </a:pPr>
             <a:r>
@@ -3885,7 +3560,7 @@
           <a:bodyPr wrap="square" rtlCol="0" anchor="ctr"/>
           <a:lstStyle/>
           <a:p>
-            <a:pPr algn="r" indent="0" marL="0">
+            <a:pPr marL="0" indent="0" algn="r">
               <a:buNone/>
             </a:pPr>
             <a:r>
@@ -3900,45 +3575,6 @@
               <a:t>Day 2 · Section 4  ·  3/11</a:t>
             </a:r>
             <a:endParaRPr lang="en-US" sz="900" dirty="0"/>
-          </a:p>
-        </p:txBody>
-      </p:sp>
-      <p:sp>
-        <p:nvSpPr>
-          <p:cNvPr id="25" name="Text 16"/>
-          <p:cNvSpPr/>
-          <p:nvPr/>
-        </p:nvSpPr>
-        <p:spPr>
-          <a:xfrm>
-            <a:off x="548640" y="4462272"/>
-            <a:ext cx="8046720" cy="274320"/>
-          </a:xfrm>
-          <a:prstGeom prst="rect">
-            <a:avLst/>
-          </a:prstGeom>
-          <a:noFill/>
-          <a:ln/>
-        </p:spPr>
-        <p:txBody>
-          <a:bodyPr wrap="square" lIns="0" tIns="0" rIns="0" bIns="0" rtlCol="0" anchor="ctr"/>
-          <a:lstStyle/>
-          <a:p>
-            <a:pPr indent="0" marL="0">
-              <a:buNone/>
-            </a:pPr>
-            <a:r>
-              <a:rPr lang="en-US" sz="1000" i="1" dirty="0">
-                <a:solidFill>
-                  <a:srgbClr val="615C52"/>
-                </a:solidFill>
-                <a:latin typeface="Inter" pitchFamily="34" charset="0"/>
-                <a:ea typeface="Inter" pitchFamily="34" charset="-122"/>
-                <a:cs typeface="Inter" pitchFamily="34" charset="-120"/>
-              </a:rPr>
-              <a:t>▸ Six objectives — from the Day 1 model to a secured, DI-wired C# server.</a:t>
-            </a:r>
-            <a:endParaRPr lang="en-US" sz="1000" dirty="0"/>
           </a:p>
         </p:txBody>
       </p:sp>
@@ -3958,6 +3594,7 @@
         <a:solidFill>
           <a:srgbClr val="F0EEE6"/>
         </a:solidFill>
+        <a:effectLst/>
       </p:bgPr>
     </p:bg>
     <p:spTree>
@@ -3995,11 +3632,11 @@
           <a:bodyPr wrap="square" lIns="0" tIns="0" rIns="0" bIns="0" rtlCol="0" anchor="ctr"/>
           <a:lstStyle/>
           <a:p>
-            <a:pPr indent="0" marL="0">
-              <a:buNone/>
-            </a:pPr>
-            <a:r>
-              <a:rPr lang="en-US" sz="1100" b="1" spc="200" kern="0" dirty="0">
+            <a:pPr marL="0" indent="0">
+              <a:buNone/>
+            </a:pPr>
+            <a:r>
+              <a:rPr lang="en-US" sz="1100" b="1" kern="0" spc="200" dirty="0">
                 <a:solidFill>
                   <a:srgbClr val="C25E40"/>
                 </a:solidFill>
@@ -4034,7 +3671,7 @@
           <a:bodyPr wrap="square" lIns="0" tIns="0" rIns="0" bIns="0" rtlCol="0" anchor="ctr"/>
           <a:lstStyle/>
           <a:p>
-            <a:pPr indent="0" marL="0">
+            <a:pPr marL="0" indent="0">
               <a:buNone/>
             </a:pPr>
             <a:r>
@@ -4054,14 +3691,14 @@
       </p:sp>
       <p:pic>
         <p:nvPicPr>
-          <p:cNvPr id="4" name="Image 0" descr="preencoded.png">    </p:cNvPr>
+          <p:cNvPr id="4" name="Image 0" descr="preencoded.png"/>
           <p:cNvPicPr>
             <a:picLocks noChangeAspect="1"/>
           </p:cNvPicPr>
           <p:nvPr/>
         </p:nvPicPr>
         <p:blipFill>
-          <a:blip r:embed="rId1"/>
+          <a:blip r:embed="rId2"/>
           <a:stretch>
             <a:fillRect/>
           </a:stretch>
@@ -4102,13 +3739,20 @@
             <a:prstDash val="solid"/>
           </a:ln>
           <a:effectLst>
-            <a:outerShdw sx="100000" sy="100000" kx="0" ky="0" algn="bl" rotWithShape="0" blurRad="88900" dist="38100" dir="5400000">
+            <a:outerShdw blurRad="88900" dist="38100" dir="5400000" algn="bl" rotWithShape="0">
               <a:srgbClr val="000000">
                 <a:alpha val="10000"/>
               </a:srgbClr>
             </a:outerShdw>
           </a:effectLst>
         </p:spPr>
+        <p:txBody>
+          <a:bodyPr/>
+          <a:lstStyle/>
+          <a:p>
+            <a:endParaRPr lang="en-US"/>
+          </a:p>
+        </p:txBody>
       </p:sp>
       <p:sp>
         <p:nvSpPr>
@@ -4129,17 +3773,24 @@
           </a:solidFill>
           <a:ln/>
         </p:spPr>
+        <p:txBody>
+          <a:bodyPr/>
+          <a:lstStyle/>
+          <a:p>
+            <a:endParaRPr lang="en-US"/>
+          </a:p>
+        </p:txBody>
       </p:sp>
       <p:pic>
         <p:nvPicPr>
-          <p:cNvPr id="7" name="Image 1" descr="preencoded.png">    </p:cNvPr>
+          <p:cNvPr id="7" name="Image 1" descr="preencoded.png"/>
           <p:cNvPicPr>
             <a:picLocks noChangeAspect="1"/>
           </p:cNvPicPr>
           <p:nvPr/>
         </p:nvPicPr>
         <p:blipFill>
-          <a:blip r:embed="rId2"/>
+          <a:blip r:embed="rId3"/>
           <a:stretch>
             <a:fillRect/>
           </a:stretch>
@@ -4175,7 +3826,7 @@
           <a:bodyPr wrap="square" lIns="0" tIns="0" rIns="0" bIns="0" rtlCol="0" anchor="ctr"/>
           <a:lstStyle/>
           <a:p>
-            <a:pPr algn="ctr" indent="0" marL="0">
+            <a:pPr marL="0" indent="0" algn="ctr">
               <a:buNone/>
             </a:pPr>
             <a:r>
@@ -4214,7 +3865,7 @@
           <a:bodyPr wrap="square" lIns="0" tIns="0" rIns="0" bIns="0" rtlCol="0" anchor="ctr"/>
           <a:lstStyle/>
           <a:p>
-            <a:pPr algn="ctr" indent="0" marL="0">
+            <a:pPr marL="0" indent="0" algn="ctr">
               <a:buNone/>
             </a:pPr>
             <a:r>
@@ -4253,7 +3904,7 @@
           <a:bodyPr wrap="square" lIns="0" tIns="0" rIns="0" bIns="0" rtlCol="0" anchor="ctr"/>
           <a:lstStyle/>
           <a:p>
-            <a:pPr algn="ctr" indent="0" marL="0">
+            <a:pPr marL="0" indent="0" algn="ctr">
               <a:buNone/>
             </a:pPr>
             <a:r>
@@ -4297,13 +3948,20 @@
             <a:prstDash val="solid"/>
           </a:ln>
           <a:effectLst>
-            <a:outerShdw sx="100000" sy="100000" kx="0" ky="0" algn="bl" rotWithShape="0" blurRad="88900" dist="38100" dir="5400000">
+            <a:outerShdw blurRad="88900" dist="38100" dir="5400000" algn="bl" rotWithShape="0">
               <a:srgbClr val="000000">
                 <a:alpha val="10000"/>
               </a:srgbClr>
             </a:outerShdw>
           </a:effectLst>
         </p:spPr>
+        <p:txBody>
+          <a:bodyPr/>
+          <a:lstStyle/>
+          <a:p>
+            <a:endParaRPr lang="en-US"/>
+          </a:p>
+        </p:txBody>
       </p:sp>
       <p:sp>
         <p:nvSpPr>
@@ -4324,17 +3982,24 @@
           </a:solidFill>
           <a:ln/>
         </p:spPr>
+        <p:txBody>
+          <a:bodyPr/>
+          <a:lstStyle/>
+          <a:p>
+            <a:endParaRPr lang="en-US"/>
+          </a:p>
+        </p:txBody>
       </p:sp>
       <p:pic>
         <p:nvPicPr>
-          <p:cNvPr id="13" name="Image 2" descr="preencoded.png">    </p:cNvPr>
+          <p:cNvPr id="13" name="Image 2" descr="preencoded.png"/>
           <p:cNvPicPr>
             <a:picLocks noChangeAspect="1"/>
           </p:cNvPicPr>
           <p:nvPr/>
         </p:nvPicPr>
         <p:blipFill>
-          <a:blip r:embed="rId3"/>
+          <a:blip r:embed="rId4"/>
           <a:stretch>
             <a:fillRect/>
           </a:stretch>
@@ -4370,7 +4035,7 @@
           <a:bodyPr wrap="square" lIns="0" tIns="0" rIns="0" bIns="0" rtlCol="0" anchor="ctr"/>
           <a:lstStyle/>
           <a:p>
-            <a:pPr algn="ctr" indent="0" marL="0">
+            <a:pPr marL="0" indent="0" algn="ctr">
               <a:buNone/>
             </a:pPr>
             <a:r>
@@ -4409,7 +4074,7 @@
           <a:bodyPr wrap="square" lIns="0" tIns="0" rIns="0" bIns="0" rtlCol="0" anchor="ctr"/>
           <a:lstStyle/>
           <a:p>
-            <a:pPr algn="ctr" indent="0" marL="0">
+            <a:pPr marL="0" indent="0" algn="ctr">
               <a:buNone/>
             </a:pPr>
             <a:r>
@@ -4448,7 +4113,7 @@
           <a:bodyPr wrap="square" lIns="0" tIns="0" rIns="0" bIns="0" rtlCol="0" anchor="ctr"/>
           <a:lstStyle/>
           <a:p>
-            <a:pPr algn="ctr" indent="0" marL="0">
+            <a:pPr marL="0" indent="0" algn="ctr">
               <a:buNone/>
             </a:pPr>
             <a:r>
@@ -4492,13 +4157,20 @@
             <a:prstDash val="solid"/>
           </a:ln>
           <a:effectLst>
-            <a:outerShdw sx="100000" sy="100000" kx="0" ky="0" algn="bl" rotWithShape="0" blurRad="88900" dist="38100" dir="5400000">
+            <a:outerShdw blurRad="88900" dist="38100" dir="5400000" algn="bl" rotWithShape="0">
               <a:srgbClr val="000000">
                 <a:alpha val="10000"/>
               </a:srgbClr>
             </a:outerShdw>
           </a:effectLst>
         </p:spPr>
+        <p:txBody>
+          <a:bodyPr/>
+          <a:lstStyle/>
+          <a:p>
+            <a:endParaRPr lang="en-US"/>
+          </a:p>
+        </p:txBody>
       </p:sp>
       <p:sp>
         <p:nvSpPr>
@@ -4519,17 +4191,24 @@
           </a:solidFill>
           <a:ln/>
         </p:spPr>
+        <p:txBody>
+          <a:bodyPr/>
+          <a:lstStyle/>
+          <a:p>
+            <a:endParaRPr lang="en-US"/>
+          </a:p>
+        </p:txBody>
       </p:sp>
       <p:pic>
         <p:nvPicPr>
-          <p:cNvPr id="19" name="Image 3" descr="preencoded.png">    </p:cNvPr>
+          <p:cNvPr id="19" name="Image 3" descr="preencoded.png"/>
           <p:cNvPicPr>
             <a:picLocks noChangeAspect="1"/>
           </p:cNvPicPr>
           <p:nvPr/>
         </p:nvPicPr>
         <p:blipFill>
-          <a:blip r:embed="rId4"/>
+          <a:blip r:embed="rId5"/>
           <a:stretch>
             <a:fillRect/>
           </a:stretch>
@@ -4565,7 +4244,7 @@
           <a:bodyPr wrap="square" lIns="0" tIns="0" rIns="0" bIns="0" rtlCol="0" anchor="ctr"/>
           <a:lstStyle/>
           <a:p>
-            <a:pPr algn="ctr" indent="0" marL="0">
+            <a:pPr marL="0" indent="0" algn="ctr">
               <a:buNone/>
             </a:pPr>
             <a:r>
@@ -4604,7 +4283,7 @@
           <a:bodyPr wrap="square" lIns="0" tIns="0" rIns="0" bIns="0" rtlCol="0" anchor="ctr"/>
           <a:lstStyle/>
           <a:p>
-            <a:pPr algn="ctr" indent="0" marL="0">
+            <a:pPr marL="0" indent="0" algn="ctr">
               <a:buNone/>
             </a:pPr>
             <a:r>
@@ -4643,11 +4322,11 @@
           <a:bodyPr wrap="square" lIns="0" tIns="0" rIns="0" bIns="0" rtlCol="0" anchor="ctr"/>
           <a:lstStyle/>
           <a:p>
-            <a:pPr indent="0" marL="0">
-              <a:buNone/>
-            </a:pPr>
-            <a:r>
-              <a:rPr lang="en-US" sz="1100" b="1" spc="100" kern="0" dirty="0">
+            <a:pPr marL="0" indent="0">
+              <a:buNone/>
+            </a:pPr>
+            <a:r>
+              <a:rPr lang="en-US" sz="1100" b="1" kern="0" spc="100" dirty="0">
                 <a:solidFill>
                   <a:srgbClr val="C25E40"/>
                 </a:solidFill>
@@ -4687,6 +4366,13 @@
             <a:prstDash val="solid"/>
           </a:ln>
         </p:spPr>
+        <p:txBody>
+          <a:bodyPr/>
+          <a:lstStyle/>
+          <a:p>
+            <a:endParaRPr lang="en-US"/>
+          </a:p>
+        </p:txBody>
       </p:sp>
       <p:sp>
         <p:nvSpPr>
@@ -4707,17 +4393,24 @@
           </a:solidFill>
           <a:ln/>
         </p:spPr>
+        <p:txBody>
+          <a:bodyPr/>
+          <a:lstStyle/>
+          <a:p>
+            <a:endParaRPr lang="en-US"/>
+          </a:p>
+        </p:txBody>
       </p:sp>
       <p:pic>
         <p:nvPicPr>
-          <p:cNvPr id="25" name="Image 4" descr="preencoded.png">    </p:cNvPr>
+          <p:cNvPr id="25" name="Image 4" descr="preencoded.png"/>
           <p:cNvPicPr>
             <a:picLocks noChangeAspect="1"/>
           </p:cNvPicPr>
           <p:nvPr/>
         </p:nvPicPr>
         <p:blipFill>
-          <a:blip r:embed="rId5"/>
+          <a:blip r:embed="rId6"/>
           <a:stretch>
             <a:fillRect/>
           </a:stretch>
@@ -4753,7 +4446,7 @@
           <a:bodyPr wrap="square" lIns="0" tIns="0" rIns="0" bIns="0" rtlCol="0" anchor="ctr"/>
           <a:lstStyle/>
           <a:p>
-            <a:pPr indent="0" marL="0">
+            <a:pPr marL="0" indent="0">
               <a:buNone/>
             </a:pPr>
             <a:r>
@@ -4767,9 +4460,6 @@
               </a:rPr>
               <a:t>Tools</a:t>
             </a:r>
-            <a:pPr indent="0" marL="0">
-              <a:buNone/>
-            </a:pPr>
             <a:r>
               <a:rPr lang="en-US" sz="1150" dirty="0">
                 <a:solidFill>
@@ -4811,6 +4501,13 @@
             <a:prstDash val="solid"/>
           </a:ln>
         </p:spPr>
+        <p:txBody>
+          <a:bodyPr/>
+          <a:lstStyle/>
+          <a:p>
+            <a:endParaRPr lang="en-US"/>
+          </a:p>
+        </p:txBody>
       </p:sp>
       <p:sp>
         <p:nvSpPr>
@@ -4831,17 +4528,24 @@
           </a:solidFill>
           <a:ln/>
         </p:spPr>
+        <p:txBody>
+          <a:bodyPr/>
+          <a:lstStyle/>
+          <a:p>
+            <a:endParaRPr lang="en-US"/>
+          </a:p>
+        </p:txBody>
       </p:sp>
       <p:pic>
         <p:nvPicPr>
-          <p:cNvPr id="29" name="Image 5" descr="preencoded.png">    </p:cNvPr>
+          <p:cNvPr id="29" name="Image 5" descr="preencoded.png"/>
           <p:cNvPicPr>
             <a:picLocks noChangeAspect="1"/>
           </p:cNvPicPr>
           <p:nvPr/>
         </p:nvPicPr>
         <p:blipFill>
-          <a:blip r:embed="rId6"/>
+          <a:blip r:embed="rId7"/>
           <a:stretch>
             <a:fillRect/>
           </a:stretch>
@@ -4877,7 +4581,7 @@
           <a:bodyPr wrap="square" lIns="0" tIns="0" rIns="0" bIns="0" rtlCol="0" anchor="ctr"/>
           <a:lstStyle/>
           <a:p>
-            <a:pPr indent="0" marL="0">
+            <a:pPr marL="0" indent="0">
               <a:buNone/>
             </a:pPr>
             <a:r>
@@ -4891,9 +4595,6 @@
               </a:rPr>
               <a:t>Resources</a:t>
             </a:r>
-            <a:pPr indent="0" marL="0">
-              <a:buNone/>
-            </a:pPr>
             <a:r>
               <a:rPr lang="en-US" sz="1150" dirty="0">
                 <a:solidFill>
@@ -4935,6 +4636,13 @@
             <a:prstDash val="solid"/>
           </a:ln>
         </p:spPr>
+        <p:txBody>
+          <a:bodyPr/>
+          <a:lstStyle/>
+          <a:p>
+            <a:endParaRPr lang="en-US"/>
+          </a:p>
+        </p:txBody>
       </p:sp>
       <p:sp>
         <p:nvSpPr>
@@ -4955,17 +4663,24 @@
           </a:solidFill>
           <a:ln/>
         </p:spPr>
+        <p:txBody>
+          <a:bodyPr/>
+          <a:lstStyle/>
+          <a:p>
+            <a:endParaRPr lang="en-US"/>
+          </a:p>
+        </p:txBody>
       </p:sp>
       <p:pic>
         <p:nvPicPr>
-          <p:cNvPr id="33" name="Image 6" descr="preencoded.png">    </p:cNvPr>
+          <p:cNvPr id="33" name="Image 6" descr="preencoded.png"/>
           <p:cNvPicPr>
             <a:picLocks noChangeAspect="1"/>
           </p:cNvPicPr>
           <p:nvPr/>
         </p:nvPicPr>
         <p:blipFill>
-          <a:blip r:embed="rId7"/>
+          <a:blip r:embed="rId8"/>
           <a:stretch>
             <a:fillRect/>
           </a:stretch>
@@ -5001,7 +4716,7 @@
           <a:bodyPr wrap="square" lIns="0" tIns="0" rIns="0" bIns="0" rtlCol="0" anchor="ctr"/>
           <a:lstStyle/>
           <a:p>
-            <a:pPr indent="0" marL="0">
+            <a:pPr marL="0" indent="0">
               <a:buNone/>
             </a:pPr>
             <a:r>
@@ -5015,9 +4730,6 @@
               </a:rPr>
               <a:t>Prompts</a:t>
             </a:r>
-            <a:pPr indent="0" marL="0">
-              <a:buNone/>
-            </a:pPr>
             <a:r>
               <a:rPr lang="en-US" sz="1150" dirty="0">
                 <a:solidFill>
@@ -5054,7 +4766,7 @@
           <a:bodyPr wrap="square" rtlCol="0" anchor="ctr"/>
           <a:lstStyle/>
           <a:p>
-            <a:pPr indent="0" marL="0">
+            <a:pPr marL="0" indent="0">
               <a:buNone/>
             </a:pPr>
             <a:r>
@@ -5093,7 +4805,7 @@
           <a:bodyPr wrap="square" rtlCol="0" anchor="ctr"/>
           <a:lstStyle/>
           <a:p>
-            <a:pPr algn="r" indent="0" marL="0">
+            <a:pPr marL="0" indent="0" algn="r">
               <a:buNone/>
             </a:pPr>
             <a:r>
@@ -5108,45 +4820,6 @@
               <a:t>Day 2 · Section 4  ·  4/11</a:t>
             </a:r>
             <a:endParaRPr lang="en-US" sz="900" dirty="0"/>
-          </a:p>
-        </p:txBody>
-      </p:sp>
-      <p:sp>
-        <p:nvSpPr>
-          <p:cNvPr id="37" name="Text 28"/>
-          <p:cNvSpPr/>
-          <p:nvPr/>
-        </p:nvSpPr>
-        <p:spPr>
-          <a:xfrm>
-            <a:off x="548640" y="4462272"/>
-            <a:ext cx="8046720" cy="274320"/>
-          </a:xfrm>
-          <a:prstGeom prst="rect">
-            <a:avLst/>
-          </a:prstGeom>
-          <a:noFill/>
-          <a:ln/>
-        </p:spPr>
-        <p:txBody>
-          <a:bodyPr wrap="square" lIns="0" tIns="0" rIns="0" bIns="0" rtlCol="0" anchor="ctr"/>
-          <a:lstStyle/>
-          <a:p>
-            <a:pPr indent="0" marL="0">
-              <a:buNone/>
-            </a:pPr>
-            <a:r>
-              <a:rPr lang="en-US" sz="1000" i="1" dirty="0">
-                <a:solidFill>
-                  <a:srgbClr val="615C52"/>
-                </a:solidFill>
-                <a:latin typeface="Inter" pitchFamily="34" charset="0"/>
-                <a:ea typeface="Inter" pitchFamily="34" charset="-122"/>
-                <a:cs typeface="Inter" pitchFamily="34" charset="-120"/>
-              </a:rPr>
-              <a:t>▸ Same model as Day 1 — today you implement the server box in C#.</a:t>
-            </a:r>
-            <a:endParaRPr lang="en-US" sz="1000" dirty="0"/>
           </a:p>
         </p:txBody>
       </p:sp>
@@ -5166,6 +4839,7 @@
         <a:solidFill>
           <a:srgbClr val="F0EEE6"/>
         </a:solidFill>
+        <a:effectLst/>
       </p:bgPr>
     </p:bg>
     <p:spTree>
@@ -5203,11 +4877,11 @@
           <a:bodyPr wrap="square" lIns="0" tIns="0" rIns="0" bIns="0" rtlCol="0" anchor="ctr"/>
           <a:lstStyle/>
           <a:p>
-            <a:pPr indent="0" marL="0">
-              <a:buNone/>
-            </a:pPr>
-            <a:r>
-              <a:rPr lang="en-US" sz="1100" b="1" spc="200" kern="0" dirty="0">
+            <a:pPr marL="0" indent="0">
+              <a:buNone/>
+            </a:pPr>
+            <a:r>
+              <a:rPr lang="en-US" sz="1100" b="1" kern="0" spc="200" dirty="0">
                 <a:solidFill>
                   <a:srgbClr val="C25E40"/>
                 </a:solidFill>
@@ -5242,7 +4916,7 @@
           <a:bodyPr wrap="square" lIns="0" tIns="0" rIns="0" bIns="0" rtlCol="0" anchor="ctr"/>
           <a:lstStyle/>
           <a:p>
-            <a:pPr indent="0" marL="0">
+            <a:pPr marL="0" indent="0">
               <a:buNone/>
             </a:pPr>
             <a:r>
@@ -5262,261 +4936,7 @@
       </p:sp>
       <p:pic>
         <p:nvPicPr>
-          <p:cNvPr id="4" name="Image 0" descr="preencoded.png">    </p:cNvPr>
-          <p:cNvPicPr>
-            <a:picLocks noChangeAspect="1"/>
-          </p:cNvPicPr>
-          <p:nvPr/>
-        </p:nvPicPr>
-        <p:blipFill>
-          <a:blip r:embed="rId1"/>
-          <a:stretch>
-            <a:fillRect/>
-          </a:stretch>
-        </p:blipFill>
-        <p:spPr>
-          <a:xfrm>
-            <a:off x="8321040" y="402336"/>
-            <a:ext cx="329184" cy="329184"/>
-          </a:xfrm>
-          <a:prstGeom prst="rect">
-            <a:avLst/>
-          </a:prstGeom>
-        </p:spPr>
-      </p:pic>
-      <p:sp>
-        <p:nvSpPr>
-          <p:cNvPr id="5" name="Shape 2"/>
-          <p:cNvSpPr/>
-          <p:nvPr/>
-        </p:nvSpPr>
-        <p:spPr>
-          <a:xfrm>
-            <a:off x="548640" y="1371600"/>
-            <a:ext cx="4572000" cy="2331720"/>
-          </a:xfrm>
-          <a:prstGeom prst="roundRect">
-            <a:avLst>
-              <a:gd name="adj" fmla="val 3137"/>
-            </a:avLst>
-          </a:prstGeom>
-          <a:solidFill>
-            <a:srgbClr val="1F1E1D"/>
-          </a:solidFill>
-          <a:ln/>
-          <a:effectLst>
-            <a:outerShdw sx="100000" sy="100000" kx="0" ky="0" algn="bl" rotWithShape="0" blurRad="88900" dist="38100" dir="5400000">
-              <a:srgbClr val="000000">
-                <a:alpha val="10000"/>
-              </a:srgbClr>
-            </a:outerShdw>
-          </a:effectLst>
-        </p:spPr>
-      </p:sp>
-      <p:sp>
-        <p:nvSpPr>
-          <p:cNvPr id="6" name="Text 3"/>
-          <p:cNvSpPr/>
-          <p:nvPr/>
-        </p:nvSpPr>
-        <p:spPr>
-          <a:xfrm>
-            <a:off x="822960" y="1517904"/>
-            <a:ext cx="4023360" cy="256032"/>
-          </a:xfrm>
-          <a:prstGeom prst="rect">
-            <a:avLst/>
-          </a:prstGeom>
-          <a:noFill/>
-          <a:ln/>
-        </p:spPr>
-        <p:txBody>
-          <a:bodyPr wrap="square" lIns="0" tIns="0" rIns="0" bIns="0" rtlCol="0" anchor="ctr"/>
-          <a:lstStyle/>
-          <a:p>
-            <a:pPr indent="0" marL="0">
-              <a:buNone/>
-            </a:pPr>
-            <a:r>
-              <a:rPr lang="en-US" sz="1050" b="1" spc="50" kern="0" dirty="0">
-                <a:solidFill>
-                  <a:srgbClr val="D97757"/>
-                </a:solidFill>
-                <a:latin typeface="Courier New" pitchFamily="34" charset="0"/>
-                <a:ea typeface="Courier New" pitchFamily="34" charset="-122"/>
-                <a:cs typeface="Courier New" pitchFamily="34" charset="-120"/>
-              </a:rPr>
-              <a:t>// solution</a:t>
-            </a:r>
-            <a:endParaRPr lang="en-US" sz="1050" dirty="0"/>
-          </a:p>
-        </p:txBody>
-      </p:sp>
-      <p:sp>
-        <p:nvSpPr>
-          <p:cNvPr id="7" name="Text 4"/>
-          <p:cNvSpPr/>
-          <p:nvPr/>
-        </p:nvSpPr>
-        <p:spPr>
-          <a:xfrm>
-            <a:off x="841248" y="1828800"/>
-            <a:ext cx="4023360" cy="1691640"/>
-          </a:xfrm>
-          <a:prstGeom prst="rect">
-            <a:avLst/>
-          </a:prstGeom>
-          <a:noFill/>
-          <a:ln/>
-        </p:spPr>
-        <p:txBody>
-          <a:bodyPr wrap="square" lIns="0" tIns="0" rIns="0" bIns="0" rtlCol="0" anchor="t"/>
-          <a:lstStyle/>
-          <a:p>
-            <a:pPr indent="0" marL="0">
-              <a:lnSpc>
-                <a:spcPct val="128000"/>
-              </a:lnSpc>
-              <a:buNone/>
-            </a:pPr>
-            <a:r>
-              <a:rPr lang="en-US" sz="1300" b="1" dirty="0">
-                <a:solidFill>
-                  <a:srgbClr val="D97757"/>
-                </a:solidFill>
-                <a:latin typeface="Courier New" pitchFamily="34" charset="0"/>
-                <a:ea typeface="Courier New" pitchFamily="34" charset="-122"/>
-                <a:cs typeface="Courier New" pitchFamily="34" charset="-120"/>
-              </a:rPr>
-              <a:t>BookTracker.Mcp/</a:t>
-            </a:r>
-            <a:endParaRPr lang="en-US" sz="1300" dirty="0"/>
-          </a:p>
-          <a:p>
-            <a:pPr indent="0" marL="0">
-              <a:lnSpc>
-                <a:spcPct val="128000"/>
-              </a:lnSpc>
-              <a:buNone/>
-            </a:pPr>
-            <a:r>
-              <a:rPr lang="en-US" sz="1300" dirty="0">
-                <a:solidFill>
-                  <a:srgbClr val="E9E5DD"/>
-                </a:solidFill>
-                <a:latin typeface="Courier New" pitchFamily="34" charset="0"/>
-                <a:ea typeface="Courier New" pitchFamily="34" charset="-122"/>
-                <a:cs typeface="Courier New" pitchFamily="34" charset="-120"/>
-              </a:rPr>
-              <a:t>├─ Program.cs</a:t>
-            </a:r>
-            <a:endParaRPr lang="en-US" sz="1300" dirty="0"/>
-          </a:p>
-          <a:p>
-            <a:pPr indent="0" marL="0">
-              <a:lnSpc>
-                <a:spcPct val="128000"/>
-              </a:lnSpc>
-              <a:buNone/>
-            </a:pPr>
-            <a:r>
-              <a:rPr lang="en-US" sz="1300" dirty="0">
-                <a:solidFill>
-                  <a:srgbClr val="E9E5DD"/>
-                </a:solidFill>
-                <a:latin typeface="Courier New" pitchFamily="34" charset="0"/>
-                <a:ea typeface="Courier New" pitchFamily="34" charset="-122"/>
-                <a:cs typeface="Courier New" pitchFamily="34" charset="-120"/>
-              </a:rPr>
-              <a:t>├─ Tools/</a:t>
-            </a:r>
-            <a:endParaRPr lang="en-US" sz="1300" dirty="0"/>
-          </a:p>
-          <a:p>
-            <a:pPr indent="0" marL="0">
-              <a:lnSpc>
-                <a:spcPct val="128000"/>
-              </a:lnSpc>
-              <a:buNone/>
-            </a:pPr>
-            <a:r>
-              <a:rPr lang="en-US" sz="1300" dirty="0">
-                <a:solidFill>
-                  <a:srgbClr val="E9E5DD"/>
-                </a:solidFill>
-                <a:latin typeface="Courier New" pitchFamily="34" charset="0"/>
-                <a:ea typeface="Courier New" pitchFamily="34" charset="-122"/>
-                <a:cs typeface="Courier New" pitchFamily="34" charset="-120"/>
-              </a:rPr>
-              <a:t>│   └─ BookTools.cs</a:t>
-            </a:r>
-            <a:endParaRPr lang="en-US" sz="1300" dirty="0"/>
-          </a:p>
-          <a:p>
-            <a:pPr indent="0" marL="0">
-              <a:lnSpc>
-                <a:spcPct val="128000"/>
-              </a:lnSpc>
-              <a:buNone/>
-            </a:pPr>
-            <a:r>
-              <a:rPr lang="en-US" sz="1300" dirty="0">
-                <a:solidFill>
-                  <a:srgbClr val="E9E5DD"/>
-                </a:solidFill>
-                <a:latin typeface="Courier New" pitchFamily="34" charset="0"/>
-                <a:ea typeface="Courier New" pitchFamily="34" charset="-122"/>
-                <a:cs typeface="Courier New" pitchFamily="34" charset="-120"/>
-              </a:rPr>
-              <a:t>└─ BookTracker.Mcp.csproj</a:t>
-            </a:r>
-            <a:endParaRPr lang="en-US" sz="1300" dirty="0"/>
-          </a:p>
-          <a:p>
-            <a:pPr indent="0" marL="0">
-              <a:lnSpc>
-                <a:spcPct val="128000"/>
-              </a:lnSpc>
-              <a:buNone/>
-            </a:pPr>
-            <a:r>
-              <a:rPr lang="en-US" sz="1300" dirty="0">
-                <a:solidFill>
-                  <a:srgbClr val="9A958B"/>
-                </a:solidFill>
-                <a:latin typeface="Courier New" pitchFamily="34" charset="0"/>
-                <a:ea typeface="Courier New" pitchFamily="34" charset="-122"/>
-                <a:cs typeface="Courier New" pitchFamily="34" charset="-120"/>
-              </a:rPr>
-              <a:t>// + ModelContextProtocol &amp; .AspNetCore pkgs</a:t>
-            </a:r>
-            <a:endParaRPr lang="en-US" sz="1300" dirty="0"/>
-          </a:p>
-        </p:txBody>
-      </p:sp>
-      <p:sp>
-        <p:nvSpPr>
-          <p:cNvPr id="8" name="Shape 5"/>
-          <p:cNvSpPr/>
-          <p:nvPr/>
-        </p:nvSpPr>
-        <p:spPr>
-          <a:xfrm>
-            <a:off x="5440680" y="1463040"/>
-            <a:ext cx="420624" cy="420624"/>
-          </a:xfrm>
-          <a:prstGeom prst="ellipse">
-            <a:avLst/>
-          </a:prstGeom>
-          <a:solidFill>
-            <a:srgbClr val="D97757"/>
-          </a:solidFill>
-          <a:ln/>
-        </p:spPr>
-      </p:sp>
-      <p:pic>
-        <p:nvPicPr>
-          <p:cNvPr id="9" name="Image 1" descr="preencoded.png">    </p:cNvPr>
+          <p:cNvPr id="4" name="Image 0" descr="preencoded.png"/>
           <p:cNvPicPr>
             <a:picLocks noChangeAspect="1"/>
           </p:cNvPicPr>
@@ -5530,8 +4950,8 @@
         </p:blipFill>
         <p:spPr>
           <a:xfrm>
-            <a:off x="5550042" y="1572402"/>
-            <a:ext cx="201900" cy="201900"/>
+            <a:off x="8321040" y="402336"/>
+            <a:ext cx="329184" cy="329184"/>
           </a:xfrm>
           <a:prstGeom prst="rect">
             <a:avLst/>
@@ -5540,91 +4960,230 @@
       </p:pic>
       <p:sp>
         <p:nvSpPr>
-          <p:cNvPr id="10" name="Text 6"/>
-          <p:cNvSpPr/>
-          <p:nvPr/>
-        </p:nvSpPr>
-        <p:spPr>
-          <a:xfrm>
-            <a:off x="6007608" y="1426464"/>
-            <a:ext cx="3108960" cy="292608"/>
-          </a:xfrm>
-          <a:prstGeom prst="rect">
-            <a:avLst/>
-          </a:prstGeom>
-          <a:noFill/>
-          <a:ln/>
-        </p:spPr>
-        <p:txBody>
-          <a:bodyPr wrap="square" lIns="0" tIns="0" rIns="0" bIns="0" rtlCol="0" anchor="ctr"/>
-          <a:lstStyle/>
-          <a:p>
-            <a:pPr indent="0" marL="0">
-              <a:buNone/>
-            </a:pPr>
-            <a:r>
-              <a:rPr lang="en-US" sz="1400" b="1" dirty="0">
-                <a:solidFill>
-                  <a:srgbClr val="141413"/>
-                </a:solidFill>
-                <a:latin typeface="Inter" pitchFamily="34" charset="0"/>
-                <a:ea typeface="Inter" pitchFamily="34" charset="-122"/>
-                <a:cs typeface="Inter" pitchFamily="34" charset="-120"/>
-              </a:rPr>
-              <a:t>New project</a:t>
-            </a:r>
-            <a:endParaRPr lang="en-US" sz="1400" dirty="0"/>
-          </a:p>
-        </p:txBody>
-      </p:sp>
-      <p:sp>
-        <p:nvSpPr>
-          <p:cNvPr id="11" name="Text 7"/>
-          <p:cNvSpPr/>
-          <p:nvPr/>
-        </p:nvSpPr>
-        <p:spPr>
-          <a:xfrm>
-            <a:off x="6007608" y="1709928"/>
-            <a:ext cx="3154680" cy="411480"/>
-          </a:xfrm>
-          <a:prstGeom prst="rect">
-            <a:avLst/>
-          </a:prstGeom>
-          <a:noFill/>
-          <a:ln/>
-        </p:spPr>
-        <p:txBody>
-          <a:bodyPr wrap="square" lIns="0" tIns="0" rIns="0" bIns="0" rtlCol="0" anchor="ctr"/>
-          <a:lstStyle/>
-          <a:p>
-            <a:pPr indent="0" marL="0">
-              <a:buNone/>
-            </a:pPr>
-            <a:r>
-              <a:rPr lang="en-US" sz="1150" dirty="0">
-                <a:solidFill>
-                  <a:srgbClr val="615C52"/>
-                </a:solidFill>
-                <a:latin typeface="Inter" pitchFamily="34" charset="0"/>
-                <a:ea typeface="Inter" pitchFamily="34" charset="-122"/>
-                <a:cs typeface="Inter" pitchFamily="34" charset="-120"/>
-              </a:rPr>
-              <a:t>BookTracker.Mcp in the solution</a:t>
-            </a:r>
-            <a:endParaRPr lang="en-US" sz="1150" dirty="0"/>
-          </a:p>
-        </p:txBody>
-      </p:sp>
-      <p:sp>
-        <p:nvSpPr>
-          <p:cNvPr id="12" name="Shape 8"/>
-          <p:cNvSpPr/>
-          <p:nvPr/>
-        </p:nvSpPr>
-        <p:spPr>
-          <a:xfrm>
-            <a:off x="5440680" y="2240280"/>
+          <p:cNvPr id="5" name="Shape 2"/>
+          <p:cNvSpPr/>
+          <p:nvPr/>
+        </p:nvSpPr>
+        <p:spPr>
+          <a:xfrm>
+            <a:off x="548640" y="1371600"/>
+            <a:ext cx="4572000" cy="2331720"/>
+          </a:xfrm>
+          <a:prstGeom prst="roundRect">
+            <a:avLst>
+              <a:gd name="adj" fmla="val 3137"/>
+            </a:avLst>
+          </a:prstGeom>
+          <a:solidFill>
+            <a:srgbClr val="1F1E1D"/>
+          </a:solidFill>
+          <a:ln/>
+          <a:effectLst>
+            <a:outerShdw blurRad="88900" dist="38100" dir="5400000" algn="bl" rotWithShape="0">
+              <a:srgbClr val="000000">
+                <a:alpha val="10000"/>
+              </a:srgbClr>
+            </a:outerShdw>
+          </a:effectLst>
+        </p:spPr>
+        <p:txBody>
+          <a:bodyPr/>
+          <a:lstStyle/>
+          <a:p>
+            <a:endParaRPr lang="en-US"/>
+          </a:p>
+        </p:txBody>
+      </p:sp>
+      <p:sp>
+        <p:nvSpPr>
+          <p:cNvPr id="6" name="Text 3"/>
+          <p:cNvSpPr/>
+          <p:nvPr/>
+        </p:nvSpPr>
+        <p:spPr>
+          <a:xfrm>
+            <a:off x="822960" y="1517904"/>
+            <a:ext cx="4023360" cy="256032"/>
+          </a:xfrm>
+          <a:prstGeom prst="rect">
+            <a:avLst/>
+          </a:prstGeom>
+          <a:noFill/>
+          <a:ln/>
+        </p:spPr>
+        <p:txBody>
+          <a:bodyPr wrap="square" lIns="0" tIns="0" rIns="0" bIns="0" rtlCol="0" anchor="ctr"/>
+          <a:lstStyle/>
+          <a:p>
+            <a:pPr marL="0" indent="0">
+              <a:buNone/>
+            </a:pPr>
+            <a:r>
+              <a:rPr lang="en-US" sz="1050" b="1" kern="0" spc="50" dirty="0">
+                <a:solidFill>
+                  <a:srgbClr val="D97757"/>
+                </a:solidFill>
+                <a:latin typeface="Courier New" pitchFamily="34" charset="0"/>
+                <a:ea typeface="Courier New" pitchFamily="34" charset="-122"/>
+                <a:cs typeface="Courier New" pitchFamily="34" charset="-120"/>
+              </a:rPr>
+              <a:t>// solution</a:t>
+            </a:r>
+            <a:endParaRPr lang="en-US" sz="1050" dirty="0"/>
+          </a:p>
+        </p:txBody>
+      </p:sp>
+      <p:sp>
+        <p:nvSpPr>
+          <p:cNvPr id="7" name="Text 4"/>
+          <p:cNvSpPr/>
+          <p:nvPr/>
+        </p:nvSpPr>
+        <p:spPr>
+          <a:xfrm>
+            <a:off x="841248" y="1828800"/>
+            <a:ext cx="4023360" cy="1691640"/>
+          </a:xfrm>
+          <a:prstGeom prst="rect">
+            <a:avLst/>
+          </a:prstGeom>
+          <a:noFill/>
+          <a:ln/>
+        </p:spPr>
+        <p:txBody>
+          <a:bodyPr wrap="square" lIns="0" tIns="0" rIns="0" bIns="0" rtlCol="0" anchor="t"/>
+          <a:lstStyle/>
+          <a:p>
+            <a:pPr marL="0" indent="0">
+              <a:lnSpc>
+                <a:spcPct val="128000"/>
+              </a:lnSpc>
+              <a:buNone/>
+            </a:pPr>
+            <a:r>
+              <a:rPr lang="en-US" sz="1300" b="1" dirty="0">
+                <a:solidFill>
+                  <a:srgbClr val="D97757"/>
+                </a:solidFill>
+                <a:latin typeface="Courier New" pitchFamily="34" charset="0"/>
+                <a:ea typeface="Courier New" pitchFamily="34" charset="-122"/>
+                <a:cs typeface="Courier New" pitchFamily="34" charset="-120"/>
+              </a:rPr>
+              <a:t>BookTracker.Mcp/</a:t>
+            </a:r>
+            <a:endParaRPr lang="en-US" sz="1300" dirty="0"/>
+          </a:p>
+          <a:p>
+            <a:pPr marL="0" indent="0">
+              <a:lnSpc>
+                <a:spcPct val="128000"/>
+              </a:lnSpc>
+              <a:buNone/>
+            </a:pPr>
+            <a:r>
+              <a:rPr lang="en-US" sz="1300" dirty="0">
+                <a:solidFill>
+                  <a:srgbClr val="E9E5DD"/>
+                </a:solidFill>
+                <a:latin typeface="Courier New" pitchFamily="34" charset="0"/>
+                <a:ea typeface="Courier New" pitchFamily="34" charset="-122"/>
+                <a:cs typeface="Courier New" pitchFamily="34" charset="-120"/>
+              </a:rPr>
+              <a:t>├─ Program.cs</a:t>
+            </a:r>
+            <a:endParaRPr lang="en-US" sz="1300" dirty="0"/>
+          </a:p>
+          <a:p>
+            <a:pPr marL="0" indent="0">
+              <a:lnSpc>
+                <a:spcPct val="128000"/>
+              </a:lnSpc>
+              <a:buNone/>
+            </a:pPr>
+            <a:r>
+              <a:rPr lang="en-US" sz="1300" dirty="0">
+                <a:solidFill>
+                  <a:srgbClr val="E9E5DD"/>
+                </a:solidFill>
+                <a:latin typeface="Courier New" pitchFamily="34" charset="0"/>
+                <a:ea typeface="Courier New" pitchFamily="34" charset="-122"/>
+                <a:cs typeface="Courier New" pitchFamily="34" charset="-120"/>
+              </a:rPr>
+              <a:t>├─ Tools/</a:t>
+            </a:r>
+            <a:endParaRPr lang="en-US" sz="1300" dirty="0"/>
+          </a:p>
+          <a:p>
+            <a:pPr marL="0" indent="0">
+              <a:lnSpc>
+                <a:spcPct val="128000"/>
+              </a:lnSpc>
+              <a:buNone/>
+            </a:pPr>
+            <a:r>
+              <a:rPr lang="en-US" sz="1300" dirty="0">
+                <a:solidFill>
+                  <a:srgbClr val="E9E5DD"/>
+                </a:solidFill>
+                <a:latin typeface="Courier New" pitchFamily="34" charset="0"/>
+                <a:ea typeface="Courier New" pitchFamily="34" charset="-122"/>
+                <a:cs typeface="Courier New" pitchFamily="34" charset="-120"/>
+              </a:rPr>
+              <a:t>│   └─ BookTools.cs</a:t>
+            </a:r>
+            <a:endParaRPr lang="en-US" sz="1300" dirty="0"/>
+          </a:p>
+          <a:p>
+            <a:pPr marL="0" indent="0">
+              <a:lnSpc>
+                <a:spcPct val="128000"/>
+              </a:lnSpc>
+              <a:buNone/>
+            </a:pPr>
+            <a:r>
+              <a:rPr lang="en-US" sz="1300" dirty="0">
+                <a:solidFill>
+                  <a:srgbClr val="E9E5DD"/>
+                </a:solidFill>
+                <a:latin typeface="Courier New" pitchFamily="34" charset="0"/>
+                <a:ea typeface="Courier New" pitchFamily="34" charset="-122"/>
+                <a:cs typeface="Courier New" pitchFamily="34" charset="-120"/>
+              </a:rPr>
+              <a:t>└─ BookTracker.Mcp.csproj</a:t>
+            </a:r>
+            <a:endParaRPr lang="en-US" sz="1300" dirty="0"/>
+          </a:p>
+          <a:p>
+            <a:pPr marL="0" indent="0">
+              <a:lnSpc>
+                <a:spcPct val="128000"/>
+              </a:lnSpc>
+              <a:buNone/>
+            </a:pPr>
+            <a:r>
+              <a:rPr lang="en-US" sz="1300" dirty="0">
+                <a:solidFill>
+                  <a:srgbClr val="9A958B"/>
+                </a:solidFill>
+                <a:latin typeface="Courier New" pitchFamily="34" charset="0"/>
+                <a:ea typeface="Courier New" pitchFamily="34" charset="-122"/>
+                <a:cs typeface="Courier New" pitchFamily="34" charset="-120"/>
+              </a:rPr>
+              <a:t>// + ModelContextProtocol &amp; .AspNetCore pkgs</a:t>
+            </a:r>
+            <a:endParaRPr lang="en-US" sz="1300" dirty="0"/>
+          </a:p>
+        </p:txBody>
+      </p:sp>
+      <p:sp>
+        <p:nvSpPr>
+          <p:cNvPr id="8" name="Shape 5"/>
+          <p:cNvSpPr/>
+          <p:nvPr/>
+        </p:nvSpPr>
+        <p:spPr>
+          <a:xfrm>
+            <a:off x="5440680" y="1463040"/>
             <a:ext cx="420624" cy="420624"/>
           </a:xfrm>
           <a:prstGeom prst="ellipse">
@@ -5635,10 +5194,17 @@
           </a:solidFill>
           <a:ln/>
         </p:spPr>
+        <p:txBody>
+          <a:bodyPr/>
+          <a:lstStyle/>
+          <a:p>
+            <a:endParaRPr lang="en-US"/>
+          </a:p>
+        </p:txBody>
       </p:sp>
       <p:pic>
         <p:nvPicPr>
-          <p:cNvPr id="13" name="Image 2" descr="preencoded.png">    </p:cNvPr>
+          <p:cNvPr id="9" name="Image 1" descr="preencoded.png"/>
           <p:cNvPicPr>
             <a:picLocks noChangeAspect="1"/>
           </p:cNvPicPr>
@@ -5652,7 +5218,7 @@
         </p:blipFill>
         <p:spPr>
           <a:xfrm>
-            <a:off x="5550042" y="2349642"/>
+            <a:off x="5550042" y="1572402"/>
             <a:ext cx="201900" cy="201900"/>
           </a:xfrm>
           <a:prstGeom prst="rect">
@@ -5662,13 +5228,13 @@
       </p:pic>
       <p:sp>
         <p:nvSpPr>
-          <p:cNvPr id="14" name="Text 9"/>
-          <p:cNvSpPr/>
-          <p:nvPr/>
-        </p:nvSpPr>
-        <p:spPr>
-          <a:xfrm>
-            <a:off x="6007608" y="2203704"/>
+          <p:cNvPr id="10" name="Text 6"/>
+          <p:cNvSpPr/>
+          <p:nvPr/>
+        </p:nvSpPr>
+        <p:spPr>
+          <a:xfrm>
+            <a:off x="6007608" y="1426464"/>
             <a:ext cx="3108960" cy="292608"/>
           </a:xfrm>
           <a:prstGeom prst="rect">
@@ -5681,7 +5247,7 @@
           <a:bodyPr wrap="square" lIns="0" tIns="0" rIns="0" bIns="0" rtlCol="0" anchor="ctr"/>
           <a:lstStyle/>
           <a:p>
-            <a:pPr indent="0" marL="0">
+            <a:pPr marL="0" indent="0">
               <a:buNone/>
             </a:pPr>
             <a:r>
@@ -5693,7 +5259,7 @@
                 <a:ea typeface="Inter" pitchFamily="34" charset="-122"/>
                 <a:cs typeface="Inter" pitchFamily="34" charset="-120"/>
               </a:rPr>
-              <a:t>Official C# SDK</a:t>
+              <a:t>New project</a:t>
             </a:r>
             <a:endParaRPr lang="en-US" sz="1400" dirty="0"/>
           </a:p>
@@ -5701,13 +5267,13 @@
       </p:sp>
       <p:sp>
         <p:nvSpPr>
-          <p:cNvPr id="15" name="Text 10"/>
-          <p:cNvSpPr/>
-          <p:nvPr/>
-        </p:nvSpPr>
-        <p:spPr>
-          <a:xfrm>
-            <a:off x="6007608" y="2487168"/>
+          <p:cNvPr id="11" name="Text 7"/>
+          <p:cNvSpPr/>
+          <p:nvPr/>
+        </p:nvSpPr>
+        <p:spPr>
+          <a:xfrm>
+            <a:off x="6007608" y="1709928"/>
             <a:ext cx="3154680" cy="411480"/>
           </a:xfrm>
           <a:prstGeom prst="rect">
@@ -5720,7 +5286,7 @@
           <a:bodyPr wrap="square" lIns="0" tIns="0" rIns="0" bIns="0" rtlCol="0" anchor="ctr"/>
           <a:lstStyle/>
           <a:p>
-            <a:pPr indent="0" marL="0">
+            <a:pPr marL="0" indent="0">
               <a:buNone/>
             </a:pPr>
             <a:r>
@@ -5732,7 +5298,7 @@
                 <a:ea typeface="Inter" pitchFamily="34" charset="-122"/>
                 <a:cs typeface="Inter" pitchFamily="34" charset="-120"/>
               </a:rPr>
-              <a:t>ModelContextProtocol + ModelContextProtocol.AspNetCore</a:t>
+              <a:t>BookTracker.Mcp in the solution</a:t>
             </a:r>
             <a:endParaRPr lang="en-US" sz="1150" dirty="0"/>
           </a:p>
@@ -5740,13 +5306,13 @@
       </p:sp>
       <p:sp>
         <p:nvSpPr>
-          <p:cNvPr id="16" name="Shape 11"/>
-          <p:cNvSpPr/>
-          <p:nvPr/>
-        </p:nvSpPr>
-        <p:spPr>
-          <a:xfrm>
-            <a:off x="5440680" y="3017520"/>
+          <p:cNvPr id="12" name="Shape 8"/>
+          <p:cNvSpPr/>
+          <p:nvPr/>
+        </p:nvSpPr>
+        <p:spPr>
+          <a:xfrm>
+            <a:off x="5440680" y="2240280"/>
             <a:ext cx="420624" cy="420624"/>
           </a:xfrm>
           <a:prstGeom prst="ellipse">
@@ -5757,10 +5323,17 @@
           </a:solidFill>
           <a:ln/>
         </p:spPr>
+        <p:txBody>
+          <a:bodyPr/>
+          <a:lstStyle/>
+          <a:p>
+            <a:endParaRPr lang="en-US"/>
+          </a:p>
+        </p:txBody>
       </p:sp>
       <p:pic>
         <p:nvPicPr>
-          <p:cNvPr id="17" name="Image 3" descr="preencoded.png">    </p:cNvPr>
+          <p:cNvPr id="13" name="Image 2" descr="preencoded.png"/>
           <p:cNvPicPr>
             <a:picLocks noChangeAspect="1"/>
           </p:cNvPicPr>
@@ -5774,6 +5347,135 @@
         </p:blipFill>
         <p:spPr>
           <a:xfrm>
+            <a:off x="5550042" y="2349642"/>
+            <a:ext cx="201900" cy="201900"/>
+          </a:xfrm>
+          <a:prstGeom prst="rect">
+            <a:avLst/>
+          </a:prstGeom>
+        </p:spPr>
+      </p:pic>
+      <p:sp>
+        <p:nvSpPr>
+          <p:cNvPr id="14" name="Text 9"/>
+          <p:cNvSpPr/>
+          <p:nvPr/>
+        </p:nvSpPr>
+        <p:spPr>
+          <a:xfrm>
+            <a:off x="6007608" y="2203704"/>
+            <a:ext cx="3108960" cy="292608"/>
+          </a:xfrm>
+          <a:prstGeom prst="rect">
+            <a:avLst/>
+          </a:prstGeom>
+          <a:noFill/>
+          <a:ln/>
+        </p:spPr>
+        <p:txBody>
+          <a:bodyPr wrap="square" lIns="0" tIns="0" rIns="0" bIns="0" rtlCol="0" anchor="ctr"/>
+          <a:lstStyle/>
+          <a:p>
+            <a:pPr marL="0" indent="0">
+              <a:buNone/>
+            </a:pPr>
+            <a:r>
+              <a:rPr lang="en-US" sz="1400" b="1" dirty="0">
+                <a:solidFill>
+                  <a:srgbClr val="141413"/>
+                </a:solidFill>
+                <a:latin typeface="Inter" pitchFamily="34" charset="0"/>
+                <a:ea typeface="Inter" pitchFamily="34" charset="-122"/>
+                <a:cs typeface="Inter" pitchFamily="34" charset="-120"/>
+              </a:rPr>
+              <a:t>Official C# SDK</a:t>
+            </a:r>
+            <a:endParaRPr lang="en-US" sz="1400" dirty="0"/>
+          </a:p>
+        </p:txBody>
+      </p:sp>
+      <p:sp>
+        <p:nvSpPr>
+          <p:cNvPr id="15" name="Text 10"/>
+          <p:cNvSpPr/>
+          <p:nvPr/>
+        </p:nvSpPr>
+        <p:spPr>
+          <a:xfrm>
+            <a:off x="6007608" y="2487168"/>
+            <a:ext cx="3154680" cy="411480"/>
+          </a:xfrm>
+          <a:prstGeom prst="rect">
+            <a:avLst/>
+          </a:prstGeom>
+          <a:noFill/>
+          <a:ln/>
+        </p:spPr>
+        <p:txBody>
+          <a:bodyPr wrap="square" lIns="0" tIns="0" rIns="0" bIns="0" rtlCol="0" anchor="ctr"/>
+          <a:lstStyle/>
+          <a:p>
+            <a:pPr marL="0" indent="0">
+              <a:buNone/>
+            </a:pPr>
+            <a:r>
+              <a:rPr lang="en-US" sz="1150" dirty="0">
+                <a:solidFill>
+                  <a:srgbClr val="615C52"/>
+                </a:solidFill>
+                <a:latin typeface="Inter" pitchFamily="34" charset="0"/>
+                <a:ea typeface="Inter" pitchFamily="34" charset="-122"/>
+                <a:cs typeface="Inter" pitchFamily="34" charset="-120"/>
+              </a:rPr>
+              <a:t>ModelContextProtocol + ModelContextProtocol.AspNetCore</a:t>
+            </a:r>
+            <a:endParaRPr lang="en-US" sz="1150" dirty="0"/>
+          </a:p>
+        </p:txBody>
+      </p:sp>
+      <p:sp>
+        <p:nvSpPr>
+          <p:cNvPr id="16" name="Shape 11"/>
+          <p:cNvSpPr/>
+          <p:nvPr/>
+        </p:nvSpPr>
+        <p:spPr>
+          <a:xfrm>
+            <a:off x="5440680" y="3017520"/>
+            <a:ext cx="420624" cy="420624"/>
+          </a:xfrm>
+          <a:prstGeom prst="ellipse">
+            <a:avLst/>
+          </a:prstGeom>
+          <a:solidFill>
+            <a:srgbClr val="D97757"/>
+          </a:solidFill>
+          <a:ln/>
+        </p:spPr>
+        <p:txBody>
+          <a:bodyPr/>
+          <a:lstStyle/>
+          <a:p>
+            <a:endParaRPr lang="en-US"/>
+          </a:p>
+        </p:txBody>
+      </p:sp>
+      <p:pic>
+        <p:nvPicPr>
+          <p:cNvPr id="17" name="Image 3" descr="preencoded.png"/>
+          <p:cNvPicPr>
+            <a:picLocks noChangeAspect="1"/>
+          </p:cNvPicPr>
+          <p:nvPr/>
+        </p:nvPicPr>
+        <p:blipFill>
+          <a:blip r:embed="rId5"/>
+          <a:stretch>
+            <a:fillRect/>
+          </a:stretch>
+        </p:blipFill>
+        <p:spPr>
+          <a:xfrm>
             <a:off x="5550042" y="3126882"/>
             <a:ext cx="201900" cy="201900"/>
           </a:xfrm>
@@ -5803,7 +5505,7 @@
           <a:bodyPr wrap="square" lIns="0" tIns="0" rIns="0" bIns="0" rtlCol="0" anchor="ctr"/>
           <a:lstStyle/>
           <a:p>
-            <a:pPr indent="0" marL="0">
+            <a:pPr marL="0" indent="0">
               <a:buNone/>
             </a:pPr>
             <a:r>
@@ -5842,7 +5544,7 @@
           <a:bodyPr wrap="square" lIns="0" tIns="0" rIns="0" bIns="0" rtlCol="0" anchor="ctr"/>
           <a:lstStyle/>
           <a:p>
-            <a:pPr indent="0" marL="0">
+            <a:pPr marL="0" indent="0">
               <a:buNone/>
             </a:pPr>
             <a:r>
@@ -5881,7 +5583,7 @@
           <a:bodyPr wrap="square" rtlCol="0" anchor="ctr"/>
           <a:lstStyle/>
           <a:p>
-            <a:pPr indent="0" marL="0">
+            <a:pPr marL="0" indent="0">
               <a:buNone/>
             </a:pPr>
             <a:r>
@@ -5920,7 +5622,7 @@
           <a:bodyPr wrap="square" rtlCol="0" anchor="ctr"/>
           <a:lstStyle/>
           <a:p>
-            <a:pPr algn="r" indent="0" marL="0">
+            <a:pPr marL="0" indent="0" algn="r">
               <a:buNone/>
             </a:pPr>
             <a:r>
@@ -5935,45 +5637,6 @@
               <a:t>Day 2 · Section 4  ·  5/11</a:t>
             </a:r>
             <a:endParaRPr lang="en-US" sz="900" dirty="0"/>
-          </a:p>
-        </p:txBody>
-      </p:sp>
-      <p:sp>
-        <p:nvSpPr>
-          <p:cNvPr id="22" name="Text 16"/>
-          <p:cNvSpPr/>
-          <p:nvPr/>
-        </p:nvSpPr>
-        <p:spPr>
-          <a:xfrm>
-            <a:off x="548640" y="4462272"/>
-            <a:ext cx="8046720" cy="274320"/>
-          </a:xfrm>
-          <a:prstGeom prst="rect">
-            <a:avLst/>
-          </a:prstGeom>
-          <a:noFill/>
-          <a:ln/>
-        </p:spPr>
-        <p:txBody>
-          <a:bodyPr wrap="square" lIns="0" tIns="0" rIns="0" bIns="0" rtlCol="0" anchor="ctr"/>
-          <a:lstStyle/>
-          <a:p>
-            <a:pPr indent="0" marL="0">
-              <a:buNone/>
-            </a:pPr>
-            <a:r>
-              <a:rPr lang="en-US" sz="1000" i="1" dirty="0">
-                <a:solidFill>
-                  <a:srgbClr val="615C52"/>
-                </a:solidFill>
-                <a:latin typeface="Inter" pitchFamily="34" charset="0"/>
-                <a:ea typeface="Inter" pitchFamily="34" charset="-122"/>
-                <a:cs typeface="Inter" pitchFamily="34" charset="-120"/>
-              </a:rPr>
-              <a:t>▸ A dedicated project that references your existing Core and Data layers.</a:t>
-            </a:r>
-            <a:endParaRPr lang="en-US" sz="1000" dirty="0"/>
           </a:p>
         </p:txBody>
       </p:sp>
@@ -5993,6 +5656,7 @@
         <a:solidFill>
           <a:srgbClr val="F0EEE6"/>
         </a:solidFill>
+        <a:effectLst/>
       </p:bgPr>
     </p:bg>
     <p:spTree>
@@ -6030,11 +5694,11 @@
           <a:bodyPr wrap="square" lIns="0" tIns="0" rIns="0" bIns="0" rtlCol="0" anchor="ctr"/>
           <a:lstStyle/>
           <a:p>
-            <a:pPr indent="0" marL="0">
-              <a:buNone/>
-            </a:pPr>
-            <a:r>
-              <a:rPr lang="en-US" sz="1100" b="1" spc="200" kern="0" dirty="0">
+            <a:pPr marL="0" indent="0">
+              <a:buNone/>
+            </a:pPr>
+            <a:r>
+              <a:rPr lang="en-US" sz="1100" b="1" kern="0" spc="200" dirty="0">
                 <a:solidFill>
                   <a:srgbClr val="C25E40"/>
                 </a:solidFill>
@@ -6069,7 +5733,7 @@
           <a:bodyPr wrap="square" lIns="0" tIns="0" rIns="0" bIns="0" rtlCol="0" anchor="ctr"/>
           <a:lstStyle/>
           <a:p>
-            <a:pPr indent="0" marL="0">
+            <a:pPr marL="0" indent="0">
               <a:buNone/>
             </a:pPr>
             <a:r>
@@ -6089,80 +5753,7 @@
       </p:sp>
       <p:pic>
         <p:nvPicPr>
-          <p:cNvPr id="4" name="Image 0" descr="preencoded.png">    </p:cNvPr>
-          <p:cNvPicPr>
-            <a:picLocks noChangeAspect="1"/>
-          </p:cNvPicPr>
-          <p:nvPr/>
-        </p:nvPicPr>
-        <p:blipFill>
-          <a:blip r:embed="rId1"/>
-          <a:stretch>
-            <a:fillRect/>
-          </a:stretch>
-        </p:blipFill>
-        <p:spPr>
-          <a:xfrm>
-            <a:off x="8321040" y="402336"/>
-            <a:ext cx="329184" cy="329184"/>
-          </a:xfrm>
-          <a:prstGeom prst="rect">
-            <a:avLst/>
-          </a:prstGeom>
-        </p:spPr>
-      </p:pic>
-      <p:sp>
-        <p:nvSpPr>
-          <p:cNvPr id="5" name="Shape 2"/>
-          <p:cNvSpPr/>
-          <p:nvPr/>
-        </p:nvSpPr>
-        <p:spPr>
-          <a:xfrm>
-            <a:off x="548640" y="1508760"/>
-            <a:ext cx="3931920" cy="2286000"/>
-          </a:xfrm>
-          <a:prstGeom prst="roundRect">
-            <a:avLst>
-              <a:gd name="adj" fmla="val 4000"/>
-            </a:avLst>
-          </a:prstGeom>
-          <a:solidFill>
-            <a:srgbClr val="F4E4DC"/>
-          </a:solidFill>
-          <a:ln/>
-          <a:effectLst>
-            <a:outerShdw sx="100000" sy="100000" kx="0" ky="0" algn="bl" rotWithShape="0" blurRad="88900" dist="38100" dir="5400000">
-              <a:srgbClr val="000000">
-                <a:alpha val="10000"/>
-              </a:srgbClr>
-            </a:outerShdw>
-          </a:effectLst>
-        </p:spPr>
-      </p:sp>
-      <p:sp>
-        <p:nvSpPr>
-          <p:cNvPr id="6" name="Shape 3"/>
-          <p:cNvSpPr/>
-          <p:nvPr/>
-        </p:nvSpPr>
-        <p:spPr>
-          <a:xfrm>
-            <a:off x="822960" y="1783080"/>
-            <a:ext cx="502920" cy="502920"/>
-          </a:xfrm>
-          <a:prstGeom prst="ellipse">
-            <a:avLst/>
-          </a:prstGeom>
-          <a:solidFill>
-            <a:srgbClr val="D97757"/>
-          </a:solidFill>
-          <a:ln/>
-        </p:spPr>
-      </p:sp>
-      <p:pic>
-        <p:nvPicPr>
-          <p:cNvPr id="7" name="Image 1" descr="preencoded.png">    </p:cNvPr>
+          <p:cNvPr id="4" name="Image 0" descr="preencoded.png"/>
           <p:cNvPicPr>
             <a:picLocks noChangeAspect="1"/>
           </p:cNvPicPr>
@@ -6176,6 +5767,93 @@
         </p:blipFill>
         <p:spPr>
           <a:xfrm>
+            <a:off x="8321040" y="402336"/>
+            <a:ext cx="329184" cy="329184"/>
+          </a:xfrm>
+          <a:prstGeom prst="rect">
+            <a:avLst/>
+          </a:prstGeom>
+        </p:spPr>
+      </p:pic>
+      <p:sp>
+        <p:nvSpPr>
+          <p:cNvPr id="5" name="Shape 2"/>
+          <p:cNvSpPr/>
+          <p:nvPr/>
+        </p:nvSpPr>
+        <p:spPr>
+          <a:xfrm>
+            <a:off x="548640" y="1508760"/>
+            <a:ext cx="3931920" cy="2286000"/>
+          </a:xfrm>
+          <a:prstGeom prst="roundRect">
+            <a:avLst>
+              <a:gd name="adj" fmla="val 4000"/>
+            </a:avLst>
+          </a:prstGeom>
+          <a:solidFill>
+            <a:srgbClr val="F4E4DC"/>
+          </a:solidFill>
+          <a:ln/>
+          <a:effectLst>
+            <a:outerShdw blurRad="88900" dist="38100" dir="5400000" algn="bl" rotWithShape="0">
+              <a:srgbClr val="000000">
+                <a:alpha val="10000"/>
+              </a:srgbClr>
+            </a:outerShdw>
+          </a:effectLst>
+        </p:spPr>
+        <p:txBody>
+          <a:bodyPr/>
+          <a:lstStyle/>
+          <a:p>
+            <a:endParaRPr lang="en-US"/>
+          </a:p>
+        </p:txBody>
+      </p:sp>
+      <p:sp>
+        <p:nvSpPr>
+          <p:cNvPr id="6" name="Shape 3"/>
+          <p:cNvSpPr/>
+          <p:nvPr/>
+        </p:nvSpPr>
+        <p:spPr>
+          <a:xfrm>
+            <a:off x="822960" y="1783080"/>
+            <a:ext cx="502920" cy="502920"/>
+          </a:xfrm>
+          <a:prstGeom prst="ellipse">
+            <a:avLst/>
+          </a:prstGeom>
+          <a:solidFill>
+            <a:srgbClr val="D97757"/>
+          </a:solidFill>
+          <a:ln/>
+        </p:spPr>
+        <p:txBody>
+          <a:bodyPr/>
+          <a:lstStyle/>
+          <a:p>
+            <a:endParaRPr lang="en-US"/>
+          </a:p>
+        </p:txBody>
+      </p:sp>
+      <p:pic>
+        <p:nvPicPr>
+          <p:cNvPr id="7" name="Image 1" descr="preencoded.png"/>
+          <p:cNvPicPr>
+            <a:picLocks noChangeAspect="1"/>
+          </p:cNvPicPr>
+          <p:nvPr/>
+        </p:nvPicPr>
+        <p:blipFill>
+          <a:blip r:embed="rId3"/>
+          <a:stretch>
+            <a:fillRect/>
+          </a:stretch>
+        </p:blipFill>
+        <p:spPr>
+          <a:xfrm>
             <a:off x="953719" y="1913839"/>
             <a:ext cx="241402" cy="241402"/>
           </a:xfrm>
@@ -6205,7 +5883,7 @@
           <a:bodyPr wrap="square" lIns="0" tIns="0" rIns="0" bIns="0" rtlCol="0" anchor="ctr"/>
           <a:lstStyle/>
           <a:p>
-            <a:pPr indent="0" marL="0">
+            <a:pPr marL="0" indent="0">
               <a:buNone/>
             </a:pPr>
             <a:r>
@@ -6334,6 +6012,13 @@
             <a:prstDash val="solid"/>
           </a:ln>
         </p:spPr>
+        <p:txBody>
+          <a:bodyPr/>
+          <a:lstStyle/>
+          <a:p>
+            <a:endParaRPr lang="en-US"/>
+          </a:p>
+        </p:txBody>
       </p:sp>
       <p:sp>
         <p:nvSpPr>
@@ -6354,17 +6039,24 @@
           </a:solidFill>
           <a:ln/>
         </p:spPr>
+        <p:txBody>
+          <a:bodyPr/>
+          <a:lstStyle/>
+          <a:p>
+            <a:endParaRPr lang="en-US"/>
+          </a:p>
+        </p:txBody>
       </p:sp>
       <p:pic>
         <p:nvPicPr>
-          <p:cNvPr id="12" name="Image 2" descr="preencoded.png">    </p:cNvPr>
+          <p:cNvPr id="12" name="Image 2" descr="preencoded.png"/>
           <p:cNvPicPr>
             <a:picLocks noChangeAspect="1"/>
           </p:cNvPicPr>
           <p:nvPr/>
         </p:nvPicPr>
         <p:blipFill>
-          <a:blip r:embed="rId3"/>
+          <a:blip r:embed="rId4"/>
           <a:stretch>
             <a:fillRect/>
           </a:stretch>
@@ -6400,7 +6092,7 @@
           <a:bodyPr wrap="square" lIns="0" tIns="0" rIns="0" bIns="0" rtlCol="0" anchor="ctr"/>
           <a:lstStyle/>
           <a:p>
-            <a:pPr indent="0" marL="0">
+            <a:pPr marL="0" indent="0">
               <a:buNone/>
             </a:pPr>
             <a:r>
@@ -6524,7 +6216,7 @@
           <a:bodyPr wrap="square" rtlCol="0" anchor="ctr"/>
           <a:lstStyle/>
           <a:p>
-            <a:pPr indent="0" marL="0">
+            <a:pPr marL="0" indent="0">
               <a:buNone/>
             </a:pPr>
             <a:r>
@@ -6563,7 +6255,7 @@
           <a:bodyPr wrap="square" rtlCol="0" anchor="ctr"/>
           <a:lstStyle/>
           <a:p>
-            <a:pPr algn="r" indent="0" marL="0">
+            <a:pPr marL="0" indent="0" algn="r">
               <a:buNone/>
             </a:pPr>
             <a:r>
@@ -6578,45 +6270,6 @@
               <a:t>Day 2 · Section 4  ·  6/11</a:t>
             </a:r>
             <a:endParaRPr lang="en-US" sz="900" dirty="0"/>
-          </a:p>
-        </p:txBody>
-      </p:sp>
-      <p:sp>
-        <p:nvSpPr>
-          <p:cNvPr id="17" name="Text 12"/>
-          <p:cNvSpPr/>
-          <p:nvPr/>
-        </p:nvSpPr>
-        <p:spPr>
-          <a:xfrm>
-            <a:off x="548640" y="4462272"/>
-            <a:ext cx="8046720" cy="274320"/>
-          </a:xfrm>
-          <a:prstGeom prst="rect">
-            <a:avLst/>
-          </a:prstGeom>
-          <a:noFill/>
-          <a:ln/>
-        </p:spPr>
-        <p:txBody>
-          <a:bodyPr wrap="square" lIns="0" tIns="0" rIns="0" bIns="0" rtlCol="0" anchor="ctr"/>
-          <a:lstStyle/>
-          <a:p>
-            <a:pPr indent="0" marL="0">
-              <a:buNone/>
-            </a:pPr>
-            <a:r>
-              <a:rPr lang="en-US" sz="1000" i="1" dirty="0">
-                <a:solidFill>
-                  <a:srgbClr val="615C52"/>
-                </a:solidFill>
-                <a:latin typeface="Inter" pitchFamily="34" charset="0"/>
-                <a:ea typeface="Inter" pitchFamily="34" charset="-122"/>
-                <a:cs typeface="Inter" pitchFamily="34" charset="-120"/>
-              </a:rPr>
-              <a:t>▸ Default to Streamable HTTP; the older HTTP+SSE transport is superseded.</a:t>
-            </a:r>
-            <a:endParaRPr lang="en-US" sz="1000" dirty="0"/>
           </a:p>
         </p:txBody>
       </p:sp>
@@ -6636,6 +6289,7 @@
         <a:solidFill>
           <a:srgbClr val="F0EEE6"/>
         </a:solidFill>
+        <a:effectLst/>
       </p:bgPr>
     </p:bg>
     <p:spTree>
@@ -6673,11 +6327,11 @@
           <a:bodyPr wrap="square" lIns="0" tIns="0" rIns="0" bIns="0" rtlCol="0" anchor="ctr"/>
           <a:lstStyle/>
           <a:p>
-            <a:pPr indent="0" marL="0">
-              <a:buNone/>
-            </a:pPr>
-            <a:r>
-              <a:rPr lang="en-US" sz="1100" b="1" spc="200" kern="0" dirty="0">
+            <a:pPr marL="0" indent="0">
+              <a:buNone/>
+            </a:pPr>
+            <a:r>
+              <a:rPr lang="en-US" sz="1100" b="1" kern="0" spc="200" dirty="0">
                 <a:solidFill>
                   <a:srgbClr val="C25E40"/>
                 </a:solidFill>
@@ -6712,7 +6366,7 @@
           <a:bodyPr wrap="square" lIns="0" tIns="0" rIns="0" bIns="0" rtlCol="0" anchor="ctr"/>
           <a:lstStyle/>
           <a:p>
-            <a:pPr indent="0" marL="0">
+            <a:pPr marL="0" indent="0">
               <a:buNone/>
             </a:pPr>
             <a:r>
@@ -6732,403 +6386,7 @@
       </p:sp>
       <p:pic>
         <p:nvPicPr>
-          <p:cNvPr id="4" name="Image 0" descr="preencoded.png">    </p:cNvPr>
-          <p:cNvPicPr>
-            <a:picLocks noChangeAspect="1"/>
-          </p:cNvPicPr>
-          <p:nvPr/>
-        </p:nvPicPr>
-        <p:blipFill>
-          <a:blip r:embed="rId1"/>
-          <a:stretch>
-            <a:fillRect/>
-          </a:stretch>
-        </p:blipFill>
-        <p:spPr>
-          <a:xfrm>
-            <a:off x="8321040" y="402336"/>
-            <a:ext cx="329184" cy="329184"/>
-          </a:xfrm>
-          <a:prstGeom prst="rect">
-            <a:avLst/>
-          </a:prstGeom>
-        </p:spPr>
-      </p:pic>
-      <p:sp>
-        <p:nvSpPr>
-          <p:cNvPr id="5" name="Shape 2"/>
-          <p:cNvSpPr/>
-          <p:nvPr/>
-        </p:nvSpPr>
-        <p:spPr>
-          <a:xfrm>
-            <a:off x="548640" y="1371600"/>
-            <a:ext cx="5120640" cy="2788920"/>
-          </a:xfrm>
-          <a:prstGeom prst="roundRect">
-            <a:avLst>
-              <a:gd name="adj" fmla="val 2623"/>
-            </a:avLst>
-          </a:prstGeom>
-          <a:solidFill>
-            <a:srgbClr val="1F1E1D"/>
-          </a:solidFill>
-          <a:ln/>
-          <a:effectLst>
-            <a:outerShdw sx="100000" sy="100000" kx="0" ky="0" algn="bl" rotWithShape="0" blurRad="88900" dist="38100" dir="5400000">
-              <a:srgbClr val="000000">
-                <a:alpha val="10000"/>
-              </a:srgbClr>
-            </a:outerShdw>
-          </a:effectLst>
-        </p:spPr>
-      </p:sp>
-      <p:sp>
-        <p:nvSpPr>
-          <p:cNvPr id="6" name="Text 3"/>
-          <p:cNvSpPr/>
-          <p:nvPr/>
-        </p:nvSpPr>
-        <p:spPr>
-          <a:xfrm>
-            <a:off x="822960" y="1517904"/>
-            <a:ext cx="4572000" cy="256032"/>
-          </a:xfrm>
-          <a:prstGeom prst="rect">
-            <a:avLst/>
-          </a:prstGeom>
-          <a:noFill/>
-          <a:ln/>
-        </p:spPr>
-        <p:txBody>
-          <a:bodyPr wrap="square" lIns="0" tIns="0" rIns="0" bIns="0" rtlCol="0" anchor="ctr"/>
-          <a:lstStyle/>
-          <a:p>
-            <a:pPr indent="0" marL="0">
-              <a:buNone/>
-            </a:pPr>
-            <a:r>
-              <a:rPr lang="en-US" sz="1050" b="1" spc="50" kern="0" dirty="0">
-                <a:solidFill>
-                  <a:srgbClr val="D97757"/>
-                </a:solidFill>
-                <a:latin typeface="Courier New" pitchFamily="34" charset="0"/>
-                <a:ea typeface="Courier New" pitchFamily="34" charset="-122"/>
-                <a:cs typeface="Courier New" pitchFamily="34" charset="-120"/>
-              </a:rPr>
-              <a:t>// BookTools.cs</a:t>
-            </a:r>
-            <a:endParaRPr lang="en-US" sz="1050" dirty="0"/>
-          </a:p>
-        </p:txBody>
-      </p:sp>
-      <p:sp>
-        <p:nvSpPr>
-          <p:cNvPr id="7" name="Text 4"/>
-          <p:cNvSpPr/>
-          <p:nvPr/>
-        </p:nvSpPr>
-        <p:spPr>
-          <a:xfrm>
-            <a:off x="841248" y="1828800"/>
-            <a:ext cx="4572000" cy="2148840"/>
-          </a:xfrm>
-          <a:prstGeom prst="rect">
-            <a:avLst/>
-          </a:prstGeom>
-          <a:noFill/>
-          <a:ln/>
-        </p:spPr>
-        <p:txBody>
-          <a:bodyPr wrap="square" lIns="0" tIns="0" rIns="0" bIns="0" rtlCol="0" anchor="t"/>
-          <a:lstStyle/>
-          <a:p>
-            <a:pPr indent="0" marL="0">
-              <a:lnSpc>
-                <a:spcPct val="128000"/>
-              </a:lnSpc>
-              <a:buNone/>
-            </a:pPr>
-            <a:r>
-              <a:rPr lang="en-US" sz="1250" dirty="0">
-                <a:solidFill>
-                  <a:srgbClr val="E9E5DD"/>
-                </a:solidFill>
-                <a:latin typeface="Courier New" pitchFamily="34" charset="0"/>
-                <a:ea typeface="Courier New" pitchFamily="34" charset="-122"/>
-                <a:cs typeface="Courier New" pitchFamily="34" charset="-120"/>
-              </a:rPr>
-              <a:t>[</a:t>
-            </a:r>
-            <a:pPr indent="0" marL="0">
-              <a:lnSpc>
-                <a:spcPct val="128000"/>
-              </a:lnSpc>
-              <a:buNone/>
-            </a:pPr>
-            <a:r>
-              <a:rPr lang="en-US" sz="1250" dirty="0">
-                <a:solidFill>
-                  <a:srgbClr val="9FC3E0"/>
-                </a:solidFill>
-                <a:latin typeface="Courier New" pitchFamily="34" charset="0"/>
-                <a:ea typeface="Courier New" pitchFamily="34" charset="-122"/>
-                <a:cs typeface="Courier New" pitchFamily="34" charset="-120"/>
-              </a:rPr>
-              <a:t>McpServerTool</a:t>
-            </a:r>
-            <a:pPr indent="0" marL="0">
-              <a:lnSpc>
-                <a:spcPct val="128000"/>
-              </a:lnSpc>
-              <a:buNone/>
-            </a:pPr>
-            <a:r>
-              <a:rPr lang="en-US" sz="1250" dirty="0">
-                <a:solidFill>
-                  <a:srgbClr val="E9E5DD"/>
-                </a:solidFill>
-                <a:latin typeface="Courier New" pitchFamily="34" charset="0"/>
-                <a:ea typeface="Courier New" pitchFamily="34" charset="-122"/>
-                <a:cs typeface="Courier New" pitchFamily="34" charset="-120"/>
-              </a:rPr>
-              <a:t>]</a:t>
-            </a:r>
-            <a:endParaRPr lang="en-US" sz="1250" dirty="0"/>
-          </a:p>
-          <a:p>
-            <a:pPr indent="0" marL="0">
-              <a:lnSpc>
-                <a:spcPct val="128000"/>
-              </a:lnSpc>
-              <a:buNone/>
-            </a:pPr>
-            <a:r>
-              <a:rPr lang="en-US" sz="1250" dirty="0">
-                <a:solidFill>
-                  <a:srgbClr val="E9E5DD"/>
-                </a:solidFill>
-                <a:latin typeface="Courier New" pitchFamily="34" charset="0"/>
-                <a:ea typeface="Courier New" pitchFamily="34" charset="-122"/>
-                <a:cs typeface="Courier New" pitchFamily="34" charset="-120"/>
-              </a:rPr>
-              <a:t>[</a:t>
-            </a:r>
-            <a:pPr indent="0" marL="0">
-              <a:lnSpc>
-                <a:spcPct val="128000"/>
-              </a:lnSpc>
-              <a:buNone/>
-            </a:pPr>
-            <a:r>
-              <a:rPr lang="en-US" sz="1250" dirty="0">
-                <a:solidFill>
-                  <a:srgbClr val="9FC3E0"/>
-                </a:solidFill>
-                <a:latin typeface="Courier New" pitchFamily="34" charset="0"/>
-                <a:ea typeface="Courier New" pitchFamily="34" charset="-122"/>
-                <a:cs typeface="Courier New" pitchFamily="34" charset="-120"/>
-              </a:rPr>
-              <a:t>Description</a:t>
-            </a:r>
-            <a:pPr indent="0" marL="0">
-              <a:lnSpc>
-                <a:spcPct val="128000"/>
-              </a:lnSpc>
-              <a:buNone/>
-            </a:pPr>
-            <a:r>
-              <a:rPr lang="en-US" sz="1250" dirty="0">
-                <a:solidFill>
-                  <a:srgbClr val="E9E5DD"/>
-                </a:solidFill>
-                <a:latin typeface="Courier New" pitchFamily="34" charset="0"/>
-                <a:ea typeface="Courier New" pitchFamily="34" charset="-122"/>
-                <a:cs typeface="Courier New" pitchFamily="34" charset="-120"/>
-              </a:rPr>
-              <a:t>(</a:t>
-            </a:r>
-            <a:pPr indent="0" marL="0">
-              <a:lnSpc>
-                <a:spcPct val="128000"/>
-              </a:lnSpc>
-              <a:buNone/>
-            </a:pPr>
-            <a:r>
-              <a:rPr lang="en-US" sz="1250" dirty="0">
-                <a:solidFill>
-                  <a:srgbClr val="E0A04A"/>
-                </a:solidFill>
-                <a:latin typeface="Courier New" pitchFamily="34" charset="0"/>
-                <a:ea typeface="Courier New" pitchFamily="34" charset="-122"/>
-                <a:cs typeface="Courier New" pitchFamily="34" charset="-120"/>
-              </a:rPr>
-              <a:t>"Search the catalog</a:t>
-            </a:r>
-            <a:pPr indent="0" marL="0">
-              <a:lnSpc>
-                <a:spcPct val="128000"/>
-              </a:lnSpc>
-              <a:buNone/>
-            </a:pPr>
-            <a:endParaRPr lang="en-US" sz="1250" dirty="0"/>
-          </a:p>
-          <a:p>
-            <a:pPr indent="0" marL="0">
-              <a:lnSpc>
-                <a:spcPct val="128000"/>
-              </a:lnSpc>
-              <a:buNone/>
-            </a:pPr>
-            <a:r>
-              <a:rPr lang="en-US" sz="1250" dirty="0">
-                <a:solidFill>
-                  <a:srgbClr val="E0A04A"/>
-                </a:solidFill>
-                <a:latin typeface="Courier New" pitchFamily="34" charset="0"/>
-                <a:ea typeface="Courier New" pitchFamily="34" charset="-122"/>
-                <a:cs typeface="Courier New" pitchFamily="34" charset="-120"/>
-              </a:rPr>
-              <a:t>   by title or author."</a:t>
-            </a:r>
-            <a:pPr indent="0" marL="0">
-              <a:lnSpc>
-                <a:spcPct val="128000"/>
-              </a:lnSpc>
-              <a:buNone/>
-            </a:pPr>
-            <a:r>
-              <a:rPr lang="en-US" sz="1250" dirty="0">
-                <a:solidFill>
-                  <a:srgbClr val="E9E5DD"/>
-                </a:solidFill>
-                <a:latin typeface="Courier New" pitchFamily="34" charset="0"/>
-                <a:ea typeface="Courier New" pitchFamily="34" charset="-122"/>
-                <a:cs typeface="Courier New" pitchFamily="34" charset="-120"/>
-              </a:rPr>
-              <a:t>)]</a:t>
-            </a:r>
-            <a:endParaRPr lang="en-US" sz="1250" dirty="0"/>
-          </a:p>
-          <a:p>
-            <a:pPr indent="0" marL="0">
-              <a:lnSpc>
-                <a:spcPct val="128000"/>
-              </a:lnSpc>
-              <a:buNone/>
-            </a:pPr>
-            <a:r>
-              <a:rPr lang="en-US" sz="1250" dirty="0">
-                <a:solidFill>
-                  <a:srgbClr val="E9E5DD"/>
-                </a:solidFill>
-                <a:latin typeface="Courier New" pitchFamily="34" charset="0"/>
-                <a:ea typeface="Courier New" pitchFamily="34" charset="-122"/>
-                <a:cs typeface="Courier New" pitchFamily="34" charset="-120"/>
-              </a:rPr>
-              <a:t>public async Task&lt;</a:t>
-            </a:r>
-            <a:pPr indent="0" marL="0">
-              <a:lnSpc>
-                <a:spcPct val="128000"/>
-              </a:lnSpc>
-              <a:buNone/>
-            </a:pPr>
-            <a:r>
-              <a:rPr lang="en-US" sz="1250" dirty="0">
-                <a:solidFill>
-                  <a:srgbClr val="9FC3E0"/>
-                </a:solidFill>
-                <a:latin typeface="Courier New" pitchFamily="34" charset="0"/>
-                <a:ea typeface="Courier New" pitchFamily="34" charset="-122"/>
-                <a:cs typeface="Courier New" pitchFamily="34" charset="-120"/>
-              </a:rPr>
-              <a:t>Book</a:t>
-            </a:r>
-            <a:pPr indent="0" marL="0">
-              <a:lnSpc>
-                <a:spcPct val="128000"/>
-              </a:lnSpc>
-              <a:buNone/>
-            </a:pPr>
-            <a:r>
-              <a:rPr lang="en-US" sz="1250" dirty="0">
-                <a:solidFill>
-                  <a:srgbClr val="E9E5DD"/>
-                </a:solidFill>
-                <a:latin typeface="Courier New" pitchFamily="34" charset="0"/>
-                <a:ea typeface="Courier New" pitchFamily="34" charset="-122"/>
-                <a:cs typeface="Courier New" pitchFamily="34" charset="-120"/>
-              </a:rPr>
-              <a:t>[]&gt;</a:t>
-            </a:r>
-            <a:endParaRPr lang="en-US" sz="1250" dirty="0"/>
-          </a:p>
-          <a:p>
-            <a:pPr indent="0" marL="0">
-              <a:lnSpc>
-                <a:spcPct val="128000"/>
-              </a:lnSpc>
-              <a:buNone/>
-            </a:pPr>
-            <a:r>
-              <a:rPr lang="en-US" sz="1250" dirty="0">
-                <a:solidFill>
-                  <a:srgbClr val="E9E5DD"/>
-                </a:solidFill>
-                <a:latin typeface="Courier New" pitchFamily="34" charset="0"/>
-                <a:ea typeface="Courier New" pitchFamily="34" charset="-122"/>
-                <a:cs typeface="Courier New" pitchFamily="34" charset="-120"/>
-              </a:rPr>
-              <a:t>  SearchBooks(string query) =&gt;</a:t>
-            </a:r>
-            <a:endParaRPr lang="en-US" sz="1250" dirty="0"/>
-          </a:p>
-          <a:p>
-            <a:pPr indent="0" marL="0">
-              <a:lnSpc>
-                <a:spcPct val="128000"/>
-              </a:lnSpc>
-              <a:buNone/>
-            </a:pPr>
-            <a:r>
-              <a:rPr lang="en-US" sz="1250" dirty="0">
-                <a:solidFill>
-                  <a:srgbClr val="E9E5DD"/>
-                </a:solidFill>
-                <a:latin typeface="Courier New" pitchFamily="34" charset="0"/>
-                <a:ea typeface="Courier New" pitchFamily="34" charset="-122"/>
-                <a:cs typeface="Courier New" pitchFamily="34" charset="-120"/>
-              </a:rPr>
-              <a:t>    await _books.SearchAsync(query);</a:t>
-            </a:r>
-            <a:endParaRPr lang="en-US" sz="1250" dirty="0"/>
-          </a:p>
-        </p:txBody>
-      </p:sp>
-      <p:sp>
-        <p:nvSpPr>
-          <p:cNvPr id="8" name="Shape 5"/>
-          <p:cNvSpPr/>
-          <p:nvPr/>
-        </p:nvSpPr>
-        <p:spPr>
-          <a:xfrm>
-            <a:off x="5897880" y="1463040"/>
-            <a:ext cx="420624" cy="420624"/>
-          </a:xfrm>
-          <a:prstGeom prst="ellipse">
-            <a:avLst/>
-          </a:prstGeom>
-          <a:solidFill>
-            <a:srgbClr val="D97757"/>
-          </a:solidFill>
-          <a:ln/>
-        </p:spPr>
-      </p:sp>
-      <p:pic>
-        <p:nvPicPr>
-          <p:cNvPr id="9" name="Image 1" descr="preencoded.png">    </p:cNvPr>
+          <p:cNvPr id="4" name="Image 0" descr="preencoded.png"/>
           <p:cNvPicPr>
             <a:picLocks noChangeAspect="1"/>
           </p:cNvPicPr>
@@ -7142,8 +6400,8 @@
         </p:blipFill>
         <p:spPr>
           <a:xfrm>
-            <a:off x="6007242" y="1572402"/>
-            <a:ext cx="201900" cy="201900"/>
+            <a:off x="8321040" y="402336"/>
+            <a:ext cx="329184" cy="329184"/>
           </a:xfrm>
           <a:prstGeom prst="rect">
             <a:avLst/>
@@ -7152,91 +6410,318 @@
       </p:pic>
       <p:sp>
         <p:nvSpPr>
-          <p:cNvPr id="10" name="Text 6"/>
-          <p:cNvSpPr/>
-          <p:nvPr/>
-        </p:nvSpPr>
-        <p:spPr>
-          <a:xfrm>
-            <a:off x="6464808" y="1426464"/>
-            <a:ext cx="2743200" cy="292608"/>
-          </a:xfrm>
-          <a:prstGeom prst="rect">
-            <a:avLst/>
-          </a:prstGeom>
-          <a:noFill/>
-          <a:ln/>
-        </p:spPr>
-        <p:txBody>
-          <a:bodyPr wrap="square" lIns="0" tIns="0" rIns="0" bIns="0" rtlCol="0" anchor="ctr"/>
-          <a:lstStyle/>
-          <a:p>
-            <a:pPr indent="0" marL="0">
-              <a:buNone/>
-            </a:pPr>
-            <a:r>
-              <a:rPr lang="en-US" sz="1350" b="1" dirty="0">
-                <a:solidFill>
-                  <a:srgbClr val="141413"/>
-                </a:solidFill>
-                <a:latin typeface="Inter" pitchFamily="34" charset="0"/>
-                <a:ea typeface="Inter" pitchFamily="34" charset="-122"/>
-                <a:cs typeface="Inter" pitchFamily="34" charset="-120"/>
-              </a:rPr>
-              <a:t>Typed input schema</a:t>
-            </a:r>
-            <a:endParaRPr lang="en-US" sz="1350" dirty="0"/>
-          </a:p>
-        </p:txBody>
-      </p:sp>
-      <p:sp>
-        <p:nvSpPr>
-          <p:cNvPr id="11" name="Text 7"/>
-          <p:cNvSpPr/>
-          <p:nvPr/>
-        </p:nvSpPr>
-        <p:spPr>
-          <a:xfrm>
-            <a:off x="6464808" y="1709928"/>
-            <a:ext cx="2788920" cy="457200"/>
-          </a:xfrm>
-          <a:prstGeom prst="rect">
-            <a:avLst/>
-          </a:prstGeom>
-          <a:noFill/>
-          <a:ln/>
-        </p:spPr>
-        <p:txBody>
-          <a:bodyPr wrap="square" lIns="0" tIns="0" rIns="0" bIns="0" rtlCol="0" anchor="ctr"/>
-          <a:lstStyle/>
-          <a:p>
-            <a:pPr indent="0" marL="0">
-              <a:buNone/>
-            </a:pPr>
-            <a:r>
-              <a:rPr lang="en-US" sz="1150" dirty="0">
-                <a:solidFill>
-                  <a:srgbClr val="615C52"/>
-                </a:solidFill>
-                <a:latin typeface="Inter" pitchFamily="34" charset="0"/>
-                <a:ea typeface="Inter" pitchFamily="34" charset="-122"/>
-                <a:cs typeface="Inter" pitchFamily="34" charset="-120"/>
-              </a:rPr>
-              <a:t>Parameters drive the JSON schema</a:t>
-            </a:r>
-            <a:endParaRPr lang="en-US" sz="1150" dirty="0"/>
-          </a:p>
-        </p:txBody>
-      </p:sp>
-      <p:sp>
-        <p:nvSpPr>
-          <p:cNvPr id="12" name="Shape 8"/>
-          <p:cNvSpPr/>
-          <p:nvPr/>
-        </p:nvSpPr>
-        <p:spPr>
-          <a:xfrm>
-            <a:off x="5897880" y="2286000"/>
+          <p:cNvPr id="5" name="Shape 2"/>
+          <p:cNvSpPr/>
+          <p:nvPr/>
+        </p:nvSpPr>
+        <p:spPr>
+          <a:xfrm>
+            <a:off x="548640" y="1371600"/>
+            <a:ext cx="5120640" cy="2788920"/>
+          </a:xfrm>
+          <a:prstGeom prst="roundRect">
+            <a:avLst>
+              <a:gd name="adj" fmla="val 2623"/>
+            </a:avLst>
+          </a:prstGeom>
+          <a:solidFill>
+            <a:srgbClr val="1F1E1D"/>
+          </a:solidFill>
+          <a:ln/>
+          <a:effectLst>
+            <a:outerShdw blurRad="88900" dist="38100" dir="5400000" algn="bl" rotWithShape="0">
+              <a:srgbClr val="000000">
+                <a:alpha val="10000"/>
+              </a:srgbClr>
+            </a:outerShdw>
+          </a:effectLst>
+        </p:spPr>
+        <p:txBody>
+          <a:bodyPr/>
+          <a:lstStyle/>
+          <a:p>
+            <a:endParaRPr lang="en-US"/>
+          </a:p>
+        </p:txBody>
+      </p:sp>
+      <p:sp>
+        <p:nvSpPr>
+          <p:cNvPr id="6" name="Text 3"/>
+          <p:cNvSpPr/>
+          <p:nvPr/>
+        </p:nvSpPr>
+        <p:spPr>
+          <a:xfrm>
+            <a:off x="822960" y="1517904"/>
+            <a:ext cx="4572000" cy="256032"/>
+          </a:xfrm>
+          <a:prstGeom prst="rect">
+            <a:avLst/>
+          </a:prstGeom>
+          <a:noFill/>
+          <a:ln/>
+        </p:spPr>
+        <p:txBody>
+          <a:bodyPr wrap="square" lIns="0" tIns="0" rIns="0" bIns="0" rtlCol="0" anchor="ctr"/>
+          <a:lstStyle/>
+          <a:p>
+            <a:pPr marL="0" indent="0">
+              <a:buNone/>
+            </a:pPr>
+            <a:r>
+              <a:rPr lang="en-US" sz="1050" b="1" kern="0" spc="50" dirty="0">
+                <a:solidFill>
+                  <a:srgbClr val="D97757"/>
+                </a:solidFill>
+                <a:latin typeface="Courier New" pitchFamily="34" charset="0"/>
+                <a:ea typeface="Courier New" pitchFamily="34" charset="-122"/>
+                <a:cs typeface="Courier New" pitchFamily="34" charset="-120"/>
+              </a:rPr>
+              <a:t>// BookTools.cs</a:t>
+            </a:r>
+            <a:endParaRPr lang="en-US" sz="1050" dirty="0"/>
+          </a:p>
+        </p:txBody>
+      </p:sp>
+      <p:sp>
+        <p:nvSpPr>
+          <p:cNvPr id="7" name="Text 4"/>
+          <p:cNvSpPr/>
+          <p:nvPr/>
+        </p:nvSpPr>
+        <p:spPr>
+          <a:xfrm>
+            <a:off x="841248" y="1828800"/>
+            <a:ext cx="4572000" cy="2148840"/>
+          </a:xfrm>
+          <a:prstGeom prst="rect">
+            <a:avLst/>
+          </a:prstGeom>
+          <a:noFill/>
+          <a:ln/>
+        </p:spPr>
+        <p:txBody>
+          <a:bodyPr wrap="square" lIns="0" tIns="0" rIns="0" bIns="0" rtlCol="0" anchor="t"/>
+          <a:lstStyle/>
+          <a:p>
+            <a:pPr marL="0" indent="0">
+              <a:lnSpc>
+                <a:spcPct val="128000"/>
+              </a:lnSpc>
+              <a:buNone/>
+            </a:pPr>
+            <a:r>
+              <a:rPr lang="en-US" sz="1250" dirty="0">
+                <a:solidFill>
+                  <a:srgbClr val="E9E5DD"/>
+                </a:solidFill>
+                <a:latin typeface="Courier New" pitchFamily="34" charset="0"/>
+                <a:ea typeface="Courier New" pitchFamily="34" charset="-122"/>
+                <a:cs typeface="Courier New" pitchFamily="34" charset="-120"/>
+              </a:rPr>
+              <a:t>[</a:t>
+            </a:r>
+            <a:r>
+              <a:rPr lang="en-US" sz="1250" dirty="0">
+                <a:solidFill>
+                  <a:srgbClr val="9FC3E0"/>
+                </a:solidFill>
+                <a:latin typeface="Courier New" pitchFamily="34" charset="0"/>
+                <a:ea typeface="Courier New" pitchFamily="34" charset="-122"/>
+                <a:cs typeface="Courier New" pitchFamily="34" charset="-120"/>
+              </a:rPr>
+              <a:t>McpServerTool</a:t>
+            </a:r>
+            <a:r>
+              <a:rPr lang="en-US" sz="1250" dirty="0">
+                <a:solidFill>
+                  <a:srgbClr val="E9E5DD"/>
+                </a:solidFill>
+                <a:latin typeface="Courier New" pitchFamily="34" charset="0"/>
+                <a:ea typeface="Courier New" pitchFamily="34" charset="-122"/>
+                <a:cs typeface="Courier New" pitchFamily="34" charset="-120"/>
+              </a:rPr>
+              <a:t>]</a:t>
+            </a:r>
+            <a:endParaRPr lang="en-US" sz="1250" dirty="0"/>
+          </a:p>
+          <a:p>
+            <a:pPr marL="0" indent="0">
+              <a:lnSpc>
+                <a:spcPct val="128000"/>
+              </a:lnSpc>
+              <a:buNone/>
+            </a:pPr>
+            <a:r>
+              <a:rPr lang="en-US" sz="1250" dirty="0">
+                <a:solidFill>
+                  <a:srgbClr val="E9E5DD"/>
+                </a:solidFill>
+                <a:latin typeface="Courier New" pitchFamily="34" charset="0"/>
+                <a:ea typeface="Courier New" pitchFamily="34" charset="-122"/>
+                <a:cs typeface="Courier New" pitchFamily="34" charset="-120"/>
+              </a:rPr>
+              <a:t>[</a:t>
+            </a:r>
+            <a:r>
+              <a:rPr lang="en-US" sz="1250" dirty="0">
+                <a:solidFill>
+                  <a:srgbClr val="9FC3E0"/>
+                </a:solidFill>
+                <a:latin typeface="Courier New" pitchFamily="34" charset="0"/>
+                <a:ea typeface="Courier New" pitchFamily="34" charset="-122"/>
+                <a:cs typeface="Courier New" pitchFamily="34" charset="-120"/>
+              </a:rPr>
+              <a:t>Description</a:t>
+            </a:r>
+            <a:r>
+              <a:rPr lang="en-US" sz="1250" dirty="0">
+                <a:solidFill>
+                  <a:srgbClr val="E9E5DD"/>
+                </a:solidFill>
+                <a:latin typeface="Courier New" pitchFamily="34" charset="0"/>
+                <a:ea typeface="Courier New" pitchFamily="34" charset="-122"/>
+                <a:cs typeface="Courier New" pitchFamily="34" charset="-120"/>
+              </a:rPr>
+              <a:t>(</a:t>
+            </a:r>
+            <a:r>
+              <a:rPr lang="en-US" sz="1250" dirty="0">
+                <a:solidFill>
+                  <a:srgbClr val="E0A04A"/>
+                </a:solidFill>
+                <a:latin typeface="Courier New" pitchFamily="34" charset="0"/>
+                <a:ea typeface="Courier New" pitchFamily="34" charset="-122"/>
+                <a:cs typeface="Courier New" pitchFamily="34" charset="-120"/>
+              </a:rPr>
+              <a:t>"Search the catalog</a:t>
+            </a:r>
+            <a:endParaRPr lang="en-US" sz="1250" dirty="0"/>
+          </a:p>
+          <a:p>
+            <a:pPr marL="0" indent="0">
+              <a:lnSpc>
+                <a:spcPct val="128000"/>
+              </a:lnSpc>
+              <a:buNone/>
+            </a:pPr>
+            <a:r>
+              <a:rPr lang="en-US" sz="1250" dirty="0">
+                <a:solidFill>
+                  <a:srgbClr val="E0A04A"/>
+                </a:solidFill>
+                <a:latin typeface="Courier New" pitchFamily="34" charset="0"/>
+                <a:ea typeface="Courier New" pitchFamily="34" charset="-122"/>
+                <a:cs typeface="Courier New" pitchFamily="34" charset="-120"/>
+              </a:rPr>
+              <a:t>   by title or author."</a:t>
+            </a:r>
+            <a:r>
+              <a:rPr lang="en-US" sz="1250" dirty="0">
+                <a:solidFill>
+                  <a:srgbClr val="E9E5DD"/>
+                </a:solidFill>
+                <a:latin typeface="Courier New" pitchFamily="34" charset="0"/>
+                <a:ea typeface="Courier New" pitchFamily="34" charset="-122"/>
+                <a:cs typeface="Courier New" pitchFamily="34" charset="-120"/>
+              </a:rPr>
+              <a:t>)]</a:t>
+            </a:r>
+            <a:endParaRPr lang="en-US" sz="1250" dirty="0"/>
+          </a:p>
+          <a:p>
+            <a:pPr marL="0" indent="0">
+              <a:lnSpc>
+                <a:spcPct val="128000"/>
+              </a:lnSpc>
+              <a:buNone/>
+            </a:pPr>
+            <a:r>
+              <a:rPr lang="en-US" sz="1250" dirty="0">
+                <a:solidFill>
+                  <a:srgbClr val="E9E5DD"/>
+                </a:solidFill>
+                <a:latin typeface="Courier New" pitchFamily="34" charset="0"/>
+                <a:ea typeface="Courier New" pitchFamily="34" charset="-122"/>
+                <a:cs typeface="Courier New" pitchFamily="34" charset="-120"/>
+              </a:rPr>
+              <a:t>public async Task&lt;</a:t>
+            </a:r>
+            <a:r>
+              <a:rPr lang="en-US" sz="1250" dirty="0">
+                <a:solidFill>
+                  <a:srgbClr val="9FC3E0"/>
+                </a:solidFill>
+                <a:latin typeface="Courier New" pitchFamily="34" charset="0"/>
+                <a:ea typeface="Courier New" pitchFamily="34" charset="-122"/>
+                <a:cs typeface="Courier New" pitchFamily="34" charset="-120"/>
+              </a:rPr>
+              <a:t>Book</a:t>
+            </a:r>
+            <a:r>
+              <a:rPr lang="en-US" sz="1250" dirty="0">
+                <a:solidFill>
+                  <a:srgbClr val="E9E5DD"/>
+                </a:solidFill>
+                <a:latin typeface="Courier New" pitchFamily="34" charset="0"/>
+                <a:ea typeface="Courier New" pitchFamily="34" charset="-122"/>
+                <a:cs typeface="Courier New" pitchFamily="34" charset="-120"/>
+              </a:rPr>
+              <a:t>[]&gt;</a:t>
+            </a:r>
+            <a:endParaRPr lang="en-US" sz="1250" dirty="0"/>
+          </a:p>
+          <a:p>
+            <a:pPr marL="0" indent="0">
+              <a:lnSpc>
+                <a:spcPct val="128000"/>
+              </a:lnSpc>
+              <a:buNone/>
+            </a:pPr>
+            <a:r>
+              <a:rPr lang="en-US" sz="1250" dirty="0">
+                <a:solidFill>
+                  <a:srgbClr val="E9E5DD"/>
+                </a:solidFill>
+                <a:latin typeface="Courier New" pitchFamily="34" charset="0"/>
+                <a:ea typeface="Courier New" pitchFamily="34" charset="-122"/>
+                <a:cs typeface="Courier New" pitchFamily="34" charset="-120"/>
+              </a:rPr>
+              <a:t>  SearchBooks(string query) =&gt;</a:t>
+            </a:r>
+            <a:endParaRPr lang="en-US" sz="1250" dirty="0"/>
+          </a:p>
+          <a:p>
+            <a:pPr marL="0" indent="0">
+              <a:lnSpc>
+                <a:spcPct val="128000"/>
+              </a:lnSpc>
+              <a:buNone/>
+            </a:pPr>
+            <a:r>
+              <a:rPr lang="en-US" sz="1250" dirty="0">
+                <a:solidFill>
+                  <a:srgbClr val="E9E5DD"/>
+                </a:solidFill>
+                <a:latin typeface="Courier New" pitchFamily="34" charset="0"/>
+                <a:ea typeface="Courier New" pitchFamily="34" charset="-122"/>
+                <a:cs typeface="Courier New" pitchFamily="34" charset="-120"/>
+              </a:rPr>
+              <a:t>    await _books.SearchAsync(query);</a:t>
+            </a:r>
+            <a:endParaRPr lang="en-US" sz="1250" dirty="0"/>
+          </a:p>
+        </p:txBody>
+      </p:sp>
+      <p:sp>
+        <p:nvSpPr>
+          <p:cNvPr id="8" name="Shape 5"/>
+          <p:cNvSpPr/>
+          <p:nvPr/>
+        </p:nvSpPr>
+        <p:spPr>
+          <a:xfrm>
+            <a:off x="5897880" y="1463040"/>
             <a:ext cx="420624" cy="420624"/>
           </a:xfrm>
           <a:prstGeom prst="ellipse">
@@ -7247,10 +6732,17 @@
           </a:solidFill>
           <a:ln/>
         </p:spPr>
+        <p:txBody>
+          <a:bodyPr/>
+          <a:lstStyle/>
+          <a:p>
+            <a:endParaRPr lang="en-US"/>
+          </a:p>
+        </p:txBody>
       </p:sp>
       <p:pic>
         <p:nvPicPr>
-          <p:cNvPr id="13" name="Image 2" descr="preencoded.png">    </p:cNvPr>
+          <p:cNvPr id="9" name="Image 1" descr="preencoded.png"/>
           <p:cNvPicPr>
             <a:picLocks noChangeAspect="1"/>
           </p:cNvPicPr>
@@ -7264,7 +6756,7 @@
         </p:blipFill>
         <p:spPr>
           <a:xfrm>
-            <a:off x="6007242" y="2395362"/>
+            <a:off x="6007242" y="1572402"/>
             <a:ext cx="201900" cy="201900"/>
           </a:xfrm>
           <a:prstGeom prst="rect">
@@ -7274,13 +6766,13 @@
       </p:pic>
       <p:sp>
         <p:nvSpPr>
-          <p:cNvPr id="14" name="Text 9"/>
-          <p:cNvSpPr/>
-          <p:nvPr/>
-        </p:nvSpPr>
-        <p:spPr>
-          <a:xfrm>
-            <a:off x="6464808" y="2249424"/>
+          <p:cNvPr id="10" name="Text 6"/>
+          <p:cNvSpPr/>
+          <p:nvPr/>
+        </p:nvSpPr>
+        <p:spPr>
+          <a:xfrm>
+            <a:off x="6464808" y="1426464"/>
             <a:ext cx="2743200" cy="292608"/>
           </a:xfrm>
           <a:prstGeom prst="rect">
@@ -7293,7 +6785,7 @@
           <a:bodyPr wrap="square" lIns="0" tIns="0" rIns="0" bIns="0" rtlCol="0" anchor="ctr"/>
           <a:lstStyle/>
           <a:p>
-            <a:pPr indent="0" marL="0">
+            <a:pPr marL="0" indent="0">
               <a:buNone/>
             </a:pPr>
             <a:r>
@@ -7305,7 +6797,7 @@
                 <a:ea typeface="Inter" pitchFamily="34" charset="-122"/>
                 <a:cs typeface="Inter" pitchFamily="34" charset="-120"/>
               </a:rPr>
-              <a:t>Description = contract</a:t>
+              <a:t>Typed input schema</a:t>
             </a:r>
             <a:endParaRPr lang="en-US" sz="1350" dirty="0"/>
           </a:p>
@@ -7313,13 +6805,13 @@
       </p:sp>
       <p:sp>
         <p:nvSpPr>
-          <p:cNvPr id="15" name="Text 10"/>
-          <p:cNvSpPr/>
-          <p:nvPr/>
-        </p:nvSpPr>
-        <p:spPr>
-          <a:xfrm>
-            <a:off x="6464808" y="2532888"/>
+          <p:cNvPr id="11" name="Text 7"/>
+          <p:cNvSpPr/>
+          <p:nvPr/>
+        </p:nvSpPr>
+        <p:spPr>
+          <a:xfrm>
+            <a:off x="6464808" y="1709928"/>
             <a:ext cx="2788920" cy="457200"/>
           </a:xfrm>
           <a:prstGeom prst="rect">
@@ -7332,7 +6824,7 @@
           <a:bodyPr wrap="square" lIns="0" tIns="0" rIns="0" bIns="0" rtlCol="0" anchor="ctr"/>
           <a:lstStyle/>
           <a:p>
-            <a:pPr indent="0" marL="0">
+            <a:pPr marL="0" indent="0">
               <a:buNone/>
             </a:pPr>
             <a:r>
@@ -7344,7 +6836,7 @@
                 <a:ea typeface="Inter" pitchFamily="34" charset="-122"/>
                 <a:cs typeface="Inter" pitchFamily="34" charset="-120"/>
               </a:rPr>
-              <a:t>Tells the model when to call it</a:t>
+              <a:t>Parameters drive the JSON schema</a:t>
             </a:r>
             <a:endParaRPr lang="en-US" sz="1150" dirty="0"/>
           </a:p>
@@ -7352,13 +6844,13 @@
       </p:sp>
       <p:sp>
         <p:nvSpPr>
-          <p:cNvPr id="16" name="Shape 11"/>
-          <p:cNvSpPr/>
-          <p:nvPr/>
-        </p:nvSpPr>
-        <p:spPr>
-          <a:xfrm>
-            <a:off x="5897880" y="3108960"/>
+          <p:cNvPr id="12" name="Shape 8"/>
+          <p:cNvSpPr/>
+          <p:nvPr/>
+        </p:nvSpPr>
+        <p:spPr>
+          <a:xfrm>
+            <a:off x="5897880" y="2286000"/>
             <a:ext cx="420624" cy="420624"/>
           </a:xfrm>
           <a:prstGeom prst="ellipse">
@@ -7369,10 +6861,17 @@
           </a:solidFill>
           <a:ln/>
         </p:spPr>
+        <p:txBody>
+          <a:bodyPr/>
+          <a:lstStyle/>
+          <a:p>
+            <a:endParaRPr lang="en-US"/>
+          </a:p>
+        </p:txBody>
       </p:sp>
       <p:pic>
         <p:nvPicPr>
-          <p:cNvPr id="17" name="Image 3" descr="preencoded.png">    </p:cNvPr>
+          <p:cNvPr id="13" name="Image 2" descr="preencoded.png"/>
           <p:cNvPicPr>
             <a:picLocks noChangeAspect="1"/>
           </p:cNvPicPr>
@@ -7386,6 +6885,135 @@
         </p:blipFill>
         <p:spPr>
           <a:xfrm>
+            <a:off x="6007242" y="2395362"/>
+            <a:ext cx="201900" cy="201900"/>
+          </a:xfrm>
+          <a:prstGeom prst="rect">
+            <a:avLst/>
+          </a:prstGeom>
+        </p:spPr>
+      </p:pic>
+      <p:sp>
+        <p:nvSpPr>
+          <p:cNvPr id="14" name="Text 9"/>
+          <p:cNvSpPr/>
+          <p:nvPr/>
+        </p:nvSpPr>
+        <p:spPr>
+          <a:xfrm>
+            <a:off x="6464808" y="2249424"/>
+            <a:ext cx="2743200" cy="292608"/>
+          </a:xfrm>
+          <a:prstGeom prst="rect">
+            <a:avLst/>
+          </a:prstGeom>
+          <a:noFill/>
+          <a:ln/>
+        </p:spPr>
+        <p:txBody>
+          <a:bodyPr wrap="square" lIns="0" tIns="0" rIns="0" bIns="0" rtlCol="0" anchor="ctr"/>
+          <a:lstStyle/>
+          <a:p>
+            <a:pPr marL="0" indent="0">
+              <a:buNone/>
+            </a:pPr>
+            <a:r>
+              <a:rPr lang="en-US" sz="1350" b="1" dirty="0">
+                <a:solidFill>
+                  <a:srgbClr val="141413"/>
+                </a:solidFill>
+                <a:latin typeface="Inter" pitchFamily="34" charset="0"/>
+                <a:ea typeface="Inter" pitchFamily="34" charset="-122"/>
+                <a:cs typeface="Inter" pitchFamily="34" charset="-120"/>
+              </a:rPr>
+              <a:t>Description = contract</a:t>
+            </a:r>
+            <a:endParaRPr lang="en-US" sz="1350" dirty="0"/>
+          </a:p>
+        </p:txBody>
+      </p:sp>
+      <p:sp>
+        <p:nvSpPr>
+          <p:cNvPr id="15" name="Text 10"/>
+          <p:cNvSpPr/>
+          <p:nvPr/>
+        </p:nvSpPr>
+        <p:spPr>
+          <a:xfrm>
+            <a:off x="6464808" y="2532888"/>
+            <a:ext cx="2788920" cy="457200"/>
+          </a:xfrm>
+          <a:prstGeom prst="rect">
+            <a:avLst/>
+          </a:prstGeom>
+          <a:noFill/>
+          <a:ln/>
+        </p:spPr>
+        <p:txBody>
+          <a:bodyPr wrap="square" lIns="0" tIns="0" rIns="0" bIns="0" rtlCol="0" anchor="ctr"/>
+          <a:lstStyle/>
+          <a:p>
+            <a:pPr marL="0" indent="0">
+              <a:buNone/>
+            </a:pPr>
+            <a:r>
+              <a:rPr lang="en-US" sz="1150" dirty="0">
+                <a:solidFill>
+                  <a:srgbClr val="615C52"/>
+                </a:solidFill>
+                <a:latin typeface="Inter" pitchFamily="34" charset="0"/>
+                <a:ea typeface="Inter" pitchFamily="34" charset="-122"/>
+                <a:cs typeface="Inter" pitchFamily="34" charset="-120"/>
+              </a:rPr>
+              <a:t>Tells the model when to call it</a:t>
+            </a:r>
+            <a:endParaRPr lang="en-US" sz="1150" dirty="0"/>
+          </a:p>
+        </p:txBody>
+      </p:sp>
+      <p:sp>
+        <p:nvSpPr>
+          <p:cNvPr id="16" name="Shape 11"/>
+          <p:cNvSpPr/>
+          <p:nvPr/>
+        </p:nvSpPr>
+        <p:spPr>
+          <a:xfrm>
+            <a:off x="5897880" y="3108960"/>
+            <a:ext cx="420624" cy="420624"/>
+          </a:xfrm>
+          <a:prstGeom prst="ellipse">
+            <a:avLst/>
+          </a:prstGeom>
+          <a:solidFill>
+            <a:srgbClr val="D97757"/>
+          </a:solidFill>
+          <a:ln/>
+        </p:spPr>
+        <p:txBody>
+          <a:bodyPr/>
+          <a:lstStyle/>
+          <a:p>
+            <a:endParaRPr lang="en-US"/>
+          </a:p>
+        </p:txBody>
+      </p:sp>
+      <p:pic>
+        <p:nvPicPr>
+          <p:cNvPr id="17" name="Image 3" descr="preencoded.png"/>
+          <p:cNvPicPr>
+            <a:picLocks noChangeAspect="1"/>
+          </p:cNvPicPr>
+          <p:nvPr/>
+        </p:nvPicPr>
+        <p:blipFill>
+          <a:blip r:embed="rId5"/>
+          <a:stretch>
+            <a:fillRect/>
+          </a:stretch>
+        </p:blipFill>
+        <p:spPr>
+          <a:xfrm>
             <a:off x="6007242" y="3218322"/>
             <a:ext cx="201900" cy="201900"/>
           </a:xfrm>
@@ -7415,7 +7043,7 @@
           <a:bodyPr wrap="square" lIns="0" tIns="0" rIns="0" bIns="0" rtlCol="0" anchor="ctr"/>
           <a:lstStyle/>
           <a:p>
-            <a:pPr indent="0" marL="0">
+            <a:pPr marL="0" indent="0">
               <a:buNone/>
             </a:pPr>
             <a:r>
@@ -7454,7 +7082,7 @@
           <a:bodyPr wrap="square" lIns="0" tIns="0" rIns="0" bIns="0" rtlCol="0" anchor="ctr"/>
           <a:lstStyle/>
           <a:p>
-            <a:pPr indent="0" marL="0">
+            <a:pPr marL="0" indent="0">
               <a:buNone/>
             </a:pPr>
             <a:r>
@@ -7493,7 +7121,7 @@
           <a:bodyPr wrap="square" rtlCol="0" anchor="ctr"/>
           <a:lstStyle/>
           <a:p>
-            <a:pPr indent="0" marL="0">
+            <a:pPr marL="0" indent="0">
               <a:buNone/>
             </a:pPr>
             <a:r>
@@ -7532,7 +7160,7 @@
           <a:bodyPr wrap="square" rtlCol="0" anchor="ctr"/>
           <a:lstStyle/>
           <a:p>
-            <a:pPr algn="r" indent="0" marL="0">
+            <a:pPr marL="0" indent="0" algn="r">
               <a:buNone/>
             </a:pPr>
             <a:r>
@@ -7547,45 +7175,6 @@
               <a:t>Day 2 · Section 4  ·  7/11</a:t>
             </a:r>
             <a:endParaRPr lang="en-US" sz="900" dirty="0"/>
-          </a:p>
-        </p:txBody>
-      </p:sp>
-      <p:sp>
-        <p:nvSpPr>
-          <p:cNvPr id="22" name="Text 16"/>
-          <p:cNvSpPr/>
-          <p:nvPr/>
-        </p:nvSpPr>
-        <p:spPr>
-          <a:xfrm>
-            <a:off x="548640" y="4462272"/>
-            <a:ext cx="8046720" cy="274320"/>
-          </a:xfrm>
-          <a:prstGeom prst="rect">
-            <a:avLst/>
-          </a:prstGeom>
-          <a:noFill/>
-          <a:ln/>
-        </p:spPr>
-        <p:txBody>
-          <a:bodyPr wrap="square" lIns="0" tIns="0" rIns="0" bIns="0" rtlCol="0" anchor="ctr"/>
-          <a:lstStyle/>
-          <a:p>
-            <a:pPr indent="0" marL="0">
-              <a:buNone/>
-            </a:pPr>
-            <a:r>
-              <a:rPr lang="en-US" sz="1000" i="1" dirty="0">
-                <a:solidFill>
-                  <a:srgbClr val="615C52"/>
-                </a:solidFill>
-                <a:latin typeface="Inter" pitchFamily="34" charset="0"/>
-                <a:ea typeface="Inter" pitchFamily="34" charset="-122"/>
-                <a:cs typeface="Inter" pitchFamily="34" charset="-120"/>
-              </a:rPr>
-              <a:t>▸ The description is the contract with the model — write it like a skill trigger.</a:t>
-            </a:r>
-            <a:endParaRPr lang="en-US" sz="1000" dirty="0"/>
           </a:p>
         </p:txBody>
       </p:sp>
@@ -7605,6 +7194,7 @@
         <a:solidFill>
           <a:srgbClr val="F0EEE6"/>
         </a:solidFill>
+        <a:effectLst/>
       </p:bgPr>
     </p:bg>
     <p:spTree>
@@ -7642,11 +7232,11 @@
           <a:bodyPr wrap="square" lIns="0" tIns="0" rIns="0" bIns="0" rtlCol="0" anchor="ctr"/>
           <a:lstStyle/>
           <a:p>
-            <a:pPr indent="0" marL="0">
-              <a:buNone/>
-            </a:pPr>
-            <a:r>
-              <a:rPr lang="en-US" sz="1100" b="1" spc="200" kern="0" dirty="0">
+            <a:pPr marL="0" indent="0">
+              <a:buNone/>
+            </a:pPr>
+            <a:r>
+              <a:rPr lang="en-US" sz="1100" b="1" kern="0" spc="200" dirty="0">
                 <a:solidFill>
                   <a:srgbClr val="C25E40"/>
                 </a:solidFill>
@@ -7681,7 +7271,7 @@
           <a:bodyPr wrap="square" lIns="0" tIns="0" rIns="0" bIns="0" rtlCol="0" anchor="ctr"/>
           <a:lstStyle/>
           <a:p>
-            <a:pPr indent="0" marL="0">
+            <a:pPr marL="0" indent="0">
               <a:buNone/>
             </a:pPr>
             <a:r>
@@ -7701,323 +7291,7 @@
       </p:sp>
       <p:pic>
         <p:nvPicPr>
-          <p:cNvPr id="4" name="Image 0" descr="preencoded.png">    </p:cNvPr>
-          <p:cNvPicPr>
-            <a:picLocks noChangeAspect="1"/>
-          </p:cNvPicPr>
-          <p:nvPr/>
-        </p:nvPicPr>
-        <p:blipFill>
-          <a:blip r:embed="rId1"/>
-          <a:stretch>
-            <a:fillRect/>
-          </a:stretch>
-        </p:blipFill>
-        <p:spPr>
-          <a:xfrm>
-            <a:off x="8321040" y="402336"/>
-            <a:ext cx="329184" cy="329184"/>
-          </a:xfrm>
-          <a:prstGeom prst="rect">
-            <a:avLst/>
-          </a:prstGeom>
-        </p:spPr>
-      </p:pic>
-      <p:sp>
-        <p:nvSpPr>
-          <p:cNvPr id="5" name="Shape 2"/>
-          <p:cNvSpPr/>
-          <p:nvPr/>
-        </p:nvSpPr>
-        <p:spPr>
-          <a:xfrm>
-            <a:off x="548640" y="1371600"/>
-            <a:ext cx="4434840" cy="2011680"/>
-          </a:xfrm>
-          <a:prstGeom prst="roundRect">
-            <a:avLst>
-              <a:gd name="adj" fmla="val 3636"/>
-            </a:avLst>
-          </a:prstGeom>
-          <a:solidFill>
-            <a:srgbClr val="1F1E1D"/>
-          </a:solidFill>
-          <a:ln/>
-          <a:effectLst>
-            <a:outerShdw sx="100000" sy="100000" kx="0" ky="0" algn="bl" rotWithShape="0" blurRad="88900" dist="38100" dir="5400000">
-              <a:srgbClr val="000000">
-                <a:alpha val="10000"/>
-              </a:srgbClr>
-            </a:outerShdw>
-          </a:effectLst>
-        </p:spPr>
-      </p:sp>
-      <p:sp>
-        <p:nvSpPr>
-          <p:cNvPr id="6" name="Text 3"/>
-          <p:cNvSpPr/>
-          <p:nvPr/>
-        </p:nvSpPr>
-        <p:spPr>
-          <a:xfrm>
-            <a:off x="822960" y="1517904"/>
-            <a:ext cx="3886200" cy="256032"/>
-          </a:xfrm>
-          <a:prstGeom prst="rect">
-            <a:avLst/>
-          </a:prstGeom>
-          <a:noFill/>
-          <a:ln/>
-        </p:spPr>
-        <p:txBody>
-          <a:bodyPr wrap="square" lIns="0" tIns="0" rIns="0" bIns="0" rtlCol="0" anchor="ctr"/>
-          <a:lstStyle/>
-          <a:p>
-            <a:pPr indent="0" marL="0">
-              <a:buNone/>
-            </a:pPr>
-            <a:r>
-              <a:rPr lang="en-US" sz="1050" b="1" spc="50" kern="0" dirty="0">
-                <a:solidFill>
-                  <a:srgbClr val="D97757"/>
-                </a:solidFill>
-                <a:latin typeface="Courier New" pitchFamily="34" charset="0"/>
-                <a:ea typeface="Courier New" pitchFamily="34" charset="-122"/>
-                <a:cs typeface="Courier New" pitchFamily="34" charset="-120"/>
-              </a:rPr>
-              <a:t>// DI into the tool</a:t>
-            </a:r>
-            <a:endParaRPr lang="en-US" sz="1050" dirty="0"/>
-          </a:p>
-        </p:txBody>
-      </p:sp>
-      <p:sp>
-        <p:nvSpPr>
-          <p:cNvPr id="7" name="Text 4"/>
-          <p:cNvSpPr/>
-          <p:nvPr/>
-        </p:nvSpPr>
-        <p:spPr>
-          <a:xfrm>
-            <a:off x="841248" y="1828800"/>
-            <a:ext cx="3886200" cy="1371600"/>
-          </a:xfrm>
-          <a:prstGeom prst="rect">
-            <a:avLst/>
-          </a:prstGeom>
-          <a:noFill/>
-          <a:ln/>
-        </p:spPr>
-        <p:txBody>
-          <a:bodyPr wrap="square" lIns="0" tIns="0" rIns="0" bIns="0" rtlCol="0" anchor="t"/>
-          <a:lstStyle/>
-          <a:p>
-            <a:pPr indent="0" marL="0">
-              <a:lnSpc>
-                <a:spcPct val="128000"/>
-              </a:lnSpc>
-              <a:buNone/>
-            </a:pPr>
-            <a:r>
-              <a:rPr lang="en-US" sz="1250" dirty="0">
-                <a:solidFill>
-                  <a:srgbClr val="C58FE0"/>
-                </a:solidFill>
-                <a:latin typeface="Courier New" pitchFamily="34" charset="0"/>
-                <a:ea typeface="Courier New" pitchFamily="34" charset="-122"/>
-                <a:cs typeface="Courier New" pitchFamily="34" charset="-120"/>
-              </a:rPr>
-              <a:t>public class </a:t>
-            </a:r>
-            <a:pPr indent="0" marL="0">
-              <a:lnSpc>
-                <a:spcPct val="128000"/>
-              </a:lnSpc>
-              <a:buNone/>
-            </a:pPr>
-            <a:r>
-              <a:rPr lang="en-US" sz="1250" dirty="0">
-                <a:solidFill>
-                  <a:srgbClr val="9FC3E0"/>
-                </a:solidFill>
-                <a:latin typeface="Courier New" pitchFamily="34" charset="0"/>
-                <a:ea typeface="Courier New" pitchFamily="34" charset="-122"/>
-                <a:cs typeface="Courier New" pitchFamily="34" charset="-120"/>
-              </a:rPr>
-              <a:t>BookTools</a:t>
-            </a:r>
-            <a:pPr indent="0" marL="0">
-              <a:lnSpc>
-                <a:spcPct val="128000"/>
-              </a:lnSpc>
-              <a:buNone/>
-            </a:pPr>
-            <a:r>
-              <a:rPr lang="en-US" sz="1250" dirty="0">
-                <a:solidFill>
-                  <a:srgbClr val="E9E5DD"/>
-                </a:solidFill>
-                <a:latin typeface="Courier New" pitchFamily="34" charset="0"/>
-                <a:ea typeface="Courier New" pitchFamily="34" charset="-122"/>
-                <a:cs typeface="Courier New" pitchFamily="34" charset="-120"/>
-              </a:rPr>
-              <a:t>(</a:t>
-            </a:r>
-            <a:endParaRPr lang="en-US" sz="1250" dirty="0"/>
-          </a:p>
-          <a:p>
-            <a:pPr indent="0" marL="0">
-              <a:lnSpc>
-                <a:spcPct val="128000"/>
-              </a:lnSpc>
-              <a:buNone/>
-            </a:pPr>
-            <a:r>
-              <a:rPr lang="en-US" sz="1250" dirty="0">
-                <a:solidFill>
-                  <a:srgbClr val="E9E5DD"/>
-                </a:solidFill>
-                <a:latin typeface="Courier New" pitchFamily="34" charset="0"/>
-                <a:ea typeface="Courier New" pitchFamily="34" charset="-122"/>
-                <a:cs typeface="Courier New" pitchFamily="34" charset="-120"/>
-              </a:rPr>
-              <a:t>  </a:t>
-            </a:r>
-            <a:pPr indent="0" marL="0">
-              <a:lnSpc>
-                <a:spcPct val="128000"/>
-              </a:lnSpc>
-              <a:buNone/>
-            </a:pPr>
-            <a:r>
-              <a:rPr lang="en-US" sz="1250" dirty="0">
-                <a:solidFill>
-                  <a:srgbClr val="9FC3E0"/>
-                </a:solidFill>
-                <a:latin typeface="Courier New" pitchFamily="34" charset="0"/>
-                <a:ea typeface="Courier New" pitchFamily="34" charset="-122"/>
-                <a:cs typeface="Courier New" pitchFamily="34" charset="-120"/>
-              </a:rPr>
-              <a:t>BookDbContext</a:t>
-            </a:r>
-            <a:pPr indent="0" marL="0">
-              <a:lnSpc>
-                <a:spcPct val="128000"/>
-              </a:lnSpc>
-              <a:buNone/>
-            </a:pPr>
-            <a:r>
-              <a:rPr lang="en-US" sz="1250" dirty="0">
-                <a:solidFill>
-                  <a:srgbClr val="E9E5DD"/>
-                </a:solidFill>
-                <a:latin typeface="Courier New" pitchFamily="34" charset="0"/>
-                <a:ea typeface="Courier New" pitchFamily="34" charset="-122"/>
-                <a:cs typeface="Courier New" pitchFamily="34" charset="-120"/>
-              </a:rPr>
-              <a:t> db,</a:t>
-            </a:r>
-            <a:endParaRPr lang="en-US" sz="1250" dirty="0"/>
-          </a:p>
-          <a:p>
-            <a:pPr indent="0" marL="0">
-              <a:lnSpc>
-                <a:spcPct val="128000"/>
-              </a:lnSpc>
-              <a:buNone/>
-            </a:pPr>
-            <a:r>
-              <a:rPr lang="en-US" sz="1250" dirty="0">
-                <a:solidFill>
-                  <a:srgbClr val="E9E5DD"/>
-                </a:solidFill>
-                <a:latin typeface="Courier New" pitchFamily="34" charset="0"/>
-                <a:ea typeface="Courier New" pitchFamily="34" charset="-122"/>
-                <a:cs typeface="Courier New" pitchFamily="34" charset="-120"/>
-              </a:rPr>
-              <a:t>  </a:t>
-            </a:r>
-            <a:pPr indent="0" marL="0">
-              <a:lnSpc>
-                <a:spcPct val="128000"/>
-              </a:lnSpc>
-              <a:buNone/>
-            </a:pPr>
-            <a:r>
-              <a:rPr lang="en-US" sz="1250" dirty="0">
-                <a:solidFill>
-                  <a:srgbClr val="9FC3E0"/>
-                </a:solidFill>
-                <a:latin typeface="Courier New" pitchFamily="34" charset="0"/>
-                <a:ea typeface="Courier New" pitchFamily="34" charset="-122"/>
-                <a:cs typeface="Courier New" pitchFamily="34" charset="-120"/>
-              </a:rPr>
-              <a:t>IBookService</a:t>
-            </a:r>
-            <a:pPr indent="0" marL="0">
-              <a:lnSpc>
-                <a:spcPct val="128000"/>
-              </a:lnSpc>
-              <a:buNone/>
-            </a:pPr>
-            <a:r>
-              <a:rPr lang="en-US" sz="1250" dirty="0">
-                <a:solidFill>
-                  <a:srgbClr val="E9E5DD"/>
-                </a:solidFill>
-                <a:latin typeface="Courier New" pitchFamily="34" charset="0"/>
-                <a:ea typeface="Courier New" pitchFamily="34" charset="-122"/>
-                <a:cs typeface="Courier New" pitchFamily="34" charset="-120"/>
-              </a:rPr>
-              <a:t> books)</a:t>
-            </a:r>
-            <a:endParaRPr lang="en-US" sz="1250" dirty="0"/>
-          </a:p>
-          <a:p>
-            <a:pPr indent="0" marL="0">
-              <a:lnSpc>
-                <a:spcPct val="128000"/>
-              </a:lnSpc>
-              <a:buNone/>
-            </a:pPr>
-            <a:r>
-              <a:rPr lang="en-US" sz="1250" dirty="0">
-                <a:solidFill>
-                  <a:srgbClr val="9A958B"/>
-                </a:solidFill>
-                <a:latin typeface="Courier New" pitchFamily="34" charset="0"/>
-                <a:ea typeface="Courier New" pitchFamily="34" charset="-122"/>
-                <a:cs typeface="Courier New" pitchFamily="34" charset="-120"/>
-              </a:rPr>
-              <a:t>// injected like any service</a:t>
-            </a:r>
-            <a:endParaRPr lang="en-US" sz="1250" dirty="0"/>
-          </a:p>
-        </p:txBody>
-      </p:sp>
-      <p:sp>
-        <p:nvSpPr>
-          <p:cNvPr id="8" name="Shape 5"/>
-          <p:cNvSpPr/>
-          <p:nvPr/>
-        </p:nvSpPr>
-        <p:spPr>
-          <a:xfrm>
-            <a:off x="5257800" y="1417320"/>
-            <a:ext cx="384048" cy="384048"/>
-          </a:xfrm>
-          <a:prstGeom prst="ellipse">
-            <a:avLst/>
-          </a:prstGeom>
-          <a:solidFill>
-            <a:srgbClr val="D97757"/>
-          </a:solidFill>
-          <a:ln/>
-        </p:spPr>
-      </p:sp>
-      <p:pic>
-        <p:nvPicPr>
-          <p:cNvPr id="9" name="Image 1" descr="preencoded.png">    </p:cNvPr>
+          <p:cNvPr id="4" name="Image 0" descr="preencoded.png"/>
           <p:cNvPicPr>
             <a:picLocks noChangeAspect="1"/>
           </p:cNvPicPr>
@@ -8031,8 +7305,8 @@
         </p:blipFill>
         <p:spPr>
           <a:xfrm>
-            <a:off x="5357652" y="1517172"/>
-            <a:ext cx="184343" cy="184343"/>
+            <a:off x="8321040" y="402336"/>
+            <a:ext cx="329184" cy="329184"/>
           </a:xfrm>
           <a:prstGeom prst="rect">
             <a:avLst/>
@@ -8041,91 +7315,256 @@
       </p:pic>
       <p:sp>
         <p:nvSpPr>
-          <p:cNvPr id="10" name="Text 6"/>
-          <p:cNvSpPr/>
-          <p:nvPr/>
-        </p:nvSpPr>
-        <p:spPr>
-          <a:xfrm>
-            <a:off x="5788152" y="1371600"/>
-            <a:ext cx="3017520" cy="274320"/>
-          </a:xfrm>
-          <a:prstGeom prst="rect">
-            <a:avLst/>
-          </a:prstGeom>
-          <a:noFill/>
-          <a:ln/>
-        </p:spPr>
-        <p:txBody>
-          <a:bodyPr wrap="square" lIns="0" tIns="0" rIns="0" bIns="0" rtlCol="0" anchor="ctr"/>
-          <a:lstStyle/>
-          <a:p>
-            <a:pPr indent="0" marL="0">
-              <a:buNone/>
-            </a:pPr>
-            <a:r>
-              <a:rPr lang="en-US" sz="1300" b="1" dirty="0">
-                <a:solidFill>
-                  <a:srgbClr val="141413"/>
+          <p:cNvPr id="5" name="Shape 2"/>
+          <p:cNvSpPr/>
+          <p:nvPr/>
+        </p:nvSpPr>
+        <p:spPr>
+          <a:xfrm>
+            <a:off x="548640" y="1371600"/>
+            <a:ext cx="4434840" cy="2011680"/>
+          </a:xfrm>
+          <a:prstGeom prst="roundRect">
+            <a:avLst>
+              <a:gd name="adj" fmla="val 3636"/>
+            </a:avLst>
+          </a:prstGeom>
+          <a:solidFill>
+            <a:srgbClr val="1F1E1D"/>
+          </a:solidFill>
+          <a:ln/>
+          <a:effectLst>
+            <a:outerShdw blurRad="88900" dist="38100" dir="5400000" algn="bl" rotWithShape="0">
+              <a:srgbClr val="000000">
+                <a:alpha val="10000"/>
+              </a:srgbClr>
+            </a:outerShdw>
+          </a:effectLst>
+        </p:spPr>
+        <p:txBody>
+          <a:bodyPr/>
+          <a:lstStyle/>
+          <a:p>
+            <a:endParaRPr lang="en-US"/>
+          </a:p>
+        </p:txBody>
+      </p:sp>
+      <p:sp>
+        <p:nvSpPr>
+          <p:cNvPr id="6" name="Text 3"/>
+          <p:cNvSpPr/>
+          <p:nvPr/>
+        </p:nvSpPr>
+        <p:spPr>
+          <a:xfrm>
+            <a:off x="822960" y="1517904"/>
+            <a:ext cx="3886200" cy="256032"/>
+          </a:xfrm>
+          <a:prstGeom prst="rect">
+            <a:avLst/>
+          </a:prstGeom>
+          <a:noFill/>
+          <a:ln/>
+        </p:spPr>
+        <p:txBody>
+          <a:bodyPr wrap="square" lIns="0" tIns="0" rIns="0" bIns="0" rtlCol="0" anchor="ctr"/>
+          <a:lstStyle/>
+          <a:p>
+            <a:pPr marL="0" indent="0">
+              <a:buNone/>
+            </a:pPr>
+            <a:r>
+              <a:rPr lang="en-US" sz="1050" b="1" kern="0" spc="50" dirty="0">
+                <a:solidFill>
+                  <a:srgbClr val="D97757"/>
                 </a:solidFill>
                 <a:latin typeface="Courier New" pitchFamily="34" charset="0"/>
                 <a:ea typeface="Courier New" pitchFamily="34" charset="-122"/>
                 <a:cs typeface="Courier New" pitchFamily="34" charset="-120"/>
               </a:rPr>
-              <a:t>search_books</a:t>
-            </a:r>
-            <a:endParaRPr lang="en-US" sz="1300" dirty="0"/>
-          </a:p>
-        </p:txBody>
-      </p:sp>
-      <p:sp>
-        <p:nvSpPr>
-          <p:cNvPr id="11" name="Text 7"/>
-          <p:cNvSpPr/>
-          <p:nvPr/>
-        </p:nvSpPr>
-        <p:spPr>
-          <a:xfrm>
-            <a:off x="5788152" y="1636776"/>
-            <a:ext cx="3108960" cy="274320"/>
-          </a:xfrm>
-          <a:prstGeom prst="rect">
-            <a:avLst/>
-          </a:prstGeom>
-          <a:noFill/>
-          <a:ln/>
-        </p:spPr>
-        <p:txBody>
-          <a:bodyPr wrap="square" lIns="0" tIns="0" rIns="0" bIns="0" rtlCol="0" anchor="ctr"/>
-          <a:lstStyle/>
-          <a:p>
-            <a:pPr indent="0" marL="0">
-              <a:buNone/>
-            </a:pPr>
-            <a:r>
-              <a:rPr lang="en-US" sz="1100" dirty="0">
-                <a:solidFill>
-                  <a:srgbClr val="615C52"/>
-                </a:solidFill>
-                <a:latin typeface="Inter" pitchFamily="34" charset="0"/>
-                <a:ea typeface="Inter" pitchFamily="34" charset="-122"/>
-                <a:cs typeface="Inter" pitchFamily="34" charset="-120"/>
-              </a:rPr>
-              <a:t>Query the catalog</a:t>
-            </a:r>
-            <a:endParaRPr lang="en-US" sz="1100" dirty="0"/>
-          </a:p>
-        </p:txBody>
-      </p:sp>
-      <p:sp>
-        <p:nvSpPr>
-          <p:cNvPr id="12" name="Shape 8"/>
-          <p:cNvSpPr/>
-          <p:nvPr/>
-        </p:nvSpPr>
-        <p:spPr>
-          <a:xfrm>
-            <a:off x="5257800" y="2075688"/>
+              <a:t>// DI into the tool</a:t>
+            </a:r>
+            <a:endParaRPr lang="en-US" sz="1050" dirty="0"/>
+          </a:p>
+        </p:txBody>
+      </p:sp>
+      <p:sp>
+        <p:nvSpPr>
+          <p:cNvPr id="7" name="Text 4"/>
+          <p:cNvSpPr/>
+          <p:nvPr/>
+        </p:nvSpPr>
+        <p:spPr>
+          <a:xfrm>
+            <a:off x="841248" y="1828800"/>
+            <a:ext cx="3886200" cy="1371600"/>
+          </a:xfrm>
+          <a:prstGeom prst="rect">
+            <a:avLst/>
+          </a:prstGeom>
+          <a:noFill/>
+          <a:ln/>
+        </p:spPr>
+        <p:txBody>
+          <a:bodyPr wrap="square" lIns="0" tIns="0" rIns="0" bIns="0" rtlCol="0" anchor="t"/>
+          <a:lstStyle/>
+          <a:p>
+            <a:pPr marL="0" indent="0">
+              <a:lnSpc>
+                <a:spcPct val="128000"/>
+              </a:lnSpc>
+              <a:buNone/>
+            </a:pPr>
+            <a:r>
+              <a:rPr lang="en-US" sz="1250" dirty="0">
+                <a:solidFill>
+                  <a:srgbClr val="C58FE0"/>
+                </a:solidFill>
+                <a:latin typeface="Courier New" pitchFamily="34" charset="0"/>
+                <a:ea typeface="Courier New" pitchFamily="34" charset="-122"/>
+                <a:cs typeface="Courier New" pitchFamily="34" charset="-120"/>
+              </a:rPr>
+              <a:t>public class </a:t>
+            </a:r>
+            <a:r>
+              <a:rPr lang="en-US" sz="1250" dirty="0">
+                <a:solidFill>
+                  <a:srgbClr val="9FC3E0"/>
+                </a:solidFill>
+                <a:latin typeface="Courier New" pitchFamily="34" charset="0"/>
+                <a:ea typeface="Courier New" pitchFamily="34" charset="-122"/>
+                <a:cs typeface="Courier New" pitchFamily="34" charset="-120"/>
+              </a:rPr>
+              <a:t>BookTools</a:t>
+            </a:r>
+            <a:r>
+              <a:rPr lang="en-US" sz="1250" dirty="0">
+                <a:solidFill>
+                  <a:srgbClr val="E9E5DD"/>
+                </a:solidFill>
+                <a:latin typeface="Courier New" pitchFamily="34" charset="0"/>
+                <a:ea typeface="Courier New" pitchFamily="34" charset="-122"/>
+                <a:cs typeface="Courier New" pitchFamily="34" charset="-120"/>
+              </a:rPr>
+              <a:t>(</a:t>
+            </a:r>
+            <a:endParaRPr lang="en-US" sz="1250" dirty="0"/>
+          </a:p>
+          <a:p>
+            <a:pPr marL="0" indent="0">
+              <a:lnSpc>
+                <a:spcPct val="128000"/>
+              </a:lnSpc>
+              <a:buNone/>
+            </a:pPr>
+            <a:r>
+              <a:rPr lang="en-US" sz="1250" dirty="0">
+                <a:solidFill>
+                  <a:srgbClr val="E9E5DD"/>
+                </a:solidFill>
+                <a:latin typeface="Courier New" pitchFamily="34" charset="0"/>
+                <a:ea typeface="Courier New" pitchFamily="34" charset="-122"/>
+                <a:cs typeface="Courier New" pitchFamily="34" charset="-120"/>
+              </a:rPr>
+              <a:t>  </a:t>
+            </a:r>
+            <a:r>
+              <a:rPr lang="en-US" sz="1250" dirty="0">
+                <a:solidFill>
+                  <a:srgbClr val="9FC3E0"/>
+                </a:solidFill>
+                <a:latin typeface="Courier New" pitchFamily="34" charset="0"/>
+                <a:ea typeface="Courier New" pitchFamily="34" charset="-122"/>
+                <a:cs typeface="Courier New" pitchFamily="34" charset="-120"/>
+              </a:rPr>
+              <a:t>BookDbContext</a:t>
+            </a:r>
+            <a:r>
+              <a:rPr lang="en-US" sz="1250" dirty="0">
+                <a:solidFill>
+                  <a:srgbClr val="E9E5DD"/>
+                </a:solidFill>
+                <a:latin typeface="Courier New" pitchFamily="34" charset="0"/>
+                <a:ea typeface="Courier New" pitchFamily="34" charset="-122"/>
+                <a:cs typeface="Courier New" pitchFamily="34" charset="-120"/>
+              </a:rPr>
+              <a:t> db,</a:t>
+            </a:r>
+            <a:endParaRPr lang="en-US" sz="1250" dirty="0"/>
+          </a:p>
+          <a:p>
+            <a:pPr marL="0" indent="0">
+              <a:lnSpc>
+                <a:spcPct val="128000"/>
+              </a:lnSpc>
+              <a:buNone/>
+            </a:pPr>
+            <a:r>
+              <a:rPr lang="en-US" sz="1250" dirty="0">
+                <a:solidFill>
+                  <a:srgbClr val="E9E5DD"/>
+                </a:solidFill>
+                <a:latin typeface="Courier New" pitchFamily="34" charset="0"/>
+                <a:ea typeface="Courier New" pitchFamily="34" charset="-122"/>
+                <a:cs typeface="Courier New" pitchFamily="34" charset="-120"/>
+              </a:rPr>
+              <a:t>  </a:t>
+            </a:r>
+            <a:r>
+              <a:rPr lang="en-US" sz="1250" dirty="0">
+                <a:solidFill>
+                  <a:srgbClr val="9FC3E0"/>
+                </a:solidFill>
+                <a:latin typeface="Courier New" pitchFamily="34" charset="0"/>
+                <a:ea typeface="Courier New" pitchFamily="34" charset="-122"/>
+                <a:cs typeface="Courier New" pitchFamily="34" charset="-120"/>
+              </a:rPr>
+              <a:t>IBookService</a:t>
+            </a:r>
+            <a:r>
+              <a:rPr lang="en-US" sz="1250" dirty="0">
+                <a:solidFill>
+                  <a:srgbClr val="E9E5DD"/>
+                </a:solidFill>
+                <a:latin typeface="Courier New" pitchFamily="34" charset="0"/>
+                <a:ea typeface="Courier New" pitchFamily="34" charset="-122"/>
+                <a:cs typeface="Courier New" pitchFamily="34" charset="-120"/>
+              </a:rPr>
+              <a:t> books)</a:t>
+            </a:r>
+            <a:endParaRPr lang="en-US" sz="1250" dirty="0"/>
+          </a:p>
+          <a:p>
+            <a:pPr marL="0" indent="0">
+              <a:lnSpc>
+                <a:spcPct val="128000"/>
+              </a:lnSpc>
+              <a:buNone/>
+            </a:pPr>
+            <a:r>
+              <a:rPr lang="en-US" sz="1250" dirty="0">
+                <a:solidFill>
+                  <a:srgbClr val="9A958B"/>
+                </a:solidFill>
+                <a:latin typeface="Courier New" pitchFamily="34" charset="0"/>
+                <a:ea typeface="Courier New" pitchFamily="34" charset="-122"/>
+                <a:cs typeface="Courier New" pitchFamily="34" charset="-120"/>
+              </a:rPr>
+              <a:t>// injected like any service</a:t>
+            </a:r>
+            <a:endParaRPr lang="en-US" sz="1250" dirty="0"/>
+          </a:p>
+        </p:txBody>
+      </p:sp>
+      <p:sp>
+        <p:nvSpPr>
+          <p:cNvPr id="8" name="Shape 5"/>
+          <p:cNvSpPr/>
+          <p:nvPr/>
+        </p:nvSpPr>
+        <p:spPr>
+          <a:xfrm>
+            <a:off x="5257800" y="1417320"/>
             <a:ext cx="384048" cy="384048"/>
           </a:xfrm>
           <a:prstGeom prst="ellipse">
@@ -8136,10 +7575,17 @@
           </a:solidFill>
           <a:ln/>
         </p:spPr>
+        <p:txBody>
+          <a:bodyPr/>
+          <a:lstStyle/>
+          <a:p>
+            <a:endParaRPr lang="en-US"/>
+          </a:p>
+        </p:txBody>
       </p:sp>
       <p:pic>
         <p:nvPicPr>
-          <p:cNvPr id="13" name="Image 2" descr="preencoded.png">    </p:cNvPr>
+          <p:cNvPr id="9" name="Image 1" descr="preencoded.png"/>
           <p:cNvPicPr>
             <a:picLocks noChangeAspect="1"/>
           </p:cNvPicPr>
@@ -8153,7 +7599,7 @@
         </p:blipFill>
         <p:spPr>
           <a:xfrm>
-            <a:off x="5357652" y="2175540"/>
+            <a:off x="5357652" y="1517172"/>
             <a:ext cx="184343" cy="184343"/>
           </a:xfrm>
           <a:prstGeom prst="rect">
@@ -8163,13 +7609,13 @@
       </p:pic>
       <p:sp>
         <p:nvSpPr>
-          <p:cNvPr id="14" name="Text 9"/>
-          <p:cNvSpPr/>
-          <p:nvPr/>
-        </p:nvSpPr>
-        <p:spPr>
-          <a:xfrm>
-            <a:off x="5788152" y="2029968"/>
+          <p:cNvPr id="10" name="Text 6"/>
+          <p:cNvSpPr/>
+          <p:nvPr/>
+        </p:nvSpPr>
+        <p:spPr>
+          <a:xfrm>
+            <a:off x="5788152" y="1371600"/>
             <a:ext cx="3017520" cy="274320"/>
           </a:xfrm>
           <a:prstGeom prst="rect">
@@ -8182,7 +7628,7 @@
           <a:bodyPr wrap="square" lIns="0" tIns="0" rIns="0" bIns="0" rtlCol="0" anchor="ctr"/>
           <a:lstStyle/>
           <a:p>
-            <a:pPr indent="0" marL="0">
+            <a:pPr marL="0" indent="0">
               <a:buNone/>
             </a:pPr>
             <a:r>
@@ -8194,7 +7640,7 @@
                 <a:ea typeface="Courier New" pitchFamily="34" charset="-122"/>
                 <a:cs typeface="Courier New" pitchFamily="34" charset="-120"/>
               </a:rPr>
-              <a:t>get_reading_progress</a:t>
+              <a:t>search_books</a:t>
             </a:r>
             <a:endParaRPr lang="en-US" sz="1300" dirty="0"/>
           </a:p>
@@ -8202,13 +7648,13 @@
       </p:sp>
       <p:sp>
         <p:nvSpPr>
-          <p:cNvPr id="15" name="Text 10"/>
-          <p:cNvSpPr/>
-          <p:nvPr/>
-        </p:nvSpPr>
-        <p:spPr>
-          <a:xfrm>
-            <a:off x="5788152" y="2295144"/>
+          <p:cNvPr id="11" name="Text 7"/>
+          <p:cNvSpPr/>
+          <p:nvPr/>
+        </p:nvSpPr>
+        <p:spPr>
+          <a:xfrm>
+            <a:off x="5788152" y="1636776"/>
             <a:ext cx="3108960" cy="274320"/>
           </a:xfrm>
           <a:prstGeom prst="rect">
@@ -8221,7 +7667,7 @@
           <a:bodyPr wrap="square" lIns="0" tIns="0" rIns="0" bIns="0" rtlCol="0" anchor="ctr"/>
           <a:lstStyle/>
           <a:p>
-            <a:pPr indent="0" marL="0">
+            <a:pPr marL="0" indent="0">
               <a:buNone/>
             </a:pPr>
             <a:r>
@@ -8233,7 +7679,7 @@
                 <a:ea typeface="Inter" pitchFamily="34" charset="-122"/>
                 <a:cs typeface="Inter" pitchFamily="34" charset="-120"/>
               </a:rPr>
-              <a:t>Read a user's progress</a:t>
+              <a:t>Query the catalog</a:t>
             </a:r>
             <a:endParaRPr lang="en-US" sz="1100" dirty="0"/>
           </a:p>
@@ -8241,13 +7687,13 @@
       </p:sp>
       <p:sp>
         <p:nvSpPr>
-          <p:cNvPr id="16" name="Shape 11"/>
-          <p:cNvSpPr/>
-          <p:nvPr/>
-        </p:nvSpPr>
-        <p:spPr>
-          <a:xfrm>
-            <a:off x="5257800" y="2734056"/>
+          <p:cNvPr id="12" name="Shape 8"/>
+          <p:cNvSpPr/>
+          <p:nvPr/>
+        </p:nvSpPr>
+        <p:spPr>
+          <a:xfrm>
+            <a:off x="5257800" y="2075688"/>
             <a:ext cx="384048" cy="384048"/>
           </a:xfrm>
           <a:prstGeom prst="ellipse">
@@ -8258,10 +7704,17 @@
           </a:solidFill>
           <a:ln/>
         </p:spPr>
+        <p:txBody>
+          <a:bodyPr/>
+          <a:lstStyle/>
+          <a:p>
+            <a:endParaRPr lang="en-US"/>
+          </a:p>
+        </p:txBody>
       </p:sp>
       <p:pic>
         <p:nvPicPr>
-          <p:cNvPr id="17" name="Image 3" descr="preencoded.png">    </p:cNvPr>
+          <p:cNvPr id="13" name="Image 2" descr="preencoded.png"/>
           <p:cNvPicPr>
             <a:picLocks noChangeAspect="1"/>
           </p:cNvPicPr>
@@ -8275,7 +7728,7 @@
         </p:blipFill>
         <p:spPr>
           <a:xfrm>
-            <a:off x="5357652" y="2833908"/>
+            <a:off x="5357652" y="2175540"/>
             <a:ext cx="184343" cy="184343"/>
           </a:xfrm>
           <a:prstGeom prst="rect">
@@ -8285,13 +7738,13 @@
       </p:pic>
       <p:sp>
         <p:nvSpPr>
-          <p:cNvPr id="18" name="Text 12"/>
-          <p:cNvSpPr/>
-          <p:nvPr/>
-        </p:nvSpPr>
-        <p:spPr>
-          <a:xfrm>
-            <a:off x="5788152" y="2688336"/>
+          <p:cNvPr id="14" name="Text 9"/>
+          <p:cNvSpPr/>
+          <p:nvPr/>
+        </p:nvSpPr>
+        <p:spPr>
+          <a:xfrm>
+            <a:off x="5788152" y="2029968"/>
             <a:ext cx="3017520" cy="274320"/>
           </a:xfrm>
           <a:prstGeom prst="rect">
@@ -8304,7 +7757,7 @@
           <a:bodyPr wrap="square" lIns="0" tIns="0" rIns="0" bIns="0" rtlCol="0" anchor="ctr"/>
           <a:lstStyle/>
           <a:p>
-            <a:pPr indent="0" marL="0">
+            <a:pPr marL="0" indent="0">
               <a:buNone/>
             </a:pPr>
             <a:r>
@@ -8316,7 +7769,7 @@
                 <a:ea typeface="Courier New" pitchFamily="34" charset="-122"/>
                 <a:cs typeface="Courier New" pitchFamily="34" charset="-120"/>
               </a:rPr>
-              <a:t>add_book</a:t>
+              <a:t>get_reading_progress</a:t>
             </a:r>
             <a:endParaRPr lang="en-US" sz="1300" dirty="0"/>
           </a:p>
@@ -8324,13 +7777,13 @@
       </p:sp>
       <p:sp>
         <p:nvSpPr>
-          <p:cNvPr id="19" name="Text 13"/>
-          <p:cNvSpPr/>
-          <p:nvPr/>
-        </p:nvSpPr>
-        <p:spPr>
-          <a:xfrm>
-            <a:off x="5788152" y="2953512"/>
+          <p:cNvPr id="15" name="Text 10"/>
+          <p:cNvSpPr/>
+          <p:nvPr/>
+        </p:nvSpPr>
+        <p:spPr>
+          <a:xfrm>
+            <a:off x="5788152" y="2295144"/>
             <a:ext cx="3108960" cy="274320"/>
           </a:xfrm>
           <a:prstGeom prst="rect">
@@ -8343,7 +7796,7 @@
           <a:bodyPr wrap="square" lIns="0" tIns="0" rIns="0" bIns="0" rtlCol="0" anchor="ctr"/>
           <a:lstStyle/>
           <a:p>
-            <a:pPr indent="0" marL="0">
+            <a:pPr marL="0" indent="0">
               <a:buNone/>
             </a:pPr>
             <a:r>
@@ -8355,7 +7808,7 @@
                 <a:ea typeface="Inter" pitchFamily="34" charset="-122"/>
                 <a:cs typeface="Inter" pitchFamily="34" charset="-120"/>
               </a:rPr>
-              <a:t>Insert through your service</a:t>
+              <a:t>Read a user's progress</a:t>
             </a:r>
             <a:endParaRPr lang="en-US" sz="1100" dirty="0"/>
           </a:p>
@@ -8363,36 +7816,14 @@
       </p:sp>
       <p:sp>
         <p:nvSpPr>
-          <p:cNvPr id="20" name="Shape 14"/>
-          <p:cNvSpPr/>
-          <p:nvPr/>
-        </p:nvSpPr>
-        <p:spPr>
-          <a:xfrm>
-            <a:off x="548640" y="3611880"/>
-            <a:ext cx="8046720" cy="640080"/>
-          </a:xfrm>
-          <a:prstGeom prst="roundRect">
-            <a:avLst>
-              <a:gd name="adj" fmla="val 11429"/>
-            </a:avLst>
-          </a:prstGeom>
-          <a:solidFill>
-            <a:srgbClr val="F4E4DC"/>
-          </a:solidFill>
-          <a:ln/>
-        </p:spPr>
-      </p:sp>
-      <p:sp>
-        <p:nvSpPr>
-          <p:cNvPr id="21" name="Shape 15"/>
-          <p:cNvSpPr/>
-          <p:nvPr/>
-        </p:nvSpPr>
-        <p:spPr>
-          <a:xfrm>
-            <a:off x="749808" y="3730752"/>
-            <a:ext cx="420624" cy="420624"/>
+          <p:cNvPr id="16" name="Shape 11"/>
+          <p:cNvSpPr/>
+          <p:nvPr/>
+        </p:nvSpPr>
+        <p:spPr>
+          <a:xfrm>
+            <a:off x="5257800" y="2734056"/>
+            <a:ext cx="384048" cy="384048"/>
           </a:xfrm>
           <a:prstGeom prst="ellipse">
             <a:avLst/>
@@ -8402,10 +7833,17 @@
           </a:solidFill>
           <a:ln/>
         </p:spPr>
+        <p:txBody>
+          <a:bodyPr/>
+          <a:lstStyle/>
+          <a:p>
+            <a:endParaRPr lang="en-US"/>
+          </a:p>
+        </p:txBody>
       </p:sp>
       <p:pic>
         <p:nvPicPr>
-          <p:cNvPr id="22" name="Image 4" descr="preencoded.png">    </p:cNvPr>
+          <p:cNvPr id="17" name="Image 3" descr="preencoded.png"/>
           <p:cNvPicPr>
             <a:picLocks noChangeAspect="1"/>
           </p:cNvPicPr>
@@ -8419,6 +7857,164 @@
         </p:blipFill>
         <p:spPr>
           <a:xfrm>
+            <a:off x="5357652" y="2833908"/>
+            <a:ext cx="184343" cy="184343"/>
+          </a:xfrm>
+          <a:prstGeom prst="rect">
+            <a:avLst/>
+          </a:prstGeom>
+        </p:spPr>
+      </p:pic>
+      <p:sp>
+        <p:nvSpPr>
+          <p:cNvPr id="18" name="Text 12"/>
+          <p:cNvSpPr/>
+          <p:nvPr/>
+        </p:nvSpPr>
+        <p:spPr>
+          <a:xfrm>
+            <a:off x="5788152" y="2688336"/>
+            <a:ext cx="3017520" cy="274320"/>
+          </a:xfrm>
+          <a:prstGeom prst="rect">
+            <a:avLst/>
+          </a:prstGeom>
+          <a:noFill/>
+          <a:ln/>
+        </p:spPr>
+        <p:txBody>
+          <a:bodyPr wrap="square" lIns="0" tIns="0" rIns="0" bIns="0" rtlCol="0" anchor="ctr"/>
+          <a:lstStyle/>
+          <a:p>
+            <a:pPr marL="0" indent="0">
+              <a:buNone/>
+            </a:pPr>
+            <a:r>
+              <a:rPr lang="en-US" sz="1300" b="1" dirty="0">
+                <a:solidFill>
+                  <a:srgbClr val="141413"/>
+                </a:solidFill>
+                <a:latin typeface="Courier New" pitchFamily="34" charset="0"/>
+                <a:ea typeface="Courier New" pitchFamily="34" charset="-122"/>
+                <a:cs typeface="Courier New" pitchFamily="34" charset="-120"/>
+              </a:rPr>
+              <a:t>add_book</a:t>
+            </a:r>
+            <a:endParaRPr lang="en-US" sz="1300" dirty="0"/>
+          </a:p>
+        </p:txBody>
+      </p:sp>
+      <p:sp>
+        <p:nvSpPr>
+          <p:cNvPr id="19" name="Text 13"/>
+          <p:cNvSpPr/>
+          <p:nvPr/>
+        </p:nvSpPr>
+        <p:spPr>
+          <a:xfrm>
+            <a:off x="5788152" y="2953512"/>
+            <a:ext cx="3108960" cy="274320"/>
+          </a:xfrm>
+          <a:prstGeom prst="rect">
+            <a:avLst/>
+          </a:prstGeom>
+          <a:noFill/>
+          <a:ln/>
+        </p:spPr>
+        <p:txBody>
+          <a:bodyPr wrap="square" lIns="0" tIns="0" rIns="0" bIns="0" rtlCol="0" anchor="ctr"/>
+          <a:lstStyle/>
+          <a:p>
+            <a:pPr marL="0" indent="0">
+              <a:buNone/>
+            </a:pPr>
+            <a:r>
+              <a:rPr lang="en-US" sz="1100" dirty="0">
+                <a:solidFill>
+                  <a:srgbClr val="615C52"/>
+                </a:solidFill>
+                <a:latin typeface="Inter" pitchFamily="34" charset="0"/>
+                <a:ea typeface="Inter" pitchFamily="34" charset="-122"/>
+                <a:cs typeface="Inter" pitchFamily="34" charset="-120"/>
+              </a:rPr>
+              <a:t>Insert through your service</a:t>
+            </a:r>
+            <a:endParaRPr lang="en-US" sz="1100" dirty="0"/>
+          </a:p>
+        </p:txBody>
+      </p:sp>
+      <p:sp>
+        <p:nvSpPr>
+          <p:cNvPr id="20" name="Shape 14"/>
+          <p:cNvSpPr/>
+          <p:nvPr/>
+        </p:nvSpPr>
+        <p:spPr>
+          <a:xfrm>
+            <a:off x="548640" y="3611880"/>
+            <a:ext cx="8046720" cy="640080"/>
+          </a:xfrm>
+          <a:prstGeom prst="roundRect">
+            <a:avLst>
+              <a:gd name="adj" fmla="val 11429"/>
+            </a:avLst>
+          </a:prstGeom>
+          <a:solidFill>
+            <a:srgbClr val="F4E4DC"/>
+          </a:solidFill>
+          <a:ln/>
+        </p:spPr>
+        <p:txBody>
+          <a:bodyPr/>
+          <a:lstStyle/>
+          <a:p>
+            <a:endParaRPr lang="en-US"/>
+          </a:p>
+        </p:txBody>
+      </p:sp>
+      <p:sp>
+        <p:nvSpPr>
+          <p:cNvPr id="21" name="Shape 15"/>
+          <p:cNvSpPr/>
+          <p:nvPr/>
+        </p:nvSpPr>
+        <p:spPr>
+          <a:xfrm>
+            <a:off x="749808" y="3730752"/>
+            <a:ext cx="420624" cy="420624"/>
+          </a:xfrm>
+          <a:prstGeom prst="ellipse">
+            <a:avLst/>
+          </a:prstGeom>
+          <a:solidFill>
+            <a:srgbClr val="D97757"/>
+          </a:solidFill>
+          <a:ln/>
+        </p:spPr>
+        <p:txBody>
+          <a:bodyPr/>
+          <a:lstStyle/>
+          <a:p>
+            <a:endParaRPr lang="en-US"/>
+          </a:p>
+        </p:txBody>
+      </p:sp>
+      <p:pic>
+        <p:nvPicPr>
+          <p:cNvPr id="22" name="Image 4" descr="preencoded.png"/>
+          <p:cNvPicPr>
+            <a:picLocks noChangeAspect="1"/>
+          </p:cNvPicPr>
+          <p:nvPr/>
+        </p:nvPicPr>
+        <p:blipFill>
+          <a:blip r:embed="rId6"/>
+          <a:stretch>
+            <a:fillRect/>
+          </a:stretch>
+        </p:blipFill>
+        <p:spPr>
+          <a:xfrm>
             <a:off x="859170" y="3840114"/>
             <a:ext cx="201900" cy="201900"/>
           </a:xfrm>
@@ -8448,7 +8044,7 @@
           <a:bodyPr wrap="square" lIns="0" tIns="0" rIns="0" bIns="0" rtlCol="0" anchor="ctr"/>
           <a:lstStyle/>
           <a:p>
-            <a:pPr indent="0" marL="0">
+            <a:pPr marL="0" indent="0">
               <a:buNone/>
             </a:pPr>
             <a:r>
@@ -8462,9 +8058,6 @@
               </a:rPr>
               <a:t>A thin, governed gateway: </a:t>
             </a:r>
-            <a:pPr indent="0" marL="0">
-              <a:buNone/>
-            </a:pPr>
             <a:r>
               <a:rPr lang="en-US" sz="1400" dirty="0">
                 <a:solidFill>
@@ -8501,7 +8094,7 @@
           <a:bodyPr wrap="square" rtlCol="0" anchor="ctr"/>
           <a:lstStyle/>
           <a:p>
-            <a:pPr indent="0" marL="0">
+            <a:pPr marL="0" indent="0">
               <a:buNone/>
             </a:pPr>
             <a:r>
@@ -8540,7 +8133,7 @@
           <a:bodyPr wrap="square" rtlCol="0" anchor="ctr"/>
           <a:lstStyle/>
           <a:p>
-            <a:pPr algn="r" indent="0" marL="0">
+            <a:pPr marL="0" indent="0" algn="r">
               <a:buNone/>
             </a:pPr>
             <a:r>
@@ -8555,45 +8148,6 @@
               <a:t>Day 2 · Section 4  ·  8/11</a:t>
             </a:r>
             <a:endParaRPr lang="en-US" sz="900" dirty="0"/>
-          </a:p>
-        </p:txBody>
-      </p:sp>
-      <p:sp>
-        <p:nvSpPr>
-          <p:cNvPr id="26" name="Text 19"/>
-          <p:cNvSpPr/>
-          <p:nvPr/>
-        </p:nvSpPr>
-        <p:spPr>
-          <a:xfrm>
-            <a:off x="548640" y="4462272"/>
-            <a:ext cx="8046720" cy="274320"/>
-          </a:xfrm>
-          <a:prstGeom prst="rect">
-            <a:avLst/>
-          </a:prstGeom>
-          <a:noFill/>
-          <a:ln/>
-        </p:spPr>
-        <p:txBody>
-          <a:bodyPr wrap="square" lIns="0" tIns="0" rIns="0" bIns="0" rtlCol="0" anchor="ctr"/>
-          <a:lstStyle/>
-          <a:p>
-            <a:pPr indent="0" marL="0">
-              <a:buNone/>
-            </a:pPr>
-            <a:r>
-              <a:rPr lang="en-US" sz="1000" i="1" dirty="0">
-                <a:solidFill>
-                  <a:srgbClr val="615C52"/>
-                </a:solidFill>
-                <a:latin typeface="Inter" pitchFamily="34" charset="0"/>
-                <a:ea typeface="Inter" pitchFamily="34" charset="-122"/>
-                <a:cs typeface="Inter" pitchFamily="34" charset="-120"/>
-              </a:rPr>
-              <a:t>▸ Tools are the only door to your data — the server governs every access.</a:t>
-            </a:r>
-            <a:endParaRPr lang="en-US" sz="1000" dirty="0"/>
           </a:p>
         </p:txBody>
       </p:sp>
@@ -8613,6 +8167,7 @@
         <a:solidFill>
           <a:srgbClr val="F0EEE6"/>
         </a:solidFill>
+        <a:effectLst/>
       </p:bgPr>
     </p:bg>
     <p:spTree>
@@ -8631,318 +8186,7 @@
       </p:grpSpPr>
       <p:pic>
         <p:nvPicPr>
-          <p:cNvPr id="2" name="Image 0" descr="preencoded.png">    </p:cNvPr>
-          <p:cNvPicPr>
-            <a:picLocks noChangeAspect="1"/>
-          </p:cNvPicPr>
-          <p:nvPr/>
-        </p:nvPicPr>
-        <p:blipFill>
-          <a:blip r:embed="rId1"/>
-          <a:stretch>
-            <a:fillRect/>
-          </a:stretch>
-        </p:blipFill>
-        <p:spPr>
-          <a:xfrm>
-            <a:off x="8321040" y="402336"/>
-            <a:ext cx="329184" cy="329184"/>
-          </a:xfrm>
-          <a:prstGeom prst="rect">
-            <a:avLst/>
-          </a:prstGeom>
-        </p:spPr>
-      </p:pic>
-      <p:sp>
-        <p:nvSpPr>
-          <p:cNvPr id="3" name="Shape 0"/>
-          <p:cNvSpPr/>
-          <p:nvPr/>
-        </p:nvSpPr>
-        <p:spPr>
-          <a:xfrm>
-            <a:off x="548640" y="822960"/>
-            <a:ext cx="3200400" cy="548640"/>
-          </a:xfrm>
-          <a:prstGeom prst="roundRect">
-            <a:avLst>
-              <a:gd name="adj" fmla="val 50000"/>
-            </a:avLst>
-          </a:prstGeom>
-          <a:solidFill>
-            <a:srgbClr val="C0392B"/>
-          </a:solidFill>
-          <a:ln/>
-        </p:spPr>
-      </p:sp>
-      <p:sp>
-        <p:nvSpPr>
-          <p:cNvPr id="4" name="Shape 1"/>
-          <p:cNvSpPr/>
-          <p:nvPr/>
-        </p:nvSpPr>
-        <p:spPr>
-          <a:xfrm>
-            <a:off x="804672" y="1014984"/>
-            <a:ext cx="164592" cy="164592"/>
-          </a:xfrm>
-          <a:prstGeom prst="ellipse">
-            <a:avLst/>
-          </a:prstGeom>
-          <a:solidFill>
-            <a:srgbClr val="FFFFFF"/>
-          </a:solidFill>
-          <a:ln/>
-        </p:spPr>
-      </p:sp>
-      <p:sp>
-        <p:nvSpPr>
-          <p:cNvPr id="5" name="Text 2"/>
-          <p:cNvSpPr/>
-          <p:nvPr/>
-        </p:nvSpPr>
-        <p:spPr>
-          <a:xfrm>
-            <a:off x="1051560" y="822960"/>
-            <a:ext cx="2560320" cy="548640"/>
-          </a:xfrm>
-          <a:prstGeom prst="rect">
-            <a:avLst/>
-          </a:prstGeom>
-          <a:noFill/>
-          <a:ln/>
-        </p:spPr>
-        <p:txBody>
-          <a:bodyPr wrap="square" lIns="0" tIns="0" rIns="0" bIns="0" rtlCol="0" anchor="ctr"/>
-          <a:lstStyle/>
-          <a:p>
-            <a:pPr indent="0" marL="0">
-              <a:buNone/>
-            </a:pPr>
-            <a:r>
-              <a:rPr lang="en-US" sz="1700" b="1" spc="100" kern="0" dirty="0">
-                <a:solidFill>
-                  <a:srgbClr val="FFFFFF"/>
-                </a:solidFill>
-                <a:latin typeface="Inter" pitchFamily="34" charset="0"/>
-                <a:ea typeface="Inter" pitchFamily="34" charset="-122"/>
-                <a:cs typeface="Inter" pitchFamily="34" charset="-120"/>
-              </a:rPr>
-              <a:t>LIVE DEMO</a:t>
-            </a:r>
-            <a:endParaRPr lang="en-US" sz="1700" dirty="0"/>
-          </a:p>
-        </p:txBody>
-      </p:sp>
-      <p:sp>
-        <p:nvSpPr>
-          <p:cNvPr id="6" name="Text 3"/>
-          <p:cNvSpPr/>
-          <p:nvPr/>
-        </p:nvSpPr>
-        <p:spPr>
-          <a:xfrm>
-            <a:off x="548640" y="1572768"/>
-            <a:ext cx="8046720" cy="457200"/>
-          </a:xfrm>
-          <a:prstGeom prst="rect">
-            <a:avLst/>
-          </a:prstGeom>
-          <a:noFill/>
-          <a:ln/>
-        </p:spPr>
-        <p:txBody>
-          <a:bodyPr wrap="square" lIns="0" tIns="0" rIns="0" bIns="0" rtlCol="0" anchor="ctr"/>
-          <a:lstStyle/>
-          <a:p>
-            <a:pPr indent="0" marL="0">
-              <a:buNone/>
-            </a:pPr>
-            <a:r>
-              <a:rPr lang="en-US" sz="2500" b="1" dirty="0">
-                <a:solidFill>
-                  <a:srgbClr val="141413"/>
-                </a:solidFill>
-                <a:latin typeface="Georgia" pitchFamily="34" charset="0"/>
-                <a:ea typeface="Georgia" pitchFamily="34" charset="-122"/>
-                <a:cs typeface="Georgia" pitchFamily="34" charset="-120"/>
-              </a:rPr>
-              <a:t>Register the server with Claude Code</a:t>
-            </a:r>
-            <a:endParaRPr lang="en-US" sz="2500" dirty="0"/>
-          </a:p>
-        </p:txBody>
-      </p:sp>
-      <p:sp>
-        <p:nvSpPr>
-          <p:cNvPr id="7" name="Text 4"/>
-          <p:cNvSpPr/>
-          <p:nvPr/>
-        </p:nvSpPr>
-        <p:spPr>
-          <a:xfrm>
-            <a:off x="548640" y="2048256"/>
-            <a:ext cx="8046720" cy="365760"/>
-          </a:xfrm>
-          <a:prstGeom prst="rect">
-            <a:avLst/>
-          </a:prstGeom>
-          <a:noFill/>
-          <a:ln/>
-        </p:spPr>
-        <p:txBody>
-          <a:bodyPr wrap="square" lIns="0" tIns="0" rIns="0" bIns="0" rtlCol="0" anchor="ctr"/>
-          <a:lstStyle/>
-          <a:p>
-            <a:pPr indent="0" marL="0">
-              <a:buNone/>
-            </a:pPr>
-            <a:r>
-              <a:rPr lang="en-US" sz="1500" b="1" dirty="0">
-                <a:solidFill>
-                  <a:srgbClr val="C25E40"/>
-                </a:solidFill>
-                <a:latin typeface="Inter" pitchFamily="34" charset="0"/>
-                <a:ea typeface="Inter" pitchFamily="34" charset="-122"/>
-                <a:cs typeface="Inter" pitchFamily="34" charset="-120"/>
-              </a:rPr>
-              <a:t>From your server to a live tool call on real data</a:t>
-            </a:r>
-            <a:endParaRPr lang="en-US" sz="1500" dirty="0"/>
-          </a:p>
-        </p:txBody>
-      </p:sp>
-      <p:sp>
-        <p:nvSpPr>
-          <p:cNvPr id="8" name="Shape 5"/>
-          <p:cNvSpPr/>
-          <p:nvPr/>
-        </p:nvSpPr>
-        <p:spPr>
-          <a:xfrm>
-            <a:off x="548640" y="2542032"/>
-            <a:ext cx="4114800" cy="960120"/>
-          </a:xfrm>
-          <a:prstGeom prst="roundRect">
-            <a:avLst>
-              <a:gd name="adj" fmla="val 7619"/>
-            </a:avLst>
-          </a:prstGeom>
-          <a:solidFill>
-            <a:srgbClr val="1F1E1D"/>
-          </a:solidFill>
-          <a:ln/>
-          <a:effectLst>
-            <a:outerShdw sx="100000" sy="100000" kx="0" ky="0" algn="bl" rotWithShape="0" blurRad="88900" dist="38100" dir="5400000">
-              <a:srgbClr val="000000">
-                <a:alpha val="10000"/>
-              </a:srgbClr>
-            </a:outerShdw>
-          </a:effectLst>
-        </p:spPr>
-      </p:sp>
-      <p:sp>
-        <p:nvSpPr>
-          <p:cNvPr id="9" name="Text 6"/>
-          <p:cNvSpPr/>
-          <p:nvPr/>
-        </p:nvSpPr>
-        <p:spPr>
-          <a:xfrm>
-            <a:off x="841248" y="2798064"/>
-            <a:ext cx="3566160" cy="502920"/>
-          </a:xfrm>
-          <a:prstGeom prst="rect">
-            <a:avLst/>
-          </a:prstGeom>
-          <a:noFill/>
-          <a:ln/>
-        </p:spPr>
-        <p:txBody>
-          <a:bodyPr wrap="square" lIns="0" tIns="0" rIns="0" bIns="0" rtlCol="0" anchor="t"/>
-          <a:lstStyle/>
-          <a:p>
-            <a:pPr indent="0" marL="0">
-              <a:lnSpc>
-                <a:spcPct val="128000"/>
-              </a:lnSpc>
-              <a:buNone/>
-            </a:pPr>
-            <a:r>
-              <a:rPr lang="en-US" sz="1250" b="1" dirty="0">
-                <a:solidFill>
-                  <a:srgbClr val="D97757"/>
-                </a:solidFill>
-                <a:latin typeface="Courier New" pitchFamily="34" charset="0"/>
-                <a:ea typeface="Courier New" pitchFamily="34" charset="-122"/>
-                <a:cs typeface="Courier New" pitchFamily="34" charset="-120"/>
-              </a:rPr>
-              <a:t>$ </a:t>
-            </a:r>
-            <a:pPr indent="0" marL="0">
-              <a:lnSpc>
-                <a:spcPct val="128000"/>
-              </a:lnSpc>
-              <a:buNone/>
-            </a:pPr>
-            <a:r>
-              <a:rPr lang="en-US" sz="1250" dirty="0">
-                <a:solidFill>
-                  <a:srgbClr val="E9E5DD"/>
-                </a:solidFill>
-                <a:latin typeface="Courier New" pitchFamily="34" charset="0"/>
-                <a:ea typeface="Courier New" pitchFamily="34" charset="-122"/>
-                <a:cs typeface="Courier New" pitchFamily="34" charset="-120"/>
-              </a:rPr>
-              <a:t>claude mcp list</a:t>
-            </a:r>
-            <a:endParaRPr lang="en-US" sz="1250" dirty="0"/>
-          </a:p>
-          <a:p>
-            <a:pPr indent="0" marL="0">
-              <a:lnSpc>
-                <a:spcPct val="128000"/>
-              </a:lnSpc>
-              <a:buNone/>
-            </a:pPr>
-            <a:r>
-              <a:rPr lang="en-US" sz="1250" dirty="0">
-                <a:solidFill>
-                  <a:srgbClr val="7FB87A"/>
-                </a:solidFill>
-                <a:latin typeface="Courier New" pitchFamily="34" charset="0"/>
-                <a:ea typeface="Courier New" pitchFamily="34" charset="-122"/>
-                <a:cs typeface="Courier New" pitchFamily="34" charset="-120"/>
-              </a:rPr>
-              <a:t>booktracker  ✓ connected</a:t>
-            </a:r>
-            <a:endParaRPr lang="en-US" sz="1250" dirty="0"/>
-          </a:p>
-        </p:txBody>
-      </p:sp>
-      <p:sp>
-        <p:nvSpPr>
-          <p:cNvPr id="10" name="Shape 7"/>
-          <p:cNvSpPr/>
-          <p:nvPr/>
-        </p:nvSpPr>
-        <p:spPr>
-          <a:xfrm>
-            <a:off x="4983480" y="2624328"/>
-            <a:ext cx="274320" cy="274320"/>
-          </a:xfrm>
-          <a:prstGeom prst="ellipse">
-            <a:avLst/>
-          </a:prstGeom>
-          <a:solidFill>
-            <a:srgbClr val="C0392B"/>
-          </a:solidFill>
-          <a:ln/>
-        </p:spPr>
-      </p:sp>
-      <p:pic>
-        <p:nvPicPr>
-          <p:cNvPr id="11" name="Image 1" descr="preencoded.png">    </p:cNvPr>
+          <p:cNvPr id="2" name="Image 0" descr="preencoded.png"/>
           <p:cNvPicPr>
             <a:picLocks noChangeAspect="1"/>
           </p:cNvPicPr>
@@ -8956,8 +8200,8 @@
         </p:blipFill>
         <p:spPr>
           <a:xfrm>
-            <a:off x="5054803" y="2695651"/>
-            <a:ext cx="131674" cy="131674"/>
+            <a:off x="8321040" y="402336"/>
+            <a:ext cx="329184" cy="329184"/>
           </a:xfrm>
           <a:prstGeom prst="rect">
             <a:avLst/>
@@ -8966,66 +8210,316 @@
       </p:pic>
       <p:sp>
         <p:nvSpPr>
-          <p:cNvPr id="12" name="Text 8"/>
-          <p:cNvSpPr/>
-          <p:nvPr/>
-        </p:nvSpPr>
-        <p:spPr>
-          <a:xfrm>
-            <a:off x="5367528" y="2606040"/>
-            <a:ext cx="3566160" cy="310896"/>
-          </a:xfrm>
-          <a:prstGeom prst="rect">
-            <a:avLst/>
-          </a:prstGeom>
-          <a:noFill/>
-          <a:ln/>
-        </p:spPr>
-        <p:txBody>
-          <a:bodyPr wrap="square" lIns="0" tIns="0" rIns="0" bIns="0" rtlCol="0" anchor="ctr"/>
-          <a:lstStyle/>
-          <a:p>
-            <a:pPr indent="0" marL="0">
-              <a:buNone/>
-            </a:pPr>
-            <a:r>
-              <a:rPr lang="en-US" sz="1350" dirty="0">
-                <a:solidFill>
-                  <a:srgbClr val="141413"/>
-                </a:solidFill>
-                <a:latin typeface="Inter" pitchFamily="34" charset="0"/>
-                <a:ea typeface="Inter" pitchFamily="34" charset="-122"/>
-                <a:cs typeface="Inter" pitchFamily="34" charset="-120"/>
-              </a:rPr>
-              <a:t>Register the running server</a:t>
-            </a:r>
-            <a:endParaRPr lang="en-US" sz="1350" dirty="0"/>
-          </a:p>
-        </p:txBody>
-      </p:sp>
-      <p:sp>
-        <p:nvSpPr>
-          <p:cNvPr id="13" name="Shape 9"/>
-          <p:cNvSpPr/>
-          <p:nvPr/>
-        </p:nvSpPr>
-        <p:spPr>
-          <a:xfrm>
-            <a:off x="4983480" y="2990088"/>
-            <a:ext cx="274320" cy="274320"/>
-          </a:xfrm>
-          <a:prstGeom prst="ellipse">
-            <a:avLst/>
+          <p:cNvPr id="3" name="Shape 0"/>
+          <p:cNvSpPr/>
+          <p:nvPr/>
+        </p:nvSpPr>
+        <p:spPr>
+          <a:xfrm>
+            <a:off x="548640" y="822960"/>
+            <a:ext cx="3200400" cy="548640"/>
+          </a:xfrm>
+          <a:prstGeom prst="roundRect">
+            <a:avLst>
+              <a:gd name="adj" fmla="val 50000"/>
+            </a:avLst>
           </a:prstGeom>
           <a:solidFill>
             <a:srgbClr val="C0392B"/>
           </a:solidFill>
           <a:ln/>
         </p:spPr>
+        <p:txBody>
+          <a:bodyPr/>
+          <a:lstStyle/>
+          <a:p>
+            <a:endParaRPr lang="en-US"/>
+          </a:p>
+        </p:txBody>
+      </p:sp>
+      <p:sp>
+        <p:nvSpPr>
+          <p:cNvPr id="4" name="Shape 1"/>
+          <p:cNvSpPr/>
+          <p:nvPr/>
+        </p:nvSpPr>
+        <p:spPr>
+          <a:xfrm>
+            <a:off x="804672" y="1014984"/>
+            <a:ext cx="164592" cy="164592"/>
+          </a:xfrm>
+          <a:prstGeom prst="ellipse">
+            <a:avLst/>
+          </a:prstGeom>
+          <a:solidFill>
+            <a:srgbClr val="FFFFFF"/>
+          </a:solidFill>
+          <a:ln/>
+        </p:spPr>
+        <p:txBody>
+          <a:bodyPr/>
+          <a:lstStyle/>
+          <a:p>
+            <a:endParaRPr lang="en-US"/>
+          </a:p>
+        </p:txBody>
+      </p:sp>
+      <p:sp>
+        <p:nvSpPr>
+          <p:cNvPr id="5" name="Text 2"/>
+          <p:cNvSpPr/>
+          <p:nvPr/>
+        </p:nvSpPr>
+        <p:spPr>
+          <a:xfrm>
+            <a:off x="1051560" y="822960"/>
+            <a:ext cx="2560320" cy="548640"/>
+          </a:xfrm>
+          <a:prstGeom prst="rect">
+            <a:avLst/>
+          </a:prstGeom>
+          <a:noFill/>
+          <a:ln/>
+        </p:spPr>
+        <p:txBody>
+          <a:bodyPr wrap="square" lIns="0" tIns="0" rIns="0" bIns="0" rtlCol="0" anchor="ctr"/>
+          <a:lstStyle/>
+          <a:p>
+            <a:pPr marL="0" indent="0">
+              <a:buNone/>
+            </a:pPr>
+            <a:r>
+              <a:rPr lang="en-US" sz="1700" b="1" kern="0" spc="100" dirty="0">
+                <a:solidFill>
+                  <a:srgbClr val="FFFFFF"/>
+                </a:solidFill>
+                <a:latin typeface="Inter" pitchFamily="34" charset="0"/>
+                <a:ea typeface="Inter" pitchFamily="34" charset="-122"/>
+                <a:cs typeface="Inter" pitchFamily="34" charset="-120"/>
+              </a:rPr>
+              <a:t>LIVE DEMO</a:t>
+            </a:r>
+            <a:endParaRPr lang="en-US" sz="1700" dirty="0"/>
+          </a:p>
+        </p:txBody>
+      </p:sp>
+      <p:sp>
+        <p:nvSpPr>
+          <p:cNvPr id="6" name="Text 3"/>
+          <p:cNvSpPr/>
+          <p:nvPr/>
+        </p:nvSpPr>
+        <p:spPr>
+          <a:xfrm>
+            <a:off x="548640" y="1572768"/>
+            <a:ext cx="8046720" cy="457200"/>
+          </a:xfrm>
+          <a:prstGeom prst="rect">
+            <a:avLst/>
+          </a:prstGeom>
+          <a:noFill/>
+          <a:ln/>
+        </p:spPr>
+        <p:txBody>
+          <a:bodyPr wrap="square" lIns="0" tIns="0" rIns="0" bIns="0" rtlCol="0" anchor="ctr"/>
+          <a:lstStyle/>
+          <a:p>
+            <a:pPr marL="0" indent="0">
+              <a:buNone/>
+            </a:pPr>
+            <a:r>
+              <a:rPr lang="en-US" sz="2500" b="1" dirty="0">
+                <a:solidFill>
+                  <a:srgbClr val="141413"/>
+                </a:solidFill>
+                <a:latin typeface="Georgia" pitchFamily="34" charset="0"/>
+                <a:ea typeface="Georgia" pitchFamily="34" charset="-122"/>
+                <a:cs typeface="Georgia" pitchFamily="34" charset="-120"/>
+              </a:rPr>
+              <a:t>Register the server with Claude Code</a:t>
+            </a:r>
+            <a:endParaRPr lang="en-US" sz="2500" dirty="0"/>
+          </a:p>
+        </p:txBody>
+      </p:sp>
+      <p:sp>
+        <p:nvSpPr>
+          <p:cNvPr id="7" name="Text 4"/>
+          <p:cNvSpPr/>
+          <p:nvPr/>
+        </p:nvSpPr>
+        <p:spPr>
+          <a:xfrm>
+            <a:off x="548640" y="2048256"/>
+            <a:ext cx="8046720" cy="365760"/>
+          </a:xfrm>
+          <a:prstGeom prst="rect">
+            <a:avLst/>
+          </a:prstGeom>
+          <a:noFill/>
+          <a:ln/>
+        </p:spPr>
+        <p:txBody>
+          <a:bodyPr wrap="square" lIns="0" tIns="0" rIns="0" bIns="0" rtlCol="0" anchor="ctr"/>
+          <a:lstStyle/>
+          <a:p>
+            <a:pPr marL="0" indent="0">
+              <a:buNone/>
+            </a:pPr>
+            <a:r>
+              <a:rPr lang="en-US" sz="1500" b="1" dirty="0">
+                <a:solidFill>
+                  <a:srgbClr val="C25E40"/>
+                </a:solidFill>
+                <a:latin typeface="Inter" pitchFamily="34" charset="0"/>
+                <a:ea typeface="Inter" pitchFamily="34" charset="-122"/>
+                <a:cs typeface="Inter" pitchFamily="34" charset="-120"/>
+              </a:rPr>
+              <a:t>From your server to a live tool call on real data</a:t>
+            </a:r>
+            <a:endParaRPr lang="en-US" sz="1500" dirty="0"/>
+          </a:p>
+        </p:txBody>
+      </p:sp>
+      <p:sp>
+        <p:nvSpPr>
+          <p:cNvPr id="8" name="Shape 5"/>
+          <p:cNvSpPr/>
+          <p:nvPr/>
+        </p:nvSpPr>
+        <p:spPr>
+          <a:xfrm>
+            <a:off x="548640" y="2542032"/>
+            <a:ext cx="4114800" cy="960120"/>
+          </a:xfrm>
+          <a:prstGeom prst="roundRect">
+            <a:avLst>
+              <a:gd name="adj" fmla="val 7619"/>
+            </a:avLst>
+          </a:prstGeom>
+          <a:solidFill>
+            <a:srgbClr val="1F1E1D"/>
+          </a:solidFill>
+          <a:ln/>
+          <a:effectLst>
+            <a:outerShdw blurRad="88900" dist="38100" dir="5400000" algn="bl" rotWithShape="0">
+              <a:srgbClr val="000000">
+                <a:alpha val="10000"/>
+              </a:srgbClr>
+            </a:outerShdw>
+          </a:effectLst>
+        </p:spPr>
+        <p:txBody>
+          <a:bodyPr/>
+          <a:lstStyle/>
+          <a:p>
+            <a:endParaRPr lang="en-US"/>
+          </a:p>
+        </p:txBody>
+      </p:sp>
+      <p:sp>
+        <p:nvSpPr>
+          <p:cNvPr id="9" name="Text 6"/>
+          <p:cNvSpPr/>
+          <p:nvPr/>
+        </p:nvSpPr>
+        <p:spPr>
+          <a:xfrm>
+            <a:off x="841248" y="2798064"/>
+            <a:ext cx="3566160" cy="502920"/>
+          </a:xfrm>
+          <a:prstGeom prst="rect">
+            <a:avLst/>
+          </a:prstGeom>
+          <a:noFill/>
+          <a:ln/>
+        </p:spPr>
+        <p:txBody>
+          <a:bodyPr wrap="square" lIns="0" tIns="0" rIns="0" bIns="0" rtlCol="0" anchor="t"/>
+          <a:lstStyle/>
+          <a:p>
+            <a:pPr marL="0" indent="0">
+              <a:lnSpc>
+                <a:spcPct val="128000"/>
+              </a:lnSpc>
+              <a:buNone/>
+            </a:pPr>
+            <a:r>
+              <a:rPr lang="en-US" sz="1250" b="1" dirty="0">
+                <a:solidFill>
+                  <a:srgbClr val="D97757"/>
+                </a:solidFill>
+                <a:latin typeface="Courier New" pitchFamily="34" charset="0"/>
+                <a:ea typeface="Courier New" pitchFamily="34" charset="-122"/>
+                <a:cs typeface="Courier New" pitchFamily="34" charset="-120"/>
+              </a:rPr>
+              <a:t>$ </a:t>
+            </a:r>
+            <a:r>
+              <a:rPr lang="en-US" sz="1250" dirty="0">
+                <a:solidFill>
+                  <a:srgbClr val="E9E5DD"/>
+                </a:solidFill>
+                <a:latin typeface="Courier New" pitchFamily="34" charset="0"/>
+                <a:ea typeface="Courier New" pitchFamily="34" charset="-122"/>
+                <a:cs typeface="Courier New" pitchFamily="34" charset="-120"/>
+              </a:rPr>
+              <a:t>claude mcp list</a:t>
+            </a:r>
+            <a:endParaRPr lang="en-US" sz="1250" dirty="0"/>
+          </a:p>
+          <a:p>
+            <a:pPr marL="0" indent="0">
+              <a:lnSpc>
+                <a:spcPct val="128000"/>
+              </a:lnSpc>
+              <a:buNone/>
+            </a:pPr>
+            <a:r>
+              <a:rPr lang="en-US" sz="1250" dirty="0">
+                <a:solidFill>
+                  <a:srgbClr val="7FB87A"/>
+                </a:solidFill>
+                <a:latin typeface="Courier New" pitchFamily="34" charset="0"/>
+                <a:ea typeface="Courier New" pitchFamily="34" charset="-122"/>
+                <a:cs typeface="Courier New" pitchFamily="34" charset="-120"/>
+              </a:rPr>
+              <a:t>booktracker  ✓ connected</a:t>
+            </a:r>
+            <a:endParaRPr lang="en-US" sz="1250" dirty="0"/>
+          </a:p>
+        </p:txBody>
+      </p:sp>
+      <p:sp>
+        <p:nvSpPr>
+          <p:cNvPr id="10" name="Shape 7"/>
+          <p:cNvSpPr/>
+          <p:nvPr/>
+        </p:nvSpPr>
+        <p:spPr>
+          <a:xfrm>
+            <a:off x="4983480" y="2624328"/>
+            <a:ext cx="274320" cy="274320"/>
+          </a:xfrm>
+          <a:prstGeom prst="ellipse">
+            <a:avLst/>
+          </a:prstGeom>
+          <a:solidFill>
+            <a:srgbClr val="C0392B"/>
+          </a:solidFill>
+          <a:ln/>
+        </p:spPr>
+        <p:txBody>
+          <a:bodyPr/>
+          <a:lstStyle/>
+          <a:p>
+            <a:endParaRPr lang="en-US"/>
+          </a:p>
+        </p:txBody>
       </p:sp>
       <p:pic>
         <p:nvPicPr>
-          <p:cNvPr id="14" name="Image 2" descr="preencoded.png">    </p:cNvPr>
+          <p:cNvPr id="11" name="Image 1" descr="preencoded.png"/>
           <p:cNvPicPr>
             <a:picLocks noChangeAspect="1"/>
           </p:cNvPicPr>
@@ -9039,7 +8533,7 @@
         </p:blipFill>
         <p:spPr>
           <a:xfrm>
-            <a:off x="5054803" y="3061411"/>
+            <a:off x="5054803" y="2695651"/>
             <a:ext cx="131674" cy="131674"/>
           </a:xfrm>
           <a:prstGeom prst="rect">
@@ -9049,13 +8543,13 @@
       </p:pic>
       <p:sp>
         <p:nvSpPr>
-          <p:cNvPr id="15" name="Text 10"/>
-          <p:cNvSpPr/>
-          <p:nvPr/>
-        </p:nvSpPr>
-        <p:spPr>
-          <a:xfrm>
-            <a:off x="5367528" y="2971800"/>
+          <p:cNvPr id="12" name="Text 8"/>
+          <p:cNvSpPr/>
+          <p:nvPr/>
+        </p:nvSpPr>
+        <p:spPr>
+          <a:xfrm>
+            <a:off x="5367528" y="2606040"/>
             <a:ext cx="3566160" cy="310896"/>
           </a:xfrm>
           <a:prstGeom prst="rect">
@@ -9068,7 +8562,7 @@
           <a:bodyPr wrap="square" lIns="0" tIns="0" rIns="0" bIns="0" rtlCol="0" anchor="ctr"/>
           <a:lstStyle/>
           <a:p>
-            <a:pPr indent="0" marL="0">
+            <a:pPr marL="0" indent="0">
               <a:buNone/>
             </a:pPr>
             <a:r>
@@ -9080,7 +8574,7 @@
                 <a:ea typeface="Inter" pitchFamily="34" charset="-122"/>
                 <a:cs typeface="Inter" pitchFamily="34" charset="-120"/>
               </a:rPr>
-              <a:t>Run claude mcp list</a:t>
+              <a:t>Register the running server</a:t>
             </a:r>
             <a:endParaRPr lang="en-US" sz="1350" dirty="0"/>
           </a:p>
@@ -9088,13 +8582,13 @@
       </p:sp>
       <p:sp>
         <p:nvSpPr>
-          <p:cNvPr id="16" name="Shape 11"/>
-          <p:cNvSpPr/>
-          <p:nvPr/>
-        </p:nvSpPr>
-        <p:spPr>
-          <a:xfrm>
-            <a:off x="4983480" y="3355848"/>
+          <p:cNvPr id="13" name="Shape 9"/>
+          <p:cNvSpPr/>
+          <p:nvPr/>
+        </p:nvSpPr>
+        <p:spPr>
+          <a:xfrm>
+            <a:off x="4983480" y="2990088"/>
             <a:ext cx="274320" cy="274320"/>
           </a:xfrm>
           <a:prstGeom prst="ellipse">
@@ -9105,23 +8599,120 @@
           </a:solidFill>
           <a:ln/>
         </p:spPr>
+        <p:txBody>
+          <a:bodyPr/>
+          <a:lstStyle/>
+          <a:p>
+            <a:endParaRPr lang="en-US"/>
+          </a:p>
+        </p:txBody>
       </p:sp>
       <p:pic>
         <p:nvPicPr>
-          <p:cNvPr id="17" name="Image 3" descr="preencoded.png">    </p:cNvPr>
+          <p:cNvPr id="14" name="Image 2" descr="preencoded.png"/>
           <p:cNvPicPr>
             <a:picLocks noChangeAspect="1"/>
           </p:cNvPicPr>
           <p:nvPr/>
         </p:nvPicPr>
         <p:blipFill>
-          <a:blip r:embed="rId4"/>
+          <a:blip r:embed="rId3"/>
           <a:stretch>
             <a:fillRect/>
           </a:stretch>
         </p:blipFill>
         <p:spPr>
           <a:xfrm>
+            <a:off x="5054803" y="3061411"/>
+            <a:ext cx="131674" cy="131674"/>
+          </a:xfrm>
+          <a:prstGeom prst="rect">
+            <a:avLst/>
+          </a:prstGeom>
+        </p:spPr>
+      </p:pic>
+      <p:sp>
+        <p:nvSpPr>
+          <p:cNvPr id="15" name="Text 10"/>
+          <p:cNvSpPr/>
+          <p:nvPr/>
+        </p:nvSpPr>
+        <p:spPr>
+          <a:xfrm>
+            <a:off x="5367528" y="2971800"/>
+            <a:ext cx="3566160" cy="310896"/>
+          </a:xfrm>
+          <a:prstGeom prst="rect">
+            <a:avLst/>
+          </a:prstGeom>
+          <a:noFill/>
+          <a:ln/>
+        </p:spPr>
+        <p:txBody>
+          <a:bodyPr wrap="square" lIns="0" tIns="0" rIns="0" bIns="0" rtlCol="0" anchor="ctr"/>
+          <a:lstStyle/>
+          <a:p>
+            <a:pPr marL="0" indent="0">
+              <a:buNone/>
+            </a:pPr>
+            <a:r>
+              <a:rPr lang="en-US" sz="1350" dirty="0">
+                <a:solidFill>
+                  <a:srgbClr val="141413"/>
+                </a:solidFill>
+                <a:latin typeface="Inter" pitchFamily="34" charset="0"/>
+                <a:ea typeface="Inter" pitchFamily="34" charset="-122"/>
+                <a:cs typeface="Inter" pitchFamily="34" charset="-120"/>
+              </a:rPr>
+              <a:t>Run claude mcp list</a:t>
+            </a:r>
+            <a:endParaRPr lang="en-US" sz="1350" dirty="0"/>
+          </a:p>
+        </p:txBody>
+      </p:sp>
+      <p:sp>
+        <p:nvSpPr>
+          <p:cNvPr id="16" name="Shape 11"/>
+          <p:cNvSpPr/>
+          <p:nvPr/>
+        </p:nvSpPr>
+        <p:spPr>
+          <a:xfrm>
+            <a:off x="4983480" y="3355848"/>
+            <a:ext cx="274320" cy="274320"/>
+          </a:xfrm>
+          <a:prstGeom prst="ellipse">
+            <a:avLst/>
+          </a:prstGeom>
+          <a:solidFill>
+            <a:srgbClr val="C0392B"/>
+          </a:solidFill>
+          <a:ln/>
+        </p:spPr>
+        <p:txBody>
+          <a:bodyPr/>
+          <a:lstStyle/>
+          <a:p>
+            <a:endParaRPr lang="en-US"/>
+          </a:p>
+        </p:txBody>
+      </p:sp>
+      <p:pic>
+        <p:nvPicPr>
+          <p:cNvPr id="17" name="Image 3" descr="preencoded.png"/>
+          <p:cNvPicPr>
+            <a:picLocks noChangeAspect="1"/>
+          </p:cNvPicPr>
+          <p:nvPr/>
+        </p:nvPicPr>
+        <p:blipFill>
+          <a:blip r:embed="rId3"/>
+          <a:stretch>
+            <a:fillRect/>
+          </a:stretch>
+        </p:blipFill>
+        <p:spPr>
+          <a:xfrm>
             <a:off x="5054803" y="3427171"/>
             <a:ext cx="131674" cy="131674"/>
           </a:xfrm>
@@ -9151,7 +8742,7 @@
           <a:bodyPr wrap="square" lIns="0" tIns="0" rIns="0" bIns="0" rtlCol="0" anchor="ctr"/>
           <a:lstStyle/>
           <a:p>
-            <a:pPr indent="0" marL="0">
+            <a:pPr marL="0" indent="0">
               <a:buNone/>
             </a:pPr>
             <a:r>
@@ -9190,6 +8781,13 @@
           </a:solidFill>
           <a:ln/>
         </p:spPr>
+        <p:txBody>
+          <a:bodyPr/>
+          <a:lstStyle/>
+          <a:p>
+            <a:endParaRPr lang="en-US"/>
+          </a:p>
+        </p:txBody>
       </p:sp>
       <p:sp>
         <p:nvSpPr>
@@ -9212,7 +8810,7 @@
           <a:bodyPr wrap="square" lIns="0" tIns="0" rIns="0" bIns="0" rtlCol="0" anchor="ctr"/>
           <a:lstStyle/>
           <a:p>
-            <a:pPr indent="0" marL="0">
+            <a:pPr marL="0" indent="0">
               <a:buNone/>
             </a:pPr>
             <a:r>
@@ -9226,9 +8824,6 @@
               </a:rPr>
               <a:t>Watch for it:  </a:t>
             </a:r>
-            <a:pPr indent="0" marL="0">
-              <a:buNone/>
-            </a:pPr>
             <a:r>
               <a:rPr lang="en-US" sz="1250" dirty="0">
                 <a:solidFill>
@@ -9265,7 +8860,7 @@
           <a:bodyPr wrap="square" rtlCol="0" anchor="ctr"/>
           <a:lstStyle/>
           <a:p>
-            <a:pPr indent="0" marL="0">
+            <a:pPr marL="0" indent="0">
               <a:buNone/>
             </a:pPr>
             <a:r>
@@ -9304,7 +8899,7 @@
           <a:bodyPr wrap="square" rtlCol="0" anchor="ctr"/>
           <a:lstStyle/>
           <a:p>
-            <a:pPr algn="r" indent="0" marL="0">
+            <a:pPr marL="0" indent="0" algn="r">
               <a:buNone/>
             </a:pPr>
             <a:r>
@@ -9319,45 +8914,6 @@
               <a:t>Day 2 · Section 4  ·  9/11</a:t>
             </a:r>
             <a:endParaRPr lang="en-US" sz="900" dirty="0"/>
-          </a:p>
-        </p:txBody>
-      </p:sp>
-      <p:sp>
-        <p:nvSpPr>
-          <p:cNvPr id="23" name="Text 17"/>
-          <p:cNvSpPr/>
-          <p:nvPr/>
-        </p:nvSpPr>
-        <p:spPr>
-          <a:xfrm>
-            <a:off x="548640" y="4462272"/>
-            <a:ext cx="8046720" cy="274320"/>
-          </a:xfrm>
-          <a:prstGeom prst="rect">
-            <a:avLst/>
-          </a:prstGeom>
-          <a:noFill/>
-          <a:ln/>
-        </p:spPr>
-        <p:txBody>
-          <a:bodyPr wrap="square" lIns="0" tIns="0" rIns="0" bIns="0" rtlCol="0" anchor="ctr"/>
-          <a:lstStyle/>
-          <a:p>
-            <a:pPr indent="0" marL="0">
-              <a:buNone/>
-            </a:pPr>
-            <a:r>
-              <a:rPr lang="en-US" sz="1000" i="1" dirty="0">
-                <a:solidFill>
-                  <a:srgbClr val="615C52"/>
-                </a:solidFill>
-                <a:latin typeface="Inter" pitchFamily="34" charset="0"/>
-                <a:ea typeface="Inter" pitchFamily="34" charset="-122"/>
-                <a:cs typeface="Inter" pitchFamily="34" charset="-120"/>
-              </a:rPr>
-              <a:t>▸ The moment of truth — Claude discovers and calls your C# tool live.</a:t>
-            </a:r>
-            <a:endParaRPr lang="en-US" sz="1000" dirty="0"/>
           </a:p>
         </p:txBody>
       </p:sp>

--- a/decks/Day 2/Day2-Section4-MCP-Servers-CSharp.pptx
+++ b/decks/Day 2/Day2-Section4-MCP-Servers-CSharp.pptx
@@ -665,45 +665,6 @@
           </a:p>
         </p:txBody>
       </p:sp>
-      <p:sp>
-        <p:nvSpPr>
-          <p:cNvPr id="8" name="Text 5"/>
-          <p:cNvSpPr/>
-          <p:nvPr/>
-        </p:nvSpPr>
-        <p:spPr>
-          <a:xfrm>
-            <a:off x="640080" y="3639312"/>
-            <a:ext cx="7315200" cy="365760"/>
-          </a:xfrm>
-          <a:prstGeom prst="rect">
-            <a:avLst/>
-          </a:prstGeom>
-          <a:noFill/>
-          <a:ln/>
-        </p:spPr>
-        <p:txBody>
-          <a:bodyPr wrap="square" lIns="0" tIns="0" rIns="0" bIns="0" rtlCol="0" anchor="ctr"/>
-          <a:lstStyle/>
-          <a:p>
-            <a:pPr marL="0" indent="0">
-              <a:buNone/>
-            </a:pPr>
-            <a:r>
-              <a:rPr lang="en-US" sz="1600" dirty="0">
-                <a:solidFill>
-                  <a:srgbClr val="615C52"/>
-                </a:solidFill>
-                <a:latin typeface="Inter" pitchFamily="34" charset="0"/>
-                <a:ea typeface="Inter" pitchFamily="34" charset="-122"/>
-                <a:cs typeface="Inter" pitchFamily="34" charset="-120"/>
-              </a:rPr>
-              <a:t>60 min  ·  30 lecture / demo  +  30 lab</a:t>
-            </a:r>
-            <a:endParaRPr lang="en-US" sz="1600" dirty="0"/>
-          </a:p>
-        </p:txBody>
-      </p:sp>
     </p:spTree>
   </p:cSld>
   <p:clrMapOvr>
